--- a/docs/final_presentation.pptx
+++ b/docs/final_presentation.pptx
@@ -2468,7 +2468,7 @@
                 <a:ea typeface="Calibri" pitchFamily="34" charset="-122"/>
                 <a:cs typeface="Calibri" pitchFamily="34" charset="-120"/>
               </a:rPr>
-              <a:t>EDA — GENRE × TIMING</a:t>
+              <a:t>MACHINE LEARNING</a:t>
             </a:r>
             <a:endParaRPr lang="en-US" sz="1200" dirty="0"/>
           </a:p>
@@ -2507,7 +2507,7 @@
                 <a:ea typeface="Georgia" pitchFamily="34" charset="-122"/>
                 <a:cs typeface="Georgia" pitchFamily="34" charset="-120"/>
               </a:rPr>
-              <a:t>The right genre in the right window</a:t>
+              <a:t>Results — all models beat the baseline</a:t>
             </a:r>
             <a:endParaRPr lang="en-US" sz="2800" dirty="0"/>
           </a:p>
@@ -2515,7 +2515,7 @@
       </p:sp>
       <p:pic>
         <p:nvPicPr>
-          <p:cNvPr id="4" name="Image 0" descr="/sessions/optimistic-determined-edison/mnt/outputs/UMBC-DATA606-Capstone/docs/figures/genre_timing_comparison.png">    </p:cNvPr>
+          <p:cNvPr id="4" name="Image 0" descr="/sessions/optimistic-determined-edison/mnt/outputs/UMBC-DATA606-Capstone/docs/figures/model_comparison.png">    </p:cNvPr>
           <p:cNvPicPr>
             <a:picLocks noChangeAspect="1"/>
           </p:cNvPicPr>
@@ -2529,7 +2529,7 @@
         <p:spPr>
           <a:xfrm>
             <a:off x="640080" y="1554480"/>
-            <a:ext cx="7132320" cy="4480560"/>
+            <a:ext cx="6949440" cy="4480560"/>
           </a:xfrm>
           <a:prstGeom prst="rect">
             <a:avLst/>
@@ -2544,8 +2544,8 @@
         </p:nvSpPr>
         <p:spPr>
           <a:xfrm>
-            <a:off x="7955280" y="2103120"/>
-            <a:ext cx="3657600" cy="3291840"/>
+            <a:off x="7863840" y="2011680"/>
+            <a:ext cx="3749040" cy="3474720"/>
           </a:xfrm>
           <a:prstGeom prst="rect">
             <a:avLst/>
@@ -2565,15 +2565,15 @@
               <a:buChar char="•"/>
             </a:pPr>
             <a:r>
-              <a:rPr lang="en-US" sz="1500" dirty="0">
-                <a:solidFill>
-                  <a:srgbClr val="33373F"/>
-                </a:solidFill>
-                <a:latin typeface="Calibri" pitchFamily="34" charset="0"/>
-                <a:ea typeface="Calibri" pitchFamily="34" charset="-122"/>
-                <a:cs typeface="Calibri" pitchFamily="34" charset="-120"/>
-              </a:rPr>
-              <a:t>Action/Adventure in summer: 64% vs 50% the rest of the year (+14 pts).</a:t>
+              <a:rPr lang="en-US" sz="1500" b="1" dirty="0">
+                <a:solidFill>
+                  <a:srgbClr val="1A1A2E"/>
+                </a:solidFill>
+                <a:latin typeface="Calibri" pitchFamily="34" charset="0"/>
+                <a:ea typeface="Calibri" pitchFamily="34" charset="-122"/>
+                <a:cs typeface="Calibri" pitchFamily="34" charset="-120"/>
+              </a:rPr>
+              <a:t>Best held-out test: 68% accuracy, 0.715 ROC-AUC (baseline: 56%).</a:t>
             </a:r>
             <a:endParaRPr lang="en-US" sz="1500" dirty="0"/>
           </a:p>
@@ -2594,7 +2594,7 @@
                 <a:ea typeface="Calibri" pitchFamily="34" charset="-122"/>
                 <a:cs typeface="Calibri" pitchFamily="34" charset="-120"/>
               </a:rPr>
-              <a:t>Family/Animation over the holidays: 68% vs 58% (+10 pts).</a:t>
+              <a:t>Gradient Boosting and the tuned Random Forest are essentially tied; Logistic Regression trails.</a:t>
             </a:r>
             <a:endParaRPr lang="en-US" sz="1500" dirty="0"/>
           </a:p>
@@ -2615,7 +2615,7 @@
                 <a:ea typeface="Calibri" pitchFamily="34" charset="-122"/>
                 <a:cs typeface="Calibri" pitchFamily="34" charset="-120"/>
               </a:rPr>
-              <a:t>Horror clusters in October — its single biggest release month.</a:t>
+              <a:t>High recall (~0.75): the model catches most true successes.</a:t>
             </a:r>
             <a:endParaRPr lang="en-US" sz="1500" dirty="0"/>
           </a:p>
@@ -2725,226 +2725,98 @@
                 <a:ea typeface="Georgia" pitchFamily="34" charset="-122"/>
                 <a:cs typeface="Georgia" pitchFamily="34" charset="-120"/>
               </a:rPr>
-              <a:t>Modeling approach — pre-release features only</a:t>
+              <a:t>Robustness — cross-validation and error profile</a:t>
             </a:r>
             <a:endParaRPr lang="en-US" sz="2800" dirty="0"/>
           </a:p>
         </p:txBody>
       </p:sp>
-      <p:sp>
-        <p:nvSpPr>
-          <p:cNvPr id="4" name="Text 2"/>
-          <p:cNvSpPr/>
-          <p:nvPr/>
-        </p:nvSpPr>
-        <p:spPr>
-          <a:xfrm>
-            <a:off x="640080" y="1600200"/>
-            <a:ext cx="5120640" cy="365760"/>
-          </a:xfrm>
-          <a:prstGeom prst="rect">
-            <a:avLst/>
-          </a:prstGeom>
-          <a:noFill/>
-          <a:ln/>
-        </p:spPr>
-        <p:txBody>
-          <a:bodyPr wrap="square" lIns="0" tIns="0" rIns="0" bIns="0" rtlCol="0" anchor="ctr"/>
+      <p:pic>
+        <p:nvPicPr>
+          <p:cNvPr id="4" name="Image 0" descr="/sessions/optimistic-determined-edison/mnt/outputs/UMBC-DATA606-Capstone/docs/figures/roc_curves.png">    </p:cNvPr>
+          <p:cNvPicPr>
+            <a:picLocks noChangeAspect="1"/>
+          </p:cNvPicPr>
+          <p:nvPr/>
+        </p:nvPicPr>
+        <p:blipFill>
+          <a:blip r:embed="rId1"/>
+          <a:srcRect l="0" r="0" t="0" b="0"/>
+          <a:stretch/>
+        </p:blipFill>
+        <p:spPr>
+          <a:xfrm>
+            <a:off x="548640" y="1645920"/>
+            <a:ext cx="5486400" cy="4206240"/>
+          </a:xfrm>
+          <a:prstGeom prst="rect">
+            <a:avLst/>
+          </a:prstGeom>
+        </p:spPr>
+      </p:pic>
+      <p:pic>
+        <p:nvPicPr>
+          <p:cNvPr id="5" name="Image 1" descr="/sessions/optimistic-determined-edison/mnt/outputs/UMBC-DATA606-Capstone/docs/figures/confusion_matrix.png">    </p:cNvPr>
+          <p:cNvPicPr>
+            <a:picLocks noChangeAspect="1"/>
+          </p:cNvPicPr>
+          <p:nvPr/>
+        </p:nvPicPr>
+        <p:blipFill>
+          <a:blip r:embed="rId2"/>
+          <a:srcRect l="0" r="0" t="0" b="0"/>
+          <a:stretch/>
+        </p:blipFill>
+        <p:spPr>
+          <a:xfrm>
+            <a:off x="6126480" y="1645920"/>
+            <a:ext cx="4754880" cy="4206240"/>
+          </a:xfrm>
+          <a:prstGeom prst="rect">
+            <a:avLst/>
+          </a:prstGeom>
+        </p:spPr>
+      </p:pic>
+      <p:sp>
+        <p:nvSpPr>
+          <p:cNvPr id="6" name="Text 2"/>
+          <p:cNvSpPr/>
+          <p:nvPr/>
+        </p:nvSpPr>
+        <p:spPr>
+          <a:xfrm>
+            <a:off x="640080" y="5943600"/>
+            <a:ext cx="10881360" cy="640080"/>
+          </a:xfrm>
+          <a:prstGeom prst="rect">
+            <a:avLst/>
+          </a:prstGeom>
+          <a:noFill/>
+          <a:ln/>
+        </p:spPr>
+        <p:txBody>
+          <a:bodyPr wrap="square" lIns="0" tIns="0" rIns="0" bIns="0" rtlCol="0" anchor="t"/>
           <a:lstStyle/>
           <a:p>
             <a:pPr indent="0" marL="0">
               <a:buNone/>
             </a:pPr>
             <a:r>
-              <a:rPr lang="en-US" sz="1500" b="1" dirty="0">
-                <a:solidFill>
-                  <a:srgbClr val="E50914"/>
-                </a:solidFill>
-                <a:latin typeface="Calibri" pitchFamily="34" charset="0"/>
-                <a:ea typeface="Calibri" pitchFamily="34" charset="-122"/>
-                <a:cs typeface="Calibri" pitchFamily="34" charset="-120"/>
-              </a:rPr>
-              <a:t>Features (knowable before release)</a:t>
-            </a:r>
-            <a:endParaRPr lang="en-US" sz="1500" dirty="0"/>
-          </a:p>
-        </p:txBody>
-      </p:sp>
-      <p:sp>
-        <p:nvSpPr>
-          <p:cNvPr id="5" name="Text 3"/>
-          <p:cNvSpPr/>
-          <p:nvPr/>
-        </p:nvSpPr>
-        <p:spPr>
-          <a:xfrm>
-            <a:off x="731520" y="2011680"/>
-            <a:ext cx="5120640" cy="3108960"/>
-          </a:xfrm>
-          <a:prstGeom prst="rect">
-            <a:avLst/>
-          </a:prstGeom>
-          <a:noFill/>
-          <a:ln/>
-        </p:spPr>
-        <p:txBody>
-          <a:bodyPr wrap="square" rtlCol="0" anchor="t"/>
-          <a:lstStyle/>
-          <a:p>
-            <a:pPr marL="342900" indent="-342900">
-              <a:spcAft>
-                <a:spcPts val="1000"/>
-              </a:spcAft>
-              <a:buSzPct val="100000"/>
-              <a:buChar char="•"/>
-            </a:pPr>
-            <a:r>
-              <a:rPr lang="en-US" sz="1500" dirty="0">
-                <a:solidFill>
-                  <a:srgbClr val="33373F"/>
-                </a:solidFill>
-                <a:latin typeface="Calibri" pitchFamily="34" charset="0"/>
-                <a:ea typeface="Calibri" pitchFamily="34" charset="-122"/>
-                <a:cs typeface="Calibri" pitchFamily="34" charset="-120"/>
-              </a:rPr>
-              <a:t>Budget (log) and spend intensity (budget per minute)</a:t>
-            </a:r>
-            <a:endParaRPr lang="en-US" sz="1500" dirty="0"/>
-          </a:p>
-          <a:p>
-            <a:pPr marL="342900" indent="-342900">
-              <a:spcAft>
-                <a:spcPts val="1000"/>
-              </a:spcAft>
-              <a:buSzPct val="100000"/>
-              <a:buChar char="•"/>
-            </a:pPr>
-            <a:r>
-              <a:rPr lang="en-US" sz="1500" dirty="0">
-                <a:solidFill>
-                  <a:srgbClr val="33373F"/>
-                </a:solidFill>
-                <a:latin typeface="Calibri" pitchFamily="34" charset="0"/>
-                <a:ea typeface="Calibri" pitchFamily="34" charset="-122"/>
-                <a:cs typeface="Calibri" pitchFamily="34" charset="-120"/>
-              </a:rPr>
-              <a:t>Genre, runtime, language, # studios, release year</a:t>
-            </a:r>
-            <a:endParaRPr lang="en-US" sz="1500" dirty="0"/>
-          </a:p>
-          <a:p>
-            <a:pPr marL="342900" indent="-342900">
-              <a:spcAft>
-                <a:spcPts val="1000"/>
-              </a:spcAft>
-              <a:buSzPct val="100000"/>
-              <a:buChar char="•"/>
-            </a:pPr>
-            <a:r>
-              <a:rPr lang="en-US" sz="1500" dirty="0">
-                <a:solidFill>
-                  <a:srgbClr val="33373F"/>
-                </a:solidFill>
-                <a:latin typeface="Calibri" pitchFamily="34" charset="0"/>
-                <a:ea typeface="Calibri" pitchFamily="34" charset="-122"/>
-                <a:cs typeface="Calibri" pitchFamily="34" charset="-120"/>
-              </a:rPr>
-              <a:t>Timing: month → season &amp; release window + genre-timing flags</a:t>
-            </a:r>
-            <a:endParaRPr lang="en-US" sz="1500" dirty="0"/>
-          </a:p>
-          <a:p>
-            <a:pPr marL="342900" indent="-342900">
-              <a:spcAft>
-                <a:spcPts val="1000"/>
-              </a:spcAft>
-              <a:buSzPct val="100000"/>
-              <a:buChar char="•"/>
-            </a:pPr>
-            <a:r>
-              <a:rPr lang="en-US" sz="1500" dirty="0">
-                <a:solidFill>
-                  <a:srgbClr val="33373F"/>
-                </a:solidFill>
-                <a:latin typeface="Calibri" pitchFamily="34" charset="0"/>
-                <a:ea typeface="Calibri" pitchFamily="34" charset="-122"/>
-                <a:cs typeface="Calibri" pitchFamily="34" charset="-120"/>
-              </a:rPr>
-              <a:t>Engineered: sequel/franchise flag, major-studio flag</a:t>
-            </a:r>
-            <a:endParaRPr lang="en-US" sz="1500" dirty="0"/>
-          </a:p>
-        </p:txBody>
-      </p:sp>
-      <p:sp>
-        <p:nvSpPr>
-          <p:cNvPr id="6" name="Text 4"/>
-          <p:cNvSpPr/>
-          <p:nvPr/>
-        </p:nvSpPr>
-        <p:spPr>
-          <a:xfrm>
-            <a:off x="6217920" y="1600200"/>
-            <a:ext cx="5120640" cy="365760"/>
-          </a:xfrm>
-          <a:prstGeom prst="rect">
-            <a:avLst/>
-          </a:prstGeom>
-          <a:noFill/>
-          <a:ln/>
-        </p:spPr>
-        <p:txBody>
-          <a:bodyPr wrap="square" lIns="0" tIns="0" rIns="0" bIns="0" rtlCol="0" anchor="ctr"/>
-          <a:lstStyle/>
-          <a:p>
+              <a:rPr lang="en-US" sz="1400" b="1" dirty="0">
+                <a:solidFill>
+                  <a:srgbClr val="1A1A2E"/>
+                </a:solidFill>
+                <a:latin typeface="Calibri" pitchFamily="34" charset="0"/>
+                <a:ea typeface="Calibri" pitchFamily="34" charset="-122"/>
+                <a:cs typeface="Calibri" pitchFamily="34" charset="-120"/>
+              </a:rPr>
+              <a:t>5-fold cross-validation:  </a:t>
+            </a:r>
             <a:pPr indent="0" marL="0">
               <a:buNone/>
             </a:pPr>
             <a:r>
-              <a:rPr lang="en-US" sz="1500" b="1" dirty="0">
-                <a:solidFill>
-                  <a:srgbClr val="E50914"/>
-                </a:solidFill>
-                <a:latin typeface="Calibri" pitchFamily="34" charset="0"/>
-                <a:ea typeface="Calibri" pitchFamily="34" charset="-122"/>
-                <a:cs typeface="Calibri" pitchFamily="34" charset="-120"/>
-              </a:rPr>
-              <a:t>Setup</a:t>
-            </a:r>
-            <a:endParaRPr lang="en-US" sz="1500" dirty="0"/>
-          </a:p>
-        </p:txBody>
-      </p:sp>
-      <p:sp>
-        <p:nvSpPr>
-          <p:cNvPr id="7" name="Text 5"/>
-          <p:cNvSpPr/>
-          <p:nvPr/>
-        </p:nvSpPr>
-        <p:spPr>
-          <a:xfrm>
-            <a:off x="6309360" y="2011680"/>
-            <a:ext cx="5212080" cy="3108960"/>
-          </a:xfrm>
-          <a:prstGeom prst="rect">
-            <a:avLst/>
-          </a:prstGeom>
-          <a:noFill/>
-          <a:ln/>
-        </p:spPr>
-        <p:txBody>
-          <a:bodyPr wrap="square" rtlCol="0" anchor="t"/>
-          <a:lstStyle/>
-          <a:p>
-            <a:pPr marL="342900" indent="-342900">
-              <a:spcAft>
-                <a:spcPts val="1000"/>
-              </a:spcAft>
-              <a:buSzPct val="100000"/>
-              <a:buChar char="•"/>
-            </a:pPr>
-            <a:r>
-              <a:rPr lang="en-US" sz="1500" dirty="0">
+              <a:rPr lang="en-US" sz="1400" dirty="0">
                 <a:solidFill>
                   <a:srgbClr val="33373F"/>
                 </a:solidFill>
@@ -2952,129 +2824,9 @@
                 <a:ea typeface="Calibri" pitchFamily="34" charset="-122"/>
                 <a:cs typeface="Calibri" pitchFamily="34" charset="-120"/>
               </a:rPr>
-              <a:t>Excluded post-release fields (revenue, ratings, popularity) — no data leakage.</a:t>
-            </a:r>
-            <a:endParaRPr lang="en-US" sz="1500" dirty="0"/>
-          </a:p>
-          <a:p>
-            <a:pPr marL="342900" indent="-342900">
-              <a:spcAft>
-                <a:spcPts val="1000"/>
-              </a:spcAft>
-              <a:buSzPct val="100000"/>
-              <a:buChar char="•"/>
-            </a:pPr>
-            <a:r>
-              <a:rPr lang="en-US" sz="1500" dirty="0">
-                <a:solidFill>
-                  <a:srgbClr val="33373F"/>
-                </a:solidFill>
-                <a:latin typeface="Calibri" pitchFamily="34" charset="0"/>
-                <a:ea typeface="Calibri" pitchFamily="34" charset="-122"/>
-                <a:cs typeface="Calibri" pitchFamily="34" charset="-120"/>
-              </a:rPr>
-              <a:t>Stratified 80/20 train-test split + 5-fold cross-validation for robustness.</a:t>
-            </a:r>
-            <a:endParaRPr lang="en-US" sz="1500" dirty="0"/>
-          </a:p>
-          <a:p>
-            <a:pPr marL="342900" indent="-342900">
-              <a:spcAft>
-                <a:spcPts val="1000"/>
-              </a:spcAft>
-              <a:buSzPct val="100000"/>
-              <a:buChar char="•"/>
-            </a:pPr>
-            <a:r>
-              <a:rPr lang="en-US" sz="1500" dirty="0">
-                <a:solidFill>
-                  <a:srgbClr val="33373F"/>
-                </a:solidFill>
-                <a:latin typeface="Calibri" pitchFamily="34" charset="0"/>
-                <a:ea typeface="Calibri" pitchFamily="34" charset="-122"/>
-                <a:cs typeface="Calibri" pitchFamily="34" charset="-120"/>
-              </a:rPr>
-              <a:t>Three classifiers: Logistic Regression, Random Forest (tuned), Gradient Boosting.</a:t>
-            </a:r>
-            <a:endParaRPr lang="en-US" sz="1500" dirty="0"/>
-          </a:p>
-        </p:txBody>
-      </p:sp>
-      <p:sp>
-        <p:nvSpPr>
-          <p:cNvPr id="8" name="Shape 6"/>
-          <p:cNvSpPr/>
-          <p:nvPr/>
-        </p:nvSpPr>
-        <p:spPr>
-          <a:xfrm>
-            <a:off x="640080" y="5212080"/>
-            <a:ext cx="10881360" cy="914400"/>
-          </a:xfrm>
-          <a:prstGeom prst="rect">
-            <a:avLst/>
-          </a:prstGeom>
-          <a:solidFill>
-            <a:srgbClr val="F3F4F6"/>
-          </a:solidFill>
-          <a:ln w="12700">
-            <a:solidFill>
-              <a:srgbClr val="E3E6EA"/>
-            </a:solidFill>
-            <a:prstDash val="solid"/>
-          </a:ln>
-        </p:spPr>
-      </p:sp>
-      <p:sp>
-        <p:nvSpPr>
-          <p:cNvPr id="9" name="Text 7"/>
-          <p:cNvSpPr/>
-          <p:nvPr/>
-        </p:nvSpPr>
-        <p:spPr>
-          <a:xfrm>
-            <a:off x="914400" y="5212080"/>
-            <a:ext cx="10332720" cy="914400"/>
-          </a:xfrm>
-          <a:prstGeom prst="rect">
-            <a:avLst/>
-          </a:prstGeom>
-          <a:noFill/>
-          <a:ln/>
-        </p:spPr>
-        <p:txBody>
-          <a:bodyPr wrap="square" lIns="0" tIns="0" rIns="0" bIns="0" rtlCol="0" anchor="ctr"/>
-          <a:lstStyle/>
-          <a:p>
-            <a:pPr indent="0" marL="0">
-              <a:buNone/>
-            </a:pPr>
-            <a:r>
-              <a:rPr lang="en-US" sz="1500" dirty="0">
-                <a:solidFill>
-                  <a:srgbClr val="5B6472"/>
-                </a:solidFill>
-                <a:latin typeface="Calibri" pitchFamily="34" charset="0"/>
-                <a:ea typeface="Calibri" pitchFamily="34" charset="-122"/>
-                <a:cs typeface="Calibri" pitchFamily="34" charset="-120"/>
-              </a:rPr>
-              <a:t>Two engineered signals stood out:  </a:t>
-            </a:r>
-            <a:pPr indent="0" marL="0">
-              <a:buNone/>
-            </a:pPr>
-            <a:r>
-              <a:rPr lang="en-US" sz="1500" b="1" dirty="0">
-                <a:solidFill>
-                  <a:srgbClr val="1A1A2E"/>
-                </a:solidFill>
-                <a:latin typeface="Calibri" pitchFamily="34" charset="0"/>
-                <a:ea typeface="Calibri" pitchFamily="34" charset="-122"/>
-                <a:cs typeface="Calibri" pitchFamily="34" charset="-120"/>
-              </a:rPr>
-              <a:t>sequels succeed 68% vs 54%; major-studio films 61% vs 51%.</a:t>
-            </a:r>
-            <a:endParaRPr lang="en-US" sz="1500" dirty="0"/>
+              <a:t>tuned Random Forest is most robust — 64% accuracy, 0.683 AUC (±0.025). A single split can flatter a model; CV keeps us honest.</a:t>
+            </a:r>
+            <a:endParaRPr lang="en-US" sz="1400" dirty="0"/>
           </a:p>
         </p:txBody>
       </p:sp>
@@ -3182,7 +2934,7 @@
                 <a:ea typeface="Georgia" pitchFamily="34" charset="-122"/>
                 <a:cs typeface="Georgia" pitchFamily="34" charset="-120"/>
               </a:rPr>
-              <a:t>Results — all models beat the baseline</a:t>
+              <a:t>What drives the predictions</a:t>
             </a:r>
             <a:endParaRPr lang="en-US" sz="2800" dirty="0"/>
           </a:p>
@@ -3190,7 +2942,7 @@
       </p:sp>
       <p:pic>
         <p:nvPicPr>
-          <p:cNvPr id="4" name="Image 0" descr="/sessions/optimistic-determined-edison/mnt/outputs/UMBC-DATA606-Capstone/docs/figures/model_comparison.png">    </p:cNvPr>
+          <p:cNvPr id="4" name="Image 0" descr="/sessions/optimistic-determined-edison/mnt/outputs/UMBC-DATA606-Capstone/docs/figures/feature_importance.png">    </p:cNvPr>
           <p:cNvPicPr>
             <a:picLocks noChangeAspect="1"/>
           </p:cNvPicPr>
@@ -3240,15 +2992,15 @@
               <a:buChar char="•"/>
             </a:pPr>
             <a:r>
-              <a:rPr lang="en-US" sz="1500" b="1" dirty="0">
-                <a:solidFill>
-                  <a:srgbClr val="1A1A2E"/>
-                </a:solidFill>
-                <a:latin typeface="Calibri" pitchFamily="34" charset="0"/>
-                <a:ea typeface="Calibri" pitchFamily="34" charset="-122"/>
-                <a:cs typeface="Calibri" pitchFamily="34" charset="-120"/>
-              </a:rPr>
-              <a:t>Best held-out test: 68% accuracy, 0.715 ROC-AUC (baseline: 56%).</a:t>
+              <a:rPr lang="en-US" sz="1500" dirty="0">
+                <a:solidFill>
+                  <a:srgbClr val="33373F"/>
+                </a:solidFill>
+                <a:latin typeface="Calibri" pitchFamily="34" charset="0"/>
+                <a:ea typeface="Calibri" pitchFamily="34" charset="-122"/>
+                <a:cs typeface="Calibri" pitchFamily="34" charset="-120"/>
+              </a:rPr>
+              <a:t>Financial scale dominates: spend intensity, release year, and budget are the top three.</a:t>
             </a:r>
             <a:endParaRPr lang="en-US" sz="1500" dirty="0"/>
           </a:p>
@@ -3269,7 +3021,7 @@
                 <a:ea typeface="Calibri" pitchFamily="34" charset="-122"/>
                 <a:cs typeface="Calibri" pitchFamily="34" charset="-120"/>
               </a:rPr>
-              <a:t>Cross-validated: ~64% accuracy, 0.68 AUC — the tuned Random Forest is most robust.</a:t>
+              <a:t>Runtime, studio count, and the sequel / major-studio flags follow.</a:t>
             </a:r>
             <a:endParaRPr lang="en-US" sz="1500" dirty="0"/>
           </a:p>
@@ -3290,7 +3042,7 @@
                 <a:ea typeface="Calibri" pitchFamily="34" charset="-122"/>
                 <a:cs typeface="Calibri" pitchFamily="34" charset="-120"/>
               </a:rPr>
-              <a:t>Engineered features lifted AUC from 0.66 to 0.71 on the test split.</a:t>
+              <a:t>Genre (Horror) and the timing features add real secondary signal — the EDA and the model agree.</a:t>
             </a:r>
             <a:endParaRPr lang="en-US" sz="1500" dirty="0"/>
           </a:p>
@@ -3361,7 +3113,7 @@
                 <a:ea typeface="Calibri" pitchFamily="34" charset="-122"/>
                 <a:cs typeface="Calibri" pitchFamily="34" charset="-120"/>
               </a:rPr>
-              <a:t>MACHINE LEARNING</a:t>
+              <a:t>THE APPLICATION</a:t>
             </a:r>
             <a:endParaRPr lang="en-US" sz="1200" dirty="0"/>
           </a:p>
@@ -3400,45 +3152,61 @@
                 <a:ea typeface="Georgia" pitchFamily="34" charset="-122"/>
                 <a:cs typeface="Georgia" pitchFamily="34" charset="-120"/>
               </a:rPr>
-              <a:t>What drives the predictions</a:t>
+              <a:t>Streamlit app — every input, explained</a:t>
             </a:r>
             <a:endParaRPr lang="en-US" sz="2800" dirty="0"/>
           </a:p>
         </p:txBody>
       </p:sp>
-      <p:pic>
-        <p:nvPicPr>
-          <p:cNvPr id="4" name="Image 0" descr="/sessions/optimistic-determined-edison/mnt/outputs/UMBC-DATA606-Capstone/docs/figures/feature_importance.png">    </p:cNvPr>
-          <p:cNvPicPr>
-            <a:picLocks noChangeAspect="1"/>
-          </p:cNvPicPr>
-          <p:nvPr/>
-        </p:nvPicPr>
-        <p:blipFill>
-          <a:blip r:embed="rId1"/>
-          <a:srcRect l="0" r="0" t="0" b="0"/>
-          <a:stretch/>
-        </p:blipFill>
+      <p:sp>
+        <p:nvSpPr>
+          <p:cNvPr id="4" name="Text 2"/>
+          <p:cNvSpPr/>
+          <p:nvPr/>
+        </p:nvSpPr>
         <p:spPr>
           <a:xfrm>
             <a:off x="640080" y="1554480"/>
-            <a:ext cx="6949440" cy="4480560"/>
-          </a:xfrm>
-          <a:prstGeom prst="rect">
-            <a:avLst/>
-          </a:prstGeom>
-        </p:spPr>
-      </p:pic>
-      <p:sp>
-        <p:nvSpPr>
-          <p:cNvPr id="5" name="Text 2"/>
-          <p:cNvSpPr/>
-          <p:nvPr/>
-        </p:nvSpPr>
-        <p:spPr>
-          <a:xfrm>
-            <a:off x="7863840" y="2011680"/>
-            <a:ext cx="3749040" cy="3474720"/>
+            <a:ext cx="5303520" cy="365760"/>
+          </a:xfrm>
+          <a:prstGeom prst="rect">
+            <a:avLst/>
+          </a:prstGeom>
+          <a:noFill/>
+          <a:ln/>
+        </p:spPr>
+        <p:txBody>
+          <a:bodyPr wrap="square" lIns="0" tIns="0" rIns="0" bIns="0" rtlCol="0" anchor="ctr"/>
+          <a:lstStyle/>
+          <a:p>
+            <a:pPr indent="0" marL="0">
+              <a:buNone/>
+            </a:pPr>
+            <a:r>
+              <a:rPr lang="en-US" sz="1500" b="1" dirty="0">
+                <a:solidFill>
+                  <a:srgbClr val="E50914"/>
+                </a:solidFill>
+                <a:latin typeface="Calibri" pitchFamily="34" charset="0"/>
+                <a:ea typeface="Calibri" pitchFamily="34" charset="-122"/>
+                <a:cs typeface="Calibri" pitchFamily="34" charset="-120"/>
+              </a:rPr>
+              <a:t>What the user enters</a:t>
+            </a:r>
+            <a:endParaRPr lang="en-US" sz="1500" dirty="0"/>
+          </a:p>
+        </p:txBody>
+      </p:sp>
+      <p:sp>
+        <p:nvSpPr>
+          <p:cNvPr id="5" name="Text 3"/>
+          <p:cNvSpPr/>
+          <p:nvPr/>
+        </p:nvSpPr>
+        <p:spPr>
+          <a:xfrm>
+            <a:off x="731520" y="1965960"/>
+            <a:ext cx="5394960" cy="3931920"/>
           </a:xfrm>
           <a:prstGeom prst="rect">
             <a:avLst/>
@@ -3449,6 +3217,111 @@
         <p:txBody>
           <a:bodyPr wrap="square" rtlCol="0" anchor="t"/>
           <a:lstStyle/>
+          <a:p>
+            <a:pPr marL="342900" indent="-342900">
+              <a:spcAft>
+                <a:spcPts val="700"/>
+              </a:spcAft>
+              <a:buSzPct val="100000"/>
+              <a:buChar char="•"/>
+            </a:pPr>
+            <a:r>
+              <a:rPr lang="en-US" sz="1400" dirty="0">
+                <a:solidFill>
+                  <a:srgbClr val="33373F"/>
+                </a:solidFill>
+                <a:latin typeface="Calibri" pitchFamily="34" charset="0"/>
+                <a:ea typeface="Calibri" pitchFamily="34" charset="-122"/>
+                <a:cs typeface="Calibri" pitchFamily="34" charset="-120"/>
+              </a:rPr>
+              <a:t>Budget — the strongest single predictor (log-scaled internally).</a:t>
+            </a:r>
+            <a:endParaRPr lang="en-US" sz="1400" dirty="0"/>
+          </a:p>
+          <a:p>
+            <a:pPr marL="342900" indent="-342900">
+              <a:spcAft>
+                <a:spcPts val="700"/>
+              </a:spcAft>
+              <a:buSzPct val="100000"/>
+              <a:buChar char="•"/>
+            </a:pPr>
+            <a:r>
+              <a:rPr lang="en-US" sz="1400" dirty="0">
+                <a:solidFill>
+                  <a:srgbClr val="33373F"/>
+                </a:solidFill>
+                <a:latin typeface="Calibri" pitchFamily="34" charset="0"/>
+                <a:ea typeface="Calibri" pitchFamily="34" charset="-122"/>
+                <a:cs typeface="Calibri" pitchFamily="34" charset="-120"/>
+              </a:rPr>
+              <a:t>Primary genre — horror/animation outperform; action is hardest.</a:t>
+            </a:r>
+            <a:endParaRPr lang="en-US" sz="1400" dirty="0"/>
+          </a:p>
+          <a:p>
+            <a:pPr marL="342900" indent="-342900">
+              <a:spcAft>
+                <a:spcPts val="700"/>
+              </a:spcAft>
+              <a:buSzPct val="100000"/>
+              <a:buChar char="•"/>
+            </a:pPr>
+            <a:r>
+              <a:rPr lang="en-US" sz="1400" dirty="0">
+                <a:solidFill>
+                  <a:srgbClr val="33373F"/>
+                </a:solidFill>
+                <a:latin typeface="Calibri" pitchFamily="34" charset="0"/>
+                <a:ea typeface="Calibri" pitchFamily="34" charset="-122"/>
+                <a:cs typeface="Calibri" pitchFamily="34" charset="-120"/>
+              </a:rPr>
+              <a:t>Runtime — also feeds spend intensity (budget ÷ minute).</a:t>
+            </a:r>
+            <a:endParaRPr lang="en-US" sz="1400" dirty="0"/>
+          </a:p>
+          <a:p>
+            <a:pPr marL="342900" indent="-342900">
+              <a:spcAft>
+                <a:spcPts val="700"/>
+              </a:spcAft>
+              <a:buSzPct val="100000"/>
+              <a:buChar char="•"/>
+            </a:pPr>
+            <a:r>
+              <a:rPr lang="en-US" sz="1400" dirty="0">
+                <a:solidFill>
+                  <a:srgbClr val="33373F"/>
+                </a:solidFill>
+                <a:latin typeface="Calibri" pitchFamily="34" charset="0"/>
+                <a:ea typeface="Calibri" pitchFamily="34" charset="-122"/>
+                <a:cs typeface="Calibri" pitchFamily="34" charset="-120"/>
+              </a:rPr>
+              <a:t>Release month &amp; year — timing and era effects.</a:t>
+            </a:r>
+            <a:endParaRPr lang="en-US" sz="1400" dirty="0"/>
+          </a:p>
+          <a:p>
+            <a:pPr marL="342900" indent="-342900">
+              <a:spcAft>
+                <a:spcPts val="700"/>
+              </a:spcAft>
+              <a:buSzPct val="100000"/>
+              <a:buChar char="•"/>
+            </a:pPr>
+            <a:r>
+              <a:rPr lang="en-US" sz="1400" dirty="0">
+                <a:solidFill>
+                  <a:srgbClr val="33373F"/>
+                </a:solidFill>
+                <a:latin typeface="Calibri" pitchFamily="34" charset="0"/>
+                <a:ea typeface="Calibri" pitchFamily="34" charset="-122"/>
+                <a:cs typeface="Calibri" pitchFamily="34" charset="-120"/>
+              </a:rPr>
+              <a:t>Language · # production companies (+ advanced: # genres, # languages).</a:t>
+            </a:r>
+            <a:endParaRPr lang="en-US" sz="1400" dirty="0"/>
+          </a:p>
           <a:p>
             <a:pPr marL="342900" indent="-342900">
               <a:spcAft>
@@ -3458,7 +3331,7 @@
               <a:buChar char="•"/>
             </a:pPr>
             <a:r>
-              <a:rPr lang="en-US" sz="1500" dirty="0">
+              <a:rPr lang="en-US" sz="1400" dirty="0">
                 <a:solidFill>
                   <a:srgbClr val="33373F"/>
                 </a:solidFill>
@@ -3466,9 +3339,133 @@
                 <a:ea typeface="Calibri" pitchFamily="34" charset="-122"/>
                 <a:cs typeface="Calibri" pitchFamily="34" charset="-120"/>
               </a:rPr>
-              <a:t>Financial scale dominates: spend intensity, release year, and budget are the top three.</a:t>
+              <a:t>Sequel/franchise ✓ and major-studio ✓ — the two engineered flags.</a:t>
+            </a:r>
+            <a:endParaRPr lang="en-US" sz="1400" dirty="0"/>
+          </a:p>
+        </p:txBody>
+      </p:sp>
+      <p:sp>
+        <p:nvSpPr>
+          <p:cNvPr id="6" name="Text 4"/>
+          <p:cNvSpPr/>
+          <p:nvPr/>
+        </p:nvSpPr>
+        <p:spPr>
+          <a:xfrm>
+            <a:off x="6400800" y="1554480"/>
+            <a:ext cx="5120640" cy="365760"/>
+          </a:xfrm>
+          <a:prstGeom prst="rect">
+            <a:avLst/>
+          </a:prstGeom>
+          <a:noFill/>
+          <a:ln/>
+        </p:spPr>
+        <p:txBody>
+          <a:bodyPr wrap="square" lIns="0" tIns="0" rIns="0" bIns="0" rtlCol="0" anchor="ctr"/>
+          <a:lstStyle/>
+          <a:p>
+            <a:pPr indent="0" marL="0">
+              <a:buNone/>
+            </a:pPr>
+            <a:r>
+              <a:rPr lang="en-US" sz="1500" b="1" dirty="0">
+                <a:solidFill>
+                  <a:srgbClr val="E50914"/>
+                </a:solidFill>
+                <a:latin typeface="Calibri" pitchFamily="34" charset="0"/>
+                <a:ea typeface="Calibri" pitchFamily="34" charset="-122"/>
+                <a:cs typeface="Calibri" pitchFamily="34" charset="-120"/>
+              </a:rPr>
+              <a:t>What the app does</a:t>
             </a:r>
             <a:endParaRPr lang="en-US" sz="1500" dirty="0"/>
+          </a:p>
+        </p:txBody>
+      </p:sp>
+      <p:sp>
+        <p:nvSpPr>
+          <p:cNvPr id="7" name="Text 5"/>
+          <p:cNvSpPr/>
+          <p:nvPr/>
+        </p:nvSpPr>
+        <p:spPr>
+          <a:xfrm>
+            <a:off x="6492240" y="1965960"/>
+            <a:ext cx="5029200" cy="3931920"/>
+          </a:xfrm>
+          <a:prstGeom prst="rect">
+            <a:avLst/>
+          </a:prstGeom>
+          <a:noFill/>
+          <a:ln/>
+        </p:spPr>
+        <p:txBody>
+          <a:bodyPr wrap="square" rtlCol="0" anchor="t"/>
+          <a:lstStyle/>
+          <a:p>
+            <a:pPr marL="342900" indent="-342900">
+              <a:spcAft>
+                <a:spcPts val="800"/>
+              </a:spcAft>
+              <a:buSzPct val="100000"/>
+              <a:buChar char="•"/>
+            </a:pPr>
+            <a:r>
+              <a:rPr lang="en-US" sz="1400" dirty="0">
+                <a:solidFill>
+                  <a:srgbClr val="33373F"/>
+                </a:solidFill>
+                <a:latin typeface="Calibri" pitchFamily="34" charset="0"/>
+                <a:ea typeface="Calibri" pitchFamily="34" charset="-122"/>
+                <a:cs typeface="Calibri" pitchFamily="34" charset="-120"/>
+              </a:rPr>
+              <a:t>Derives the hidden features automatically — season, release window, genre-timing flags, spend intensity.</a:t>
+            </a:r>
+            <a:endParaRPr lang="en-US" sz="1400" dirty="0"/>
+          </a:p>
+          <a:p>
+            <a:pPr marL="342900" indent="-342900">
+              <a:spcAft>
+                <a:spcPts val="800"/>
+              </a:spcAft>
+              <a:buSzPct val="100000"/>
+              <a:buChar char="•"/>
+            </a:pPr>
+            <a:r>
+              <a:rPr lang="en-US" sz="1400" dirty="0">
+                <a:solidFill>
+                  <a:srgbClr val="33373F"/>
+                </a:solidFill>
+                <a:latin typeface="Calibri" pitchFamily="34" charset="0"/>
+                <a:ea typeface="Calibri" pitchFamily="34" charset="-122"/>
+                <a:cs typeface="Calibri" pitchFamily="34" charset="-120"/>
+              </a:rPr>
+              <a:t>Trains the most robust model (tuned Random Forest) on the full cleaned dataset.</a:t>
+            </a:r>
+            <a:endParaRPr lang="en-US" sz="1400" dirty="0"/>
+          </a:p>
+          <a:p>
+            <a:pPr marL="342900" indent="-342900">
+              <a:spcAft>
+                <a:spcPts val="800"/>
+              </a:spcAft>
+              <a:buSzPct val="100000"/>
+              <a:buChar char="•"/>
+            </a:pPr>
+            <a:r>
+              <a:rPr lang="en-US" sz="1400" dirty="0">
+                <a:solidFill>
+                  <a:srgbClr val="33373F"/>
+                </a:solidFill>
+                <a:latin typeface="Calibri" pitchFamily="34" charset="0"/>
+                <a:ea typeface="Calibri" pitchFamily="34" charset="-122"/>
+                <a:cs typeface="Calibri" pitchFamily="34" charset="-120"/>
+              </a:rPr>
+              <a:t>Returns a probability of success with a clear verdict — plus the honest caveat that the 2× target is a proxy for profit.</a:t>
+            </a:r>
+            <a:endParaRPr lang="en-US" sz="1400" dirty="0"/>
           </a:p>
           <a:p>
             <a:pPr marL="342900" indent="-342900">
@@ -3479,38 +3476,17 @@
               <a:buChar char="•"/>
             </a:pPr>
             <a:r>
-              <a:rPr lang="en-US" sz="1500" dirty="0">
-                <a:solidFill>
-                  <a:srgbClr val="33373F"/>
-                </a:solidFill>
-                <a:latin typeface="Calibri" pitchFamily="34" charset="0"/>
-                <a:ea typeface="Calibri" pitchFamily="34" charset="-122"/>
-                <a:cs typeface="Calibri" pitchFamily="34" charset="-120"/>
-              </a:rPr>
-              <a:t>Runtime, studio count, and the sequel/major-studio flags follow.</a:t>
-            </a:r>
-            <a:endParaRPr lang="en-US" sz="1500" dirty="0"/>
-          </a:p>
-          <a:p>
-            <a:pPr marL="342900" indent="-342900">
-              <a:spcAft>
-                <a:spcPts val="1000"/>
-              </a:spcAft>
-              <a:buSzPct val="100000"/>
-              <a:buChar char="•"/>
-            </a:pPr>
-            <a:r>
-              <a:rPr lang="en-US" sz="1500" dirty="0">
-                <a:solidFill>
-                  <a:srgbClr val="33373F"/>
-                </a:solidFill>
-                <a:latin typeface="Calibri" pitchFamily="34" charset="0"/>
-                <a:ea typeface="Calibri" pitchFamily="34" charset="-122"/>
-                <a:cs typeface="Calibri" pitchFamily="34" charset="-120"/>
-              </a:rPr>
-              <a:t>Genre (Horror) and the timing features contribute real secondary signal.</a:t>
-            </a:r>
-            <a:endParaRPr lang="en-US" sz="1500" dirty="0"/>
+              <a:rPr lang="en-US" sz="1400" b="1" dirty="0">
+                <a:solidFill>
+                  <a:srgbClr val="1A1A2E"/>
+                </a:solidFill>
+                <a:latin typeface="Calibri" pitchFamily="34" charset="0"/>
+                <a:ea typeface="Calibri" pitchFamily="34" charset="-122"/>
+                <a:cs typeface="Calibri" pitchFamily="34" charset="-120"/>
+              </a:rPr>
+              <a:t>One command to run: streamlit run app/app.py</a:t>
+            </a:r>
+            <a:endParaRPr lang="en-US" sz="1400" dirty="0"/>
           </a:p>
         </p:txBody>
       </p:sp>
@@ -3528,7 +3504,7 @@
     <p:bg>
       <p:bgPr>
         <a:solidFill>
-          <a:srgbClr val="FFFFFF"/>
+          <a:srgbClr val="141428"/>
         </a:solidFill>
       </p:bgPr>
     </p:bg>
@@ -3554,8 +3530,8 @@
         </p:nvSpPr>
         <p:spPr>
           <a:xfrm>
-            <a:off x="566928" y="310896"/>
-            <a:ext cx="10972800" cy="274320"/>
+            <a:off x="822960" y="2103120"/>
+            <a:ext cx="10515600" cy="914400"/>
           </a:xfrm>
           <a:prstGeom prst="rect">
             <a:avLst/>
@@ -3571,174 +3547,30 @@
               <a:buNone/>
             </a:pPr>
             <a:r>
-              <a:rPr lang="en-US" sz="1200" b="1" spc="300" kern="0" dirty="0">
-                <a:solidFill>
-                  <a:srgbClr val="E50914"/>
-                </a:solidFill>
-                <a:latin typeface="Calibri" pitchFamily="34" charset="0"/>
-                <a:ea typeface="Calibri" pitchFamily="34" charset="-122"/>
-                <a:cs typeface="Calibri" pitchFamily="34" charset="-120"/>
-              </a:rPr>
-              <a:t>APPLICATION</a:t>
-            </a:r>
-            <a:endParaRPr lang="en-US" sz="1200" dirty="0"/>
-          </a:p>
-        </p:txBody>
-      </p:sp>
-      <p:sp>
-        <p:nvSpPr>
-          <p:cNvPr id="3" name="Text 1"/>
-          <p:cNvSpPr/>
-          <p:nvPr/>
-        </p:nvSpPr>
-        <p:spPr>
-          <a:xfrm>
-            <a:off x="548640" y="603504"/>
-            <a:ext cx="11064240" cy="685800"/>
-          </a:xfrm>
-          <a:prstGeom prst="rect">
-            <a:avLst/>
-          </a:prstGeom>
-          <a:noFill/>
-          <a:ln/>
-        </p:spPr>
-        <p:txBody>
-          <a:bodyPr wrap="square" lIns="0" tIns="0" rIns="0" bIns="0" rtlCol="0" anchor="ctr"/>
-          <a:lstStyle/>
-          <a:p>
-            <a:pPr indent="0" marL="0">
-              <a:buNone/>
-            </a:pPr>
-            <a:r>
-              <a:rPr lang="en-US" sz="2800" b="1" dirty="0">
-                <a:solidFill>
-                  <a:srgbClr val="1A1A2E"/>
+              <a:rPr lang="en-US" sz="5400" b="1" dirty="0">
+                <a:solidFill>
+                  <a:srgbClr val="FFFFFF"/>
                 </a:solidFill>
                 <a:latin typeface="Georgia" pitchFamily="34" charset="0"/>
                 <a:ea typeface="Georgia" pitchFamily="34" charset="-122"/>
                 <a:cs typeface="Georgia" pitchFamily="34" charset="-120"/>
               </a:rPr>
-              <a:t>An interactive success predictor (Streamlit)</a:t>
-            </a:r>
-            <a:endParaRPr lang="en-US" sz="2800" dirty="0"/>
-          </a:p>
-        </p:txBody>
-      </p:sp>
-      <p:sp>
-        <p:nvSpPr>
-          <p:cNvPr id="4" name="Text 2"/>
-          <p:cNvSpPr/>
-          <p:nvPr/>
-        </p:nvSpPr>
-        <p:spPr>
-          <a:xfrm>
-            <a:off x="640080" y="1737360"/>
-            <a:ext cx="6035040" cy="3474720"/>
-          </a:xfrm>
-          <a:prstGeom prst="rect">
-            <a:avLst/>
-          </a:prstGeom>
-          <a:noFill/>
-          <a:ln/>
-        </p:spPr>
-        <p:txBody>
-          <a:bodyPr wrap="square" rtlCol="0" anchor="t"/>
-          <a:lstStyle/>
-          <a:p>
-            <a:pPr marL="342900" indent="-342900">
-              <a:spcAft>
-                <a:spcPts val="1000"/>
-              </a:spcAft>
-              <a:buSzPct val="100000"/>
-              <a:buChar char="•"/>
-            </a:pPr>
-            <a:r>
-              <a:rPr lang="en-US" sz="1700" dirty="0">
-                <a:solidFill>
-                  <a:srgbClr val="33373F"/>
-                </a:solidFill>
-                <a:latin typeface="Calibri" pitchFamily="34" charset="0"/>
-                <a:ea typeface="Calibri" pitchFamily="34" charset="-122"/>
-                <a:cs typeface="Calibri" pitchFamily="34" charset="-120"/>
-              </a:rPr>
-              <a:t>User enters a hypothetical film's pre-release profile: budget, genre, runtime, release month, language, studio, sequel status.</a:t>
-            </a:r>
-            <a:endParaRPr lang="en-US" sz="1700" dirty="0"/>
-          </a:p>
-          <a:p>
-            <a:pPr marL="342900" indent="-342900">
-              <a:spcAft>
-                <a:spcPts val="1000"/>
-              </a:spcAft>
-              <a:buSzPct val="100000"/>
-              <a:buChar char="•"/>
-            </a:pPr>
-            <a:r>
-              <a:rPr lang="en-US" sz="1700" dirty="0">
-                <a:solidFill>
-                  <a:srgbClr val="33373F"/>
-                </a:solidFill>
-                <a:latin typeface="Calibri" pitchFamily="34" charset="0"/>
-                <a:ea typeface="Calibri" pitchFamily="34" charset="-122"/>
-                <a:cs typeface="Calibri" pitchFamily="34" charset="-120"/>
-              </a:rPr>
-              <a:t>The app trains the most robust model and returns a predicted probability of success.</a:t>
-            </a:r>
-            <a:endParaRPr lang="en-US" sz="1700" dirty="0"/>
-          </a:p>
-          <a:p>
-            <a:pPr marL="342900" indent="-342900">
-              <a:spcAft>
-                <a:spcPts val="1000"/>
-              </a:spcAft>
-              <a:buSzPct val="100000"/>
-              <a:buChar char="•"/>
-            </a:pPr>
-            <a:r>
-              <a:rPr lang="en-US" sz="1700" dirty="0">
-                <a:solidFill>
-                  <a:srgbClr val="33373F"/>
-                </a:solidFill>
-                <a:latin typeface="Calibri" pitchFamily="34" charset="0"/>
-                <a:ea typeface="Calibri" pitchFamily="34" charset="-122"/>
-                <a:cs typeface="Calibri" pitchFamily="34" charset="-120"/>
-              </a:rPr>
-              <a:t>Turns the analysis into a decision-support tool for the greenlight-and-scheduling moment.</a:t>
-            </a:r>
-            <a:endParaRPr lang="en-US" sz="1700" dirty="0"/>
-          </a:p>
-        </p:txBody>
-      </p:sp>
-      <p:sp>
-        <p:nvSpPr>
-          <p:cNvPr id="5" name="Shape 3"/>
-          <p:cNvSpPr/>
-          <p:nvPr/>
-        </p:nvSpPr>
-        <p:spPr>
-          <a:xfrm>
-            <a:off x="7040880" y="1737360"/>
-            <a:ext cx="4480560" cy="3931920"/>
-          </a:xfrm>
-          <a:prstGeom prst="rect">
-            <a:avLst/>
-          </a:prstGeom>
-          <a:solidFill>
-            <a:srgbClr val="141428"/>
-          </a:solidFill>
-          <a:ln/>
-        </p:spPr>
-      </p:sp>
-      <p:sp>
-        <p:nvSpPr>
-          <p:cNvPr id="6" name="Text 4"/>
-          <p:cNvSpPr/>
-          <p:nvPr/>
-        </p:nvSpPr>
-        <p:spPr>
-          <a:xfrm>
-            <a:off x="7315200" y="2011680"/>
-            <a:ext cx="3931920" cy="320040"/>
+              <a:t>LIVE DEMO</a:t>
+            </a:r>
+            <a:endParaRPr lang="en-US" sz="5400" dirty="0"/>
+          </a:p>
+        </p:txBody>
+      </p:sp>
+      <p:sp>
+        <p:nvSpPr>
+          <p:cNvPr id="3" name="Text 1"/>
+          <p:cNvSpPr/>
+          <p:nvPr/>
+        </p:nvSpPr>
+        <p:spPr>
+          <a:xfrm>
+            <a:off x="841248" y="3154680"/>
+            <a:ext cx="10515600" cy="365760"/>
           </a:xfrm>
           <a:prstGeom prst="rect">
             <a:avLst/>
@@ -3754,83 +3586,60 @@
               <a:buNone/>
             </a:pPr>
             <a:r>
-              <a:rPr lang="en-US" sz="1200" b="1" spc="200" kern="0" dirty="0">
-                <a:solidFill>
-                  <a:srgbClr val="E50914"/>
-                </a:solidFill>
-                <a:latin typeface="Calibri" pitchFamily="34" charset="0"/>
-                <a:ea typeface="Calibri" pitchFamily="34" charset="-122"/>
-                <a:cs typeface="Calibri" pitchFamily="34" charset="-120"/>
-              </a:rPr>
-              <a:t>EXAMPLE PREDICTIONS</a:t>
-            </a:r>
-            <a:endParaRPr lang="en-US" sz="1200" dirty="0"/>
-          </a:p>
-        </p:txBody>
-      </p:sp>
-      <p:sp>
-        <p:nvSpPr>
-          <p:cNvPr id="7" name="Text 5"/>
-          <p:cNvSpPr/>
-          <p:nvPr/>
-        </p:nvSpPr>
-        <p:spPr>
-          <a:xfrm>
-            <a:off x="7315200" y="2468880"/>
-            <a:ext cx="3931920" cy="3017520"/>
-          </a:xfrm>
-          <a:prstGeom prst="rect">
-            <a:avLst/>
-          </a:prstGeom>
-          <a:noFill/>
-          <a:ln/>
-        </p:spPr>
-        <p:txBody>
-          <a:bodyPr wrap="square" lIns="0" tIns="0" rIns="0" bIns="0" rtlCol="0" anchor="t"/>
+              <a:rPr lang="en-US" sz="1600" dirty="0">
+                <a:solidFill>
+                  <a:srgbClr val="C9CDD6"/>
+                </a:solidFill>
+                <a:latin typeface="Calibri" pitchFamily="34" charset="0"/>
+                <a:ea typeface="Calibri" pitchFamily="34" charset="-122"/>
+                <a:cs typeface="Calibri" pitchFamily="34" charset="-120"/>
+              </a:rPr>
+              <a:t>Movie Box-Office Success Predictor — running locally at localhost:8501</a:t>
+            </a:r>
+            <a:endParaRPr lang="en-US" sz="1600" dirty="0"/>
+          </a:p>
+        </p:txBody>
+      </p:sp>
+      <p:sp>
+        <p:nvSpPr>
+          <p:cNvPr id="4" name="Text 2"/>
+          <p:cNvSpPr/>
+          <p:nvPr/>
+        </p:nvSpPr>
+        <p:spPr>
+          <a:xfrm>
+            <a:off x="841248" y="5394960"/>
+            <a:ext cx="10515600" cy="548640"/>
+          </a:xfrm>
+          <a:prstGeom prst="rect">
+            <a:avLst/>
+          </a:prstGeom>
+          <a:noFill/>
+          <a:ln/>
+        </p:spPr>
+        <p:txBody>
+          <a:bodyPr wrap="square" lIns="0" tIns="0" rIns="0" bIns="0" rtlCol="0" anchor="ctr"/>
           <a:lstStyle/>
           <a:p>
             <a:pPr indent="0" marL="0">
               <a:buNone/>
             </a:pPr>
             <a:r>
-              <a:rPr lang="en-US" sz="1600" dirty="0">
-                <a:solidFill>
-                  <a:srgbClr val="C9CDD6"/>
-                </a:solidFill>
-                <a:latin typeface="Calibri" pitchFamily="34" charset="0"/>
-                <a:ea typeface="Calibri" pitchFamily="34" charset="-122"/>
-                <a:cs typeface="Calibri" pitchFamily="34" charset="-120"/>
-              </a:rPr>
-              <a:t>Summer franchise tentpole</a:t>
-            </a:r>
-            <a:endParaRPr lang="en-US" sz="1600" dirty="0"/>
-          </a:p>
-          <a:p>
-            <a:pPr indent="0" marL="0">
-              <a:spcAft>
-                <a:spcPts val="1000"/>
-              </a:spcAft>
-              <a:buNone/>
-            </a:pPr>
-            <a:r>
-              <a:rPr lang="en-US" sz="1600" b="1" dirty="0">
-                <a:solidFill>
-                  <a:srgbClr val="FFFFFF"/>
-                </a:solidFill>
-                <a:latin typeface="Calibri" pitchFamily="34" charset="0"/>
-                <a:ea typeface="Calibri" pitchFamily="34" charset="-122"/>
-                <a:cs typeface="Calibri" pitchFamily="34" charset="-120"/>
-              </a:rPr>
-              <a:t>72% success</a:t>
-            </a:r>
-            <a:endParaRPr lang="en-US" sz="1600" dirty="0"/>
-          </a:p>
-          <a:p>
+              <a:rPr lang="en-US" sz="1300" b="1" i="1" dirty="0">
+                <a:solidFill>
+                  <a:srgbClr val="E50914"/>
+                </a:solidFill>
+                <a:latin typeface="Calibri" pitchFamily="34" charset="0"/>
+                <a:ea typeface="Calibri" pitchFamily="34" charset="-122"/>
+                <a:cs typeface="Calibri" pitchFamily="34" charset="-120"/>
+              </a:rPr>
+              <a:t>If the demo gods are unkind:  </a:t>
+            </a:r>
             <a:pPr indent="0" marL="0">
               <a:buNone/>
             </a:pPr>
             <a:r>
-              <a:rPr lang="en-US" sz="1600" dirty="0">
+              <a:rPr lang="en-US" sz="1300" i="1" dirty="0">
                 <a:solidFill>
                   <a:srgbClr val="C9CDD6"/>
                 </a:solidFill>
@@ -3838,63 +3647,9 @@
                 <a:ea typeface="Calibri" pitchFamily="34" charset="-122"/>
                 <a:cs typeface="Calibri" pitchFamily="34" charset="-120"/>
               </a:rPr>
-              <a:t>Low-budget October horror</a:t>
-            </a:r>
-            <a:endParaRPr lang="en-US" sz="1600" dirty="0"/>
-          </a:p>
-          <a:p>
-            <a:pPr indent="0" marL="0">
-              <a:spcAft>
-                <a:spcPts val="1000"/>
-              </a:spcAft>
-              <a:buNone/>
-            </a:pPr>
-            <a:r>
-              <a:rPr lang="en-US" sz="1600" b="1" dirty="0">
-                <a:solidFill>
-                  <a:srgbClr val="FFFFFF"/>
-                </a:solidFill>
-                <a:latin typeface="Calibri" pitchFamily="34" charset="0"/>
-                <a:ea typeface="Calibri" pitchFamily="34" charset="-122"/>
-                <a:cs typeface="Calibri" pitchFamily="34" charset="-120"/>
-              </a:rPr>
-              <a:t>72% success</a:t>
-            </a:r>
-            <a:endParaRPr lang="en-US" sz="1600" dirty="0"/>
-          </a:p>
-          <a:p>
-            <a:pPr indent="0" marL="0">
-              <a:buNone/>
-            </a:pPr>
-            <a:r>
-              <a:rPr lang="en-US" sz="1600" dirty="0">
-                <a:solidFill>
-                  <a:srgbClr val="C9CDD6"/>
-                </a:solidFill>
-                <a:latin typeface="Calibri" pitchFamily="34" charset="0"/>
-                <a:ea typeface="Calibri" pitchFamily="34" charset="-122"/>
-                <a:cs typeface="Calibri" pitchFamily="34" charset="-120"/>
-              </a:rPr>
-              <a:t>Big-budget September drama</a:t>
-            </a:r>
-            <a:endParaRPr lang="en-US" sz="1600" dirty="0"/>
-          </a:p>
-          <a:p>
-            <a:pPr indent="0" marL="0">
-              <a:buNone/>
-            </a:pPr>
-            <a:r>
-              <a:rPr lang="en-US" sz="1600" b="1" dirty="0">
-                <a:solidFill>
-                  <a:srgbClr val="F5A9B0"/>
-                </a:solidFill>
-                <a:latin typeface="Calibri" pitchFamily="34" charset="0"/>
-                <a:ea typeface="Calibri" pitchFamily="34" charset="-122"/>
-                <a:cs typeface="Calibri" pitchFamily="34" charset="-120"/>
-              </a:rPr>
-              <a:t>48% success</a:t>
-            </a:r>
-            <a:endParaRPr lang="en-US" sz="1600" dirty="0"/>
+              <a:t>summer franchise tentpole → 72% · low-budget October horror → 72% · big-budget September drama → 48%.</a:t>
+            </a:r>
+            <a:endParaRPr lang="en-US" sz="1300" dirty="0"/>
           </a:p>
         </p:txBody>
       </p:sp>
@@ -4290,7 +4045,7 @@
                 <a:ea typeface="Calibri" pitchFamily="34" charset="-122"/>
                 <a:cs typeface="Calibri" pitchFamily="34" charset="-120"/>
               </a:rPr>
-              <a:t>Add star power, marketing spend, and competition features.</a:t>
+              <a:t>Star power, marketing spend, and competition features.</a:t>
             </a:r>
             <a:endParaRPr lang="en-US" sz="1400" dirty="0"/>
           </a:p>
@@ -4808,7 +4563,7 @@
               <a:buNone/>
             </a:pPr>
             <a:r>
-              <a:rPr lang="en-US" sz="1900" i="1" dirty="0">
+              <a:rPr lang="en-US" sz="1800" i="1" dirty="0">
                 <a:solidFill>
                   <a:srgbClr val="1A1A2E"/>
                 </a:solidFill>
@@ -4816,9 +4571,9 @@
                 <a:ea typeface="Georgia" pitchFamily="34" charset="-122"/>
                 <a:cs typeface="Georgia" pitchFamily="34" charset="-120"/>
               </a:rPr>
-              <a:t>An end-to-end pipeline: data → EDA → models → an interactive app that scores a film's odds of success.</a:t>
-            </a:r>
-            <a:endParaRPr lang="en-US" sz="1900" dirty="0"/>
+              <a:t>An end-to-end pipeline: data → EDA → machine-learning models → an interactive app that scores a film's odds of success.</a:t>
+            </a:r>
+            <a:endParaRPr lang="en-US" sz="1800" dirty="0"/>
           </a:p>
         </p:txBody>
       </p:sp>
@@ -5773,7 +5528,7 @@
                 <a:ea typeface="Calibri" pitchFamily="34" charset="-122"/>
                 <a:cs typeface="Calibri" pitchFamily="34" charset="-120"/>
               </a:rPr>
-              <a:t>Cleaning: released films only; require plausible budget (≥ $1,000 — 13 films had impossible $1–$250 budgets) and real revenue; parse JSON fields.</a:t>
+              <a:t>Cleaning: released films only; plausible budget (≥ $1,000 — 13 films had impossible $1–$250 budgets) and real revenue; parse JSON fields.</a:t>
             </a:r>
             <a:endParaRPr lang="en-US" sz="1500" dirty="0"/>
           </a:p>
@@ -5904,7 +5659,7 @@
                 <a:ea typeface="Calibri" pitchFamily="34" charset="-122"/>
                 <a:cs typeface="Calibri" pitchFamily="34" charset="-120"/>
               </a:rPr>
-              <a:t>EDA</a:t>
+              <a:t>EDA HIGHLIGHTS</a:t>
             </a:r>
             <a:endParaRPr lang="en-US" sz="1200" dirty="0"/>
           </a:p>
@@ -5943,7 +5698,7 @@
                 <a:ea typeface="Georgia" pitchFamily="34" charset="-122"/>
                 <a:cs typeface="Georgia" pitchFamily="34" charset="-120"/>
               </a:rPr>
-              <a:t>The target is well balanced</a:t>
+              <a:t>Budget vs. revenue — the break-even line</a:t>
             </a:r>
             <a:endParaRPr lang="en-US" sz="2800" dirty="0"/>
           </a:p>
@@ -5951,7 +5706,7 @@
       </p:sp>
       <p:pic>
         <p:nvPicPr>
-          <p:cNvPr id="4" name="Image 0" descr="/sessions/optimistic-determined-edison/mnt/outputs/UMBC-DATA606-Capstone/docs/figures/target_balance.png">    </p:cNvPr>
+          <p:cNvPr id="4" name="Image 0" descr="/sessions/optimistic-determined-edison/mnt/outputs/UMBC-DATA606-Capstone/docs/figures/budget_vs_revenue.png">    </p:cNvPr>
           <p:cNvPicPr>
             <a:picLocks noChangeAspect="1"/>
           </p:cNvPicPr>
@@ -5965,7 +5720,7 @@
         <p:spPr>
           <a:xfrm>
             <a:off x="640080" y="1554480"/>
-            <a:ext cx="6583680" cy="4389120"/>
+            <a:ext cx="6949440" cy="4480560"/>
           </a:xfrm>
           <a:prstGeom prst="rect">
             <a:avLst/>
@@ -5980,8 +5735,8 @@
         </p:nvSpPr>
         <p:spPr>
           <a:xfrm>
-            <a:off x="7589520" y="2286000"/>
-            <a:ext cx="3931920" cy="2377440"/>
+            <a:off x="7863840" y="2011680"/>
+            <a:ext cx="3749040" cy="3291840"/>
           </a:xfrm>
           <a:prstGeom prst="rect">
             <a:avLst/>
@@ -6001,7 +5756,7 @@
               <a:buChar char="•"/>
             </a:pPr>
             <a:r>
-              <a:rPr lang="en-US" sz="1600" dirty="0">
+              <a:rPr lang="en-US" sz="1500" dirty="0">
                 <a:solidFill>
                   <a:srgbClr val="33373F"/>
                 </a:solidFill>
@@ -6009,9 +5764,9 @@
                 <a:ea typeface="Calibri" pitchFamily="34" charset="-122"/>
                 <a:cs typeface="Calibri" pitchFamily="34" charset="-120"/>
               </a:rPr>
-              <a:t>About 56% of films are successes, 44% are not.</a:t>
-            </a:r>
-            <a:endParaRPr lang="en-US" sz="1600" dirty="0"/>
+              <a:t>Dashed line = break-even (revenue = 2× budget). Green cleared it; red didn't.</a:t>
+            </a:r>
+            <a:endParaRPr lang="en-US" sz="1500" dirty="0"/>
           </a:p>
           <a:p>
             <a:pPr marL="342900" indent="-342900">
@@ -6022,7 +5777,7 @@
               <a:buChar char="•"/>
             </a:pPr>
             <a:r>
-              <a:rPr lang="en-US" sz="1600" dirty="0">
+              <a:rPr lang="en-US" sz="1500" dirty="0">
                 <a:solidFill>
                   <a:srgbClr val="33373F"/>
                 </a:solidFill>
@@ -6030,9 +5785,30 @@
                 <a:ea typeface="Calibri" pitchFamily="34" charset="-122"/>
                 <a:cs typeface="Calibri" pitchFamily="34" charset="-120"/>
               </a:rPr>
-              <a:t>A near-even split keeps the model honest and makes accuracy a meaningful metric.</a:t>
-            </a:r>
-            <a:endParaRPr lang="en-US" sz="1600" dirty="0"/>
+              <a:t>Bigger budgets earn more in absolute terms — but plenty of expensive films still miss.</a:t>
+            </a:r>
+            <a:endParaRPr lang="en-US" sz="1500" dirty="0"/>
+          </a:p>
+          <a:p>
+            <a:pPr marL="342900" indent="-342900">
+              <a:spcAft>
+                <a:spcPts val="1000"/>
+              </a:spcAft>
+              <a:buSzPct val="100000"/>
+              <a:buChar char="•"/>
+            </a:pPr>
+            <a:r>
+              <a:rPr lang="en-US" sz="1500" b="1" dirty="0">
+                <a:solidFill>
+                  <a:srgbClr val="1A1A2E"/>
+                </a:solidFill>
+                <a:latin typeface="Calibri" pitchFamily="34" charset="0"/>
+                <a:ea typeface="Calibri" pitchFamily="34" charset="-122"/>
+                <a:cs typeface="Calibri" pitchFamily="34" charset="-120"/>
+              </a:rPr>
+              <a:t>Budget matters, but it isn't destiny — which is why this is worth modeling.</a:t>
+            </a:r>
+            <a:endParaRPr lang="en-US" sz="1500" dirty="0"/>
           </a:p>
         </p:txBody>
       </p:sp>
@@ -6101,7 +5877,7 @@
                 <a:ea typeface="Calibri" pitchFamily="34" charset="-122"/>
                 <a:cs typeface="Calibri" pitchFamily="34" charset="-120"/>
               </a:rPr>
-              <a:t>EDA</a:t>
+              <a:t>EDA HIGHLIGHTS</a:t>
             </a:r>
             <a:endParaRPr lang="en-US" sz="1200" dirty="0"/>
           </a:p>
@@ -6140,7 +5916,7 @@
                 <a:ea typeface="Georgia" pitchFamily="34" charset="-122"/>
                 <a:cs typeface="Georgia" pitchFamily="34" charset="-120"/>
               </a:rPr>
-              <a:t>Budget vs. revenue — the break-even line</a:t>
+              <a:t>When a film opens matters</a:t>
             </a:r>
             <a:endParaRPr lang="en-US" sz="2800" dirty="0"/>
           </a:p>
@@ -6148,7 +5924,7 @@
       </p:sp>
       <p:pic>
         <p:nvPicPr>
-          <p:cNvPr id="4" name="Image 0" descr="/sessions/optimistic-determined-edison/mnt/outputs/UMBC-DATA606-Capstone/docs/figures/budget_vs_revenue.png">    </p:cNvPr>
+          <p:cNvPr id="4" name="Image 0" descr="/sessions/optimistic-determined-edison/mnt/outputs/UMBC-DATA606-Capstone/docs/figures/month_success_volume.png">    </p:cNvPr>
           <p:cNvPicPr>
             <a:picLocks noChangeAspect="1"/>
           </p:cNvPicPr>
@@ -6162,7 +5938,7 @@
         <p:spPr>
           <a:xfrm>
             <a:off x="640080" y="1554480"/>
-            <a:ext cx="6949440" cy="4480560"/>
+            <a:ext cx="7132320" cy="4480560"/>
           </a:xfrm>
           <a:prstGeom prst="rect">
             <a:avLst/>
@@ -6177,8 +5953,8 @@
         </p:nvSpPr>
         <p:spPr>
           <a:xfrm>
-            <a:off x="7863840" y="2011680"/>
-            <a:ext cx="3749040" cy="3291840"/>
+            <a:off x="7955280" y="2011680"/>
+            <a:ext cx="3657600" cy="3474720"/>
           </a:xfrm>
           <a:prstGeom prst="rect">
             <a:avLst/>
@@ -6206,7 +5982,7 @@
                 <a:ea typeface="Calibri" pitchFamily="34" charset="-122"/>
                 <a:cs typeface="Calibri" pitchFamily="34" charset="-120"/>
               </a:rPr>
-              <a:t>Dashed line = break-even (revenue = 2× budget). Green cleared it; red didn't.</a:t>
+              <a:t>Success peaks in June (~67%); September is worst (~43%) — and one of the busiest: the “dump month.”</a:t>
             </a:r>
             <a:endParaRPr lang="en-US" sz="1500" dirty="0"/>
           </a:p>
@@ -6227,7 +6003,7 @@
                 <a:ea typeface="Calibri" pitchFamily="34" charset="-122"/>
                 <a:cs typeface="Calibri" pitchFamily="34" charset="-120"/>
               </a:rPr>
-              <a:t>Bigger budgets earn more in absolute terms — but plenty of expensive films still miss.</a:t>
+              <a:t>By industry window: Summer and Holiday ~61% vs. 56% baseline; early Fall just 47%.</a:t>
             </a:r>
             <a:endParaRPr lang="en-US" sz="1500" dirty="0"/>
           </a:p>
@@ -6240,15 +6016,15 @@
               <a:buChar char="•"/>
             </a:pPr>
             <a:r>
-              <a:rPr lang="en-US" sz="1500" b="1" dirty="0">
-                <a:solidFill>
-                  <a:srgbClr val="1A1A2E"/>
-                </a:solidFill>
-                <a:latin typeface="Calibri" pitchFamily="34" charset="0"/>
-                <a:ea typeface="Calibri" pitchFamily="34" charset="-122"/>
-                <a:cs typeface="Calibri" pitchFamily="34" charset="-120"/>
-              </a:rPr>
-              <a:t>Budget matters, but it isn't destiny — which is why this is worth modeling.</a:t>
+              <a:rPr lang="en-US" sz="1500" dirty="0">
+                <a:solidFill>
+                  <a:srgbClr val="33373F"/>
+                </a:solidFill>
+                <a:latin typeface="Calibri" pitchFamily="34" charset="0"/>
+                <a:ea typeface="Calibri" pitchFamily="34" charset="-122"/>
+                <a:cs typeface="Calibri" pitchFamily="34" charset="-120"/>
+              </a:rPr>
+              <a:t>Genre matters too: horror leads (~78%), action is lowest (~50%).</a:t>
             </a:r>
             <a:endParaRPr lang="en-US" sz="1500" dirty="0"/>
           </a:p>
@@ -6319,7 +6095,7 @@
                 <a:ea typeface="Calibri" pitchFamily="34" charset="-122"/>
                 <a:cs typeface="Calibri" pitchFamily="34" charset="-120"/>
               </a:rPr>
-              <a:t>EDA</a:t>
+              <a:t>EDA HIGHLIGHTS</a:t>
             </a:r>
             <a:endParaRPr lang="en-US" sz="1200" dirty="0"/>
           </a:p>
@@ -6358,7 +6134,7 @@
                 <a:ea typeface="Georgia" pitchFamily="34" charset="-122"/>
                 <a:cs typeface="Georgia" pitchFamily="34" charset="-120"/>
               </a:rPr>
-              <a:t>Success varies widely by genre</a:t>
+              <a:t>The right genre in the right window</a:t>
             </a:r>
             <a:endParaRPr lang="en-US" sz="2800" dirty="0"/>
           </a:p>
@@ -6366,7 +6142,7 @@
       </p:sp>
       <p:pic>
         <p:nvPicPr>
-          <p:cNvPr id="4" name="Image 0" descr="/sessions/optimistic-determined-edison/mnt/outputs/UMBC-DATA606-Capstone/docs/figures/genre_success.png">    </p:cNvPr>
+          <p:cNvPr id="4" name="Image 0" descr="/sessions/optimistic-determined-edison/mnt/outputs/UMBC-DATA606-Capstone/docs/figures/genre_timing_comparison.png">    </p:cNvPr>
           <p:cNvPicPr>
             <a:picLocks noChangeAspect="1"/>
           </p:cNvPicPr>
@@ -6380,7 +6156,7 @@
         <p:spPr>
           <a:xfrm>
             <a:off x="640080" y="1554480"/>
-            <a:ext cx="6949440" cy="4480560"/>
+            <a:ext cx="7132320" cy="4480560"/>
           </a:xfrm>
           <a:prstGeom prst="rect">
             <a:avLst/>
@@ -6395,8 +6171,8 @@
         </p:nvSpPr>
         <p:spPr>
           <a:xfrm>
-            <a:off x="7863840" y="2194560"/>
-            <a:ext cx="3749040" cy="2926080"/>
+            <a:off x="7955280" y="1828800"/>
+            <a:ext cx="3657600" cy="3657600"/>
           </a:xfrm>
           <a:prstGeom prst="rect">
             <a:avLst/>
@@ -6416,7 +6192,7 @@
               <a:buChar char="•"/>
             </a:pPr>
             <a:r>
-              <a:rPr lang="en-US" sz="1600" dirty="0">
+              <a:rPr lang="en-US" sz="1500" dirty="0">
                 <a:solidFill>
                   <a:srgbClr val="33373F"/>
                 </a:solidFill>
@@ -6424,9 +6200,9 @@
                 <a:ea typeface="Calibri" pitchFamily="34" charset="-122"/>
                 <a:cs typeface="Calibri" pitchFamily="34" charset="-120"/>
               </a:rPr>
-              <a:t>Horror leads (~78%) — cheap to make, high ROI.</a:t>
-            </a:r>
-            <a:endParaRPr lang="en-US" sz="1600" dirty="0"/>
+              <a:t>Action/Adventure in summer: 64% vs 50% the rest of the year (+14 pts).</a:t>
+            </a:r>
+            <a:endParaRPr lang="en-US" sz="1500" dirty="0"/>
           </a:p>
           <a:p>
             <a:pPr marL="342900" indent="-342900">
@@ -6437,7 +6213,7 @@
               <a:buChar char="•"/>
             </a:pPr>
             <a:r>
-              <a:rPr lang="en-US" sz="1600" dirty="0">
+              <a:rPr lang="en-US" sz="1500" dirty="0">
                 <a:solidFill>
                   <a:srgbClr val="33373F"/>
                 </a:solidFill>
@@ -6445,9 +6221,9 @@
                 <a:ea typeface="Calibri" pitchFamily="34" charset="-122"/>
                 <a:cs typeface="Calibri" pitchFamily="34" charset="-120"/>
               </a:rPr>
-              <a:t>Animation and Adventure also outperform; Action is lowest (~50%).</a:t>
-            </a:r>
-            <a:endParaRPr lang="en-US" sz="1600" dirty="0"/>
+              <a:t>Family/Animation over the holidays: 68% vs 58% (+10 pts).</a:t>
+            </a:r>
+            <a:endParaRPr lang="en-US" sz="1500" dirty="0"/>
           </a:p>
           <a:p>
             <a:pPr marL="342900" indent="-342900">
@@ -6458,7 +6234,7 @@
               <a:buChar char="•"/>
             </a:pPr>
             <a:r>
-              <a:rPr lang="en-US" sz="1600" dirty="0">
+              <a:rPr lang="en-US" sz="1500" dirty="0">
                 <a:solidFill>
                   <a:srgbClr val="33373F"/>
                 </a:solidFill>
@@ -6466,9 +6242,30 @@
                 <a:ea typeface="Calibri" pitchFamily="34" charset="-122"/>
                 <a:cs typeface="Calibri" pitchFamily="34" charset="-120"/>
               </a:rPr>
-              <a:t>Genre carries real predictive signal.</a:t>
-            </a:r>
-            <a:endParaRPr lang="en-US" sz="1600" dirty="0"/>
+              <a:t>Horror clusters in October — its single biggest release month.</a:t>
+            </a:r>
+            <a:endParaRPr lang="en-US" sz="1500" dirty="0"/>
+          </a:p>
+          <a:p>
+            <a:pPr marL="342900" indent="-342900">
+              <a:spcAft>
+                <a:spcPts val="1000"/>
+              </a:spcAft>
+              <a:buSzPct val="100000"/>
+              <a:buChar char="•"/>
+            </a:pPr>
+            <a:r>
+              <a:rPr lang="en-US" sz="1500" b="1" dirty="0">
+                <a:solidFill>
+                  <a:srgbClr val="1A1A2E"/>
+                </a:solidFill>
+                <a:latin typeface="Calibri" pitchFamily="34" charset="0"/>
+                <a:ea typeface="Calibri" pitchFamily="34" charset="-122"/>
+                <a:cs typeface="Calibri" pitchFamily="34" charset="-120"/>
+              </a:rPr>
+              <a:t>These patterns become features the model can use.</a:t>
+            </a:r>
+            <a:endParaRPr lang="en-US" sz="1500" dirty="0"/>
           </a:p>
         </p:txBody>
       </p:sp>
@@ -6537,7 +6334,7 @@
                 <a:ea typeface="Calibri" pitchFamily="34" charset="-122"/>
                 <a:cs typeface="Calibri" pitchFamily="34" charset="-120"/>
               </a:rPr>
-              <a:t>EDA — RELEASE TIMING</a:t>
+              <a:t>MACHINE LEARNING</a:t>
             </a:r>
             <a:endParaRPr lang="en-US" sz="1200" dirty="0"/>
           </a:p>
@@ -6576,45 +6373,61 @@
                 <a:ea typeface="Georgia" pitchFamily="34" charset="-122"/>
                 <a:cs typeface="Georgia" pitchFamily="34" charset="-120"/>
               </a:rPr>
-              <a:t>When a film opens matters</a:t>
+              <a:t>Approach — strictly pre-release features, no leakage</a:t>
             </a:r>
             <a:endParaRPr lang="en-US" sz="2800" dirty="0"/>
           </a:p>
         </p:txBody>
       </p:sp>
-      <p:pic>
-        <p:nvPicPr>
-          <p:cNvPr id="4" name="Image 0" descr="/sessions/optimistic-determined-edison/mnt/outputs/UMBC-DATA606-Capstone/docs/figures/month_success_volume.png">    </p:cNvPr>
-          <p:cNvPicPr>
-            <a:picLocks noChangeAspect="1"/>
-          </p:cNvPicPr>
-          <p:nvPr/>
-        </p:nvPicPr>
-        <p:blipFill>
-          <a:blip r:embed="rId1"/>
-          <a:srcRect l="0" r="0" t="0" b="0"/>
-          <a:stretch/>
-        </p:blipFill>
-        <p:spPr>
-          <a:xfrm>
-            <a:off x="640080" y="1554480"/>
-            <a:ext cx="7132320" cy="4480560"/>
-          </a:xfrm>
-          <a:prstGeom prst="rect">
-            <a:avLst/>
-          </a:prstGeom>
-        </p:spPr>
-      </p:pic>
-      <p:sp>
-        <p:nvSpPr>
-          <p:cNvPr id="5" name="Text 2"/>
-          <p:cNvSpPr/>
-          <p:nvPr/>
-        </p:nvSpPr>
-        <p:spPr>
-          <a:xfrm>
-            <a:off x="7955280" y="2194560"/>
-            <a:ext cx="3657600" cy="2926080"/>
+      <p:sp>
+        <p:nvSpPr>
+          <p:cNvPr id="4" name="Text 2"/>
+          <p:cNvSpPr/>
+          <p:nvPr/>
+        </p:nvSpPr>
+        <p:spPr>
+          <a:xfrm>
+            <a:off x="640080" y="1600200"/>
+            <a:ext cx="5486400" cy="365760"/>
+          </a:xfrm>
+          <a:prstGeom prst="rect">
+            <a:avLst/>
+          </a:prstGeom>
+          <a:noFill/>
+          <a:ln/>
+        </p:spPr>
+        <p:txBody>
+          <a:bodyPr wrap="square" lIns="0" tIns="0" rIns="0" bIns="0" rtlCol="0" anchor="ctr"/>
+          <a:lstStyle/>
+          <a:p>
+            <a:pPr indent="0" marL="0">
+              <a:buNone/>
+            </a:pPr>
+            <a:r>
+              <a:rPr lang="en-US" sz="1500" b="1" dirty="0">
+                <a:solidFill>
+                  <a:srgbClr val="E50914"/>
+                </a:solidFill>
+                <a:latin typeface="Calibri" pitchFamily="34" charset="0"/>
+                <a:ea typeface="Calibri" pitchFamily="34" charset="-122"/>
+                <a:cs typeface="Calibri" pitchFamily="34" charset="-120"/>
+              </a:rPr>
+              <a:t>16 input features, all knowable before release</a:t>
+            </a:r>
+            <a:endParaRPr lang="en-US" sz="1500" dirty="0"/>
+          </a:p>
+        </p:txBody>
+      </p:sp>
+      <p:sp>
+        <p:nvSpPr>
+          <p:cNvPr id="5" name="Text 3"/>
+          <p:cNvSpPr/>
+          <p:nvPr/>
+        </p:nvSpPr>
+        <p:spPr>
+          <a:xfrm>
+            <a:off x="731520" y="2011680"/>
+            <a:ext cx="5486400" cy="2926080"/>
           </a:xfrm>
           <a:prstGeom prst="rect">
             <a:avLst/>
@@ -6634,7 +6447,7 @@
               <a:buChar char="•"/>
             </a:pPr>
             <a:r>
-              <a:rPr lang="en-US" sz="1600" dirty="0">
+              <a:rPr lang="en-US" sz="1500" dirty="0">
                 <a:solidFill>
                   <a:srgbClr val="33373F"/>
                 </a:solidFill>
@@ -6642,9 +6455,9 @@
                 <a:ea typeface="Calibri" pitchFamily="34" charset="-122"/>
                 <a:cs typeface="Calibri" pitchFamily="34" charset="-120"/>
               </a:rPr>
-              <a:t>Success peaks in June (~67%) and stays strong over the holidays.</a:t>
-            </a:r>
-            <a:endParaRPr lang="en-US" sz="1600" dirty="0"/>
+              <a:t>Financial: budget (log) · spend intensity (budget per minute)</a:t>
+            </a:r>
+            <a:endParaRPr lang="en-US" sz="1500" dirty="0"/>
           </a:p>
           <a:p>
             <a:pPr marL="342900" indent="-342900">
@@ -6655,7 +6468,7 @@
               <a:buChar char="•"/>
             </a:pPr>
             <a:r>
-              <a:rPr lang="en-US" sz="1600" dirty="0">
+              <a:rPr lang="en-US" sz="1500" dirty="0">
                 <a:solidFill>
                   <a:srgbClr val="33373F"/>
                 </a:solidFill>
@@ -6663,9 +6476,253 @@
                 <a:ea typeface="Calibri" pitchFamily="34" charset="-122"/>
                 <a:cs typeface="Calibri" pitchFamily="34" charset="-120"/>
               </a:rPr>
-              <a:t>September is the worst month (~43%) — and one of the busiest: the classic “dump month.”</a:t>
-            </a:r>
-            <a:endParaRPr lang="en-US" sz="1600" dirty="0"/>
+              <a:t>Content: primary genre · runtime · # genres · language(s)</a:t>
+            </a:r>
+            <a:endParaRPr lang="en-US" sz="1500" dirty="0"/>
+          </a:p>
+          <a:p>
+            <a:pPr marL="342900" indent="-342900">
+              <a:spcAft>
+                <a:spcPts val="1000"/>
+              </a:spcAft>
+              <a:buSzPct val="100000"/>
+              <a:buChar char="•"/>
+            </a:pPr>
+            <a:r>
+              <a:rPr lang="en-US" sz="1500" dirty="0">
+                <a:solidFill>
+                  <a:srgbClr val="33373F"/>
+                </a:solidFill>
+                <a:latin typeface="Calibri" pitchFamily="34" charset="0"/>
+                <a:ea typeface="Calibri" pitchFamily="34" charset="-122"/>
+                <a:cs typeface="Calibri" pitchFamily="34" charset="-120"/>
+              </a:rPr>
+              <a:t>Timing: release year · season · industry release window · genre-timing flags</a:t>
+            </a:r>
+            <a:endParaRPr lang="en-US" sz="1500" dirty="0"/>
+          </a:p>
+          <a:p>
+            <a:pPr marL="342900" indent="-342900">
+              <a:spcAft>
+                <a:spcPts val="1000"/>
+              </a:spcAft>
+              <a:buSzPct val="100000"/>
+              <a:buChar char="•"/>
+            </a:pPr>
+            <a:r>
+              <a:rPr lang="en-US" sz="1500" dirty="0">
+                <a:solidFill>
+                  <a:srgbClr val="33373F"/>
+                </a:solidFill>
+                <a:latin typeface="Calibri" pitchFamily="34" charset="0"/>
+                <a:ea typeface="Calibri" pitchFamily="34" charset="-122"/>
+                <a:cs typeface="Calibri" pitchFamily="34" charset="-120"/>
+              </a:rPr>
+              <a:t>Production: # production companies · major-studio flag · sequel/franchise flag</a:t>
+            </a:r>
+            <a:endParaRPr lang="en-US" sz="1500" dirty="0"/>
+          </a:p>
+        </p:txBody>
+      </p:sp>
+      <p:sp>
+        <p:nvSpPr>
+          <p:cNvPr id="6" name="Text 4"/>
+          <p:cNvSpPr/>
+          <p:nvPr/>
+        </p:nvSpPr>
+        <p:spPr>
+          <a:xfrm>
+            <a:off x="6583680" y="1600200"/>
+            <a:ext cx="4937760" cy="365760"/>
+          </a:xfrm>
+          <a:prstGeom prst="rect">
+            <a:avLst/>
+          </a:prstGeom>
+          <a:noFill/>
+          <a:ln/>
+        </p:spPr>
+        <p:txBody>
+          <a:bodyPr wrap="square" lIns="0" tIns="0" rIns="0" bIns="0" rtlCol="0" anchor="ctr"/>
+          <a:lstStyle/>
+          <a:p>
+            <a:pPr indent="0" marL="0">
+              <a:buNone/>
+            </a:pPr>
+            <a:r>
+              <a:rPr lang="en-US" sz="1500" b="1" dirty="0">
+                <a:solidFill>
+                  <a:srgbClr val="E50914"/>
+                </a:solidFill>
+                <a:latin typeface="Calibri" pitchFamily="34" charset="0"/>
+                <a:ea typeface="Calibri" pitchFamily="34" charset="-122"/>
+                <a:cs typeface="Calibri" pitchFamily="34" charset="-120"/>
+              </a:rPr>
+              <a:t>Deliberately excluded (leakage)</a:t>
+            </a:r>
+            <a:endParaRPr lang="en-US" sz="1500" dirty="0"/>
+          </a:p>
+        </p:txBody>
+      </p:sp>
+      <p:sp>
+        <p:nvSpPr>
+          <p:cNvPr id="7" name="Text 5"/>
+          <p:cNvSpPr/>
+          <p:nvPr/>
+        </p:nvSpPr>
+        <p:spPr>
+          <a:xfrm>
+            <a:off x="6675120" y="2011680"/>
+            <a:ext cx="4846320" cy="2926080"/>
+          </a:xfrm>
+          <a:prstGeom prst="rect">
+            <a:avLst/>
+          </a:prstGeom>
+          <a:noFill/>
+          <a:ln/>
+        </p:spPr>
+        <p:txBody>
+          <a:bodyPr wrap="square" rtlCol="0" anchor="t"/>
+          <a:lstStyle/>
+          <a:p>
+            <a:pPr marL="342900" indent="-342900">
+              <a:spcAft>
+                <a:spcPts val="1000"/>
+              </a:spcAft>
+              <a:buSzPct val="100000"/>
+              <a:buChar char="•"/>
+            </a:pPr>
+            <a:r>
+              <a:rPr lang="en-US" sz="1500" dirty="0">
+                <a:solidFill>
+                  <a:srgbClr val="33373F"/>
+                </a:solidFill>
+                <a:latin typeface="Calibri" pitchFamily="34" charset="0"/>
+                <a:ea typeface="Calibri" pitchFamily="34" charset="-122"/>
+                <a:cs typeface="Calibri" pitchFamily="34" charset="-120"/>
+              </a:rPr>
+              <a:t>Revenue, ROI, profit — the outcome itself.</a:t>
+            </a:r>
+            <a:endParaRPr lang="en-US" sz="1500" dirty="0"/>
+          </a:p>
+          <a:p>
+            <a:pPr marL="342900" indent="-342900">
+              <a:spcAft>
+                <a:spcPts val="1000"/>
+              </a:spcAft>
+              <a:buSzPct val="100000"/>
+              <a:buChar char="•"/>
+            </a:pPr>
+            <a:r>
+              <a:rPr lang="en-US" sz="1500" dirty="0">
+                <a:solidFill>
+                  <a:srgbClr val="33373F"/>
+                </a:solidFill>
+                <a:latin typeface="Calibri" pitchFamily="34" charset="0"/>
+                <a:ea typeface="Calibri" pitchFamily="34" charset="-122"/>
+                <a:cs typeface="Calibri" pitchFamily="34" charset="-120"/>
+              </a:rPr>
+              <a:t>Popularity, ratings, vote counts — these only exist after release.</a:t>
+            </a:r>
+            <a:endParaRPr lang="en-US" sz="1500" dirty="0"/>
+          </a:p>
+          <a:p>
+            <a:pPr marL="342900" indent="-342900">
+              <a:spcAft>
+                <a:spcPts val="1000"/>
+              </a:spcAft>
+              <a:buSzPct val="100000"/>
+              <a:buChar char="•"/>
+            </a:pPr>
+            <a:r>
+              <a:rPr lang="en-US" sz="1500" b="1" dirty="0">
+                <a:solidFill>
+                  <a:srgbClr val="1A1A2E"/>
+                </a:solidFill>
+                <a:latin typeface="Calibri" pitchFamily="34" charset="0"/>
+                <a:ea typeface="Calibri" pitchFamily="34" charset="-122"/>
+                <a:cs typeface="Calibri" pitchFamily="34" charset="-120"/>
+              </a:rPr>
+              <a:t>The model only sees what a studio would know at the greenlight moment.</a:t>
+            </a:r>
+            <a:endParaRPr lang="en-US" sz="1500" dirty="0"/>
+          </a:p>
+        </p:txBody>
+      </p:sp>
+      <p:sp>
+        <p:nvSpPr>
+          <p:cNvPr id="8" name="Shape 6"/>
+          <p:cNvSpPr/>
+          <p:nvPr/>
+        </p:nvSpPr>
+        <p:spPr>
+          <a:xfrm>
+            <a:off x="640080" y="5120640"/>
+            <a:ext cx="10881360" cy="1005840"/>
+          </a:xfrm>
+          <a:prstGeom prst="rect">
+            <a:avLst/>
+          </a:prstGeom>
+          <a:solidFill>
+            <a:srgbClr val="F3F4F6"/>
+          </a:solidFill>
+          <a:ln w="12700">
+            <a:solidFill>
+              <a:srgbClr val="E3E6EA"/>
+            </a:solidFill>
+            <a:prstDash val="solid"/>
+          </a:ln>
+        </p:spPr>
+      </p:sp>
+      <p:sp>
+        <p:nvSpPr>
+          <p:cNvPr id="9" name="Text 7"/>
+          <p:cNvSpPr/>
+          <p:nvPr/>
+        </p:nvSpPr>
+        <p:spPr>
+          <a:xfrm>
+            <a:off x="914400" y="5120640"/>
+            <a:ext cx="10332720" cy="1005840"/>
+          </a:xfrm>
+          <a:prstGeom prst="rect">
+            <a:avLst/>
+          </a:prstGeom>
+          <a:noFill/>
+          <a:ln/>
+        </p:spPr>
+        <p:txBody>
+          <a:bodyPr wrap="square" lIns="0" tIns="0" rIns="0" bIns="0" rtlCol="0" anchor="ctr"/>
+          <a:lstStyle/>
+          <a:p>
+            <a:pPr indent="0" marL="0">
+              <a:buNone/>
+            </a:pPr>
+            <a:r>
+              <a:rPr lang="en-US" sz="1400" b="1" dirty="0">
+                <a:solidFill>
+                  <a:srgbClr val="1A1A2E"/>
+                </a:solidFill>
+                <a:latin typeface="Calibri" pitchFamily="34" charset="0"/>
+                <a:ea typeface="Calibri" pitchFamily="34" charset="-122"/>
+                <a:cs typeface="Calibri" pitchFamily="34" charset="-120"/>
+              </a:rPr>
+              <a:t>Setup:  </a:t>
+            </a:r>
+            <a:pPr indent="0" marL="0">
+              <a:buNone/>
+            </a:pPr>
+            <a:r>
+              <a:rPr lang="en-US" sz="1400" dirty="0">
+                <a:solidFill>
+                  <a:srgbClr val="33373F"/>
+                </a:solidFill>
+                <a:latin typeface="Calibri" pitchFamily="34" charset="0"/>
+                <a:ea typeface="Calibri" pitchFamily="34" charset="-122"/>
+                <a:cs typeface="Calibri" pitchFamily="34" charset="-120"/>
+              </a:rPr>
+              <a:t>stratified 80/20 train-test split (2,572 / 643 films) + 5-fold cross-validation · three classifiers: Logistic Regression, Random Forest (tuned), Gradient Boosting.</a:t>
+            </a:r>
+            <a:endParaRPr lang="en-US" sz="1400" dirty="0"/>
           </a:p>
         </p:txBody>
       </p:sp>
@@ -6734,7 +6791,7 @@
                 <a:ea typeface="Calibri" pitchFamily="34" charset="-122"/>
                 <a:cs typeface="Calibri" pitchFamily="34" charset="-120"/>
               </a:rPr>
-              <a:t>EDA — RELEASE TIMING</a:t>
+              <a:t>MACHINE LEARNING</a:t>
             </a:r>
             <a:endParaRPr lang="en-US" sz="1200" dirty="0"/>
           </a:p>
@@ -6773,65 +6830,141 @@
                 <a:ea typeface="Georgia" pitchFamily="34" charset="-122"/>
                 <a:cs typeface="Georgia" pitchFamily="34" charset="-120"/>
               </a:rPr>
-              <a:t>Industry release windows</a:t>
+              <a:t>Feature engineering — two signals that moved the needle</a:t>
             </a:r>
             <a:endParaRPr lang="en-US" sz="2800" dirty="0"/>
           </a:p>
         </p:txBody>
       </p:sp>
-      <p:pic>
-        <p:nvPicPr>
-          <p:cNvPr id="4" name="Image 0" descr="/sessions/optimistic-determined-edison/mnt/outputs/UMBC-DATA606-Capstone/docs/figures/release_window.png">    </p:cNvPr>
-          <p:cNvPicPr>
-            <a:picLocks noChangeAspect="1"/>
-          </p:cNvPicPr>
-          <p:nvPr/>
-        </p:nvPicPr>
-        <p:blipFill>
-          <a:blip r:embed="rId1"/>
-          <a:srcRect l="0" r="0" t="0" b="0"/>
-          <a:stretch/>
-        </p:blipFill>
-        <p:spPr>
-          <a:xfrm>
-            <a:off x="640080" y="1554480"/>
-            <a:ext cx="7132320" cy="4480560"/>
-          </a:xfrm>
-          <a:prstGeom prst="rect">
-            <a:avLst/>
-          </a:prstGeom>
-        </p:spPr>
-      </p:pic>
-      <p:sp>
-        <p:nvSpPr>
-          <p:cNvPr id="5" name="Text 2"/>
-          <p:cNvSpPr/>
-          <p:nvPr/>
-        </p:nvSpPr>
-        <p:spPr>
-          <a:xfrm>
-            <a:off x="7955280" y="2194560"/>
-            <a:ext cx="3657600" cy="3108960"/>
-          </a:xfrm>
-          <a:prstGeom prst="rect">
-            <a:avLst/>
-          </a:prstGeom>
-          <a:noFill/>
-          <a:ln/>
-        </p:spPr>
-        <p:txBody>
-          <a:bodyPr wrap="square" rtlCol="0" anchor="t"/>
-          <a:lstStyle/>
-          <a:p>
-            <a:pPr marL="342900" indent="-342900">
-              <a:spcAft>
-                <a:spcPts val="1000"/>
-              </a:spcAft>
-              <a:buSzPct val="100000"/>
-              <a:buChar char="•"/>
-            </a:pPr>
-            <a:r>
-              <a:rPr lang="en-US" sz="1600" dirty="0">
+      <p:sp>
+        <p:nvSpPr>
+          <p:cNvPr id="4" name="Shape 2"/>
+          <p:cNvSpPr/>
+          <p:nvPr/>
+        </p:nvSpPr>
+        <p:spPr>
+          <a:xfrm>
+            <a:off x="640080" y="1691640"/>
+            <a:ext cx="5257800" cy="3108960"/>
+          </a:xfrm>
+          <a:prstGeom prst="rect">
+            <a:avLst/>
+          </a:prstGeom>
+          <a:solidFill>
+            <a:srgbClr val="F3F4F6"/>
+          </a:solidFill>
+          <a:ln w="12700">
+            <a:solidFill>
+              <a:srgbClr val="E3E6EA"/>
+            </a:solidFill>
+            <a:prstDash val="solid"/>
+          </a:ln>
+        </p:spPr>
+      </p:sp>
+      <p:sp>
+        <p:nvSpPr>
+          <p:cNvPr id="5" name="Text 3"/>
+          <p:cNvSpPr/>
+          <p:nvPr/>
+        </p:nvSpPr>
+        <p:spPr>
+          <a:xfrm>
+            <a:off x="914400" y="1920240"/>
+            <a:ext cx="4709160" cy="320040"/>
+          </a:xfrm>
+          <a:prstGeom prst="rect">
+            <a:avLst/>
+          </a:prstGeom>
+          <a:noFill/>
+          <a:ln/>
+        </p:spPr>
+        <p:txBody>
+          <a:bodyPr wrap="square" lIns="0" tIns="0" rIns="0" bIns="0" rtlCol="0" anchor="ctr"/>
+          <a:lstStyle/>
+          <a:p>
+            <a:pPr indent="0" marL="0">
+              <a:buNone/>
+            </a:pPr>
+            <a:r>
+              <a:rPr lang="en-US" sz="1300" b="1" spc="200" kern="0" dirty="0">
+                <a:solidFill>
+                  <a:srgbClr val="E50914"/>
+                </a:solidFill>
+                <a:latin typeface="Calibri" pitchFamily="34" charset="0"/>
+                <a:ea typeface="Calibri" pitchFamily="34" charset="-122"/>
+                <a:cs typeface="Calibri" pitchFamily="34" charset="-120"/>
+              </a:rPr>
+              <a:t>SEQUEL / FRANCHISE</a:t>
+            </a:r>
+            <a:endParaRPr lang="en-US" sz="1300" dirty="0"/>
+          </a:p>
+        </p:txBody>
+      </p:sp>
+      <p:sp>
+        <p:nvSpPr>
+          <p:cNvPr id="6" name="Text 4"/>
+          <p:cNvSpPr/>
+          <p:nvPr/>
+        </p:nvSpPr>
+        <p:spPr>
+          <a:xfrm>
+            <a:off x="914400" y="2286000"/>
+            <a:ext cx="4709160" cy="731520"/>
+          </a:xfrm>
+          <a:prstGeom prst="rect">
+            <a:avLst/>
+          </a:prstGeom>
+          <a:noFill/>
+          <a:ln/>
+        </p:spPr>
+        <p:txBody>
+          <a:bodyPr wrap="square" lIns="0" tIns="0" rIns="0" bIns="0" rtlCol="0" anchor="ctr"/>
+          <a:lstStyle/>
+          <a:p>
+            <a:pPr indent="0" marL="0">
+              <a:buNone/>
+            </a:pPr>
+            <a:r>
+              <a:rPr lang="en-US" sz="3400" b="1" dirty="0">
+                <a:solidFill>
+                  <a:srgbClr val="2E7D32"/>
+                </a:solidFill>
+                <a:latin typeface="Georgia" pitchFamily="34" charset="0"/>
+                <a:ea typeface="Georgia" pitchFamily="34" charset="-122"/>
+                <a:cs typeface="Georgia" pitchFamily="34" charset="-120"/>
+              </a:rPr>
+              <a:t>68% vs 54%</a:t>
+            </a:r>
+            <a:endParaRPr lang="en-US" sz="3400" dirty="0"/>
+          </a:p>
+        </p:txBody>
+      </p:sp>
+      <p:sp>
+        <p:nvSpPr>
+          <p:cNvPr id="7" name="Text 5"/>
+          <p:cNvSpPr/>
+          <p:nvPr/>
+        </p:nvSpPr>
+        <p:spPr>
+          <a:xfrm>
+            <a:off x="914400" y="3108960"/>
+            <a:ext cx="4709160" cy="1554480"/>
+          </a:xfrm>
+          <a:prstGeom prst="rect">
+            <a:avLst/>
+          </a:prstGeom>
+          <a:noFill/>
+          <a:ln/>
+        </p:spPr>
+        <p:txBody>
+          <a:bodyPr wrap="square" lIns="0" tIns="0" rIns="0" bIns="0" rtlCol="0" anchor="t"/>
+          <a:lstStyle/>
+          <a:p>
+            <a:pPr indent="0" marL="0">
+              <a:buNone/>
+            </a:pPr>
+            <a:r>
+              <a:rPr lang="en-US" sz="1400" dirty="0">
                 <a:solidFill>
                   <a:srgbClr val="33373F"/>
                 </a:solidFill>
@@ -6839,20 +6972,141 @@
                 <a:ea typeface="Calibri" pitchFamily="34" charset="-122"/>
                 <a:cs typeface="Calibri" pitchFamily="34" charset="-120"/>
               </a:rPr>
-              <a:t>Summer (May–Aug) and Holiday (Nov–Dec) windows: ~61% success, above the 56% baseline.</a:t>
-            </a:r>
-            <a:endParaRPr lang="en-US" sz="1600" dirty="0"/>
-          </a:p>
-          <a:p>
-            <a:pPr marL="342900" indent="-342900">
-              <a:spcAft>
-                <a:spcPts val="1000"/>
-              </a:spcAft>
-              <a:buSzPct val="100000"/>
-              <a:buChar char="•"/>
-            </a:pPr>
-            <a:r>
-              <a:rPr lang="en-US" sz="1600" dirty="0">
+              <a:t>Detected from plot keywords (sequel, superhero, based on novel…) and title patterns (Part, 2, III…). Franchise films clear the bar far more often.</a:t>
+            </a:r>
+            <a:endParaRPr lang="en-US" sz="1400" dirty="0"/>
+          </a:p>
+        </p:txBody>
+      </p:sp>
+      <p:sp>
+        <p:nvSpPr>
+          <p:cNvPr id="8" name="Shape 6"/>
+          <p:cNvSpPr/>
+          <p:nvPr/>
+        </p:nvSpPr>
+        <p:spPr>
+          <a:xfrm>
+            <a:off x="6080760" y="1691640"/>
+            <a:ext cx="5257800" cy="3108960"/>
+          </a:xfrm>
+          <a:prstGeom prst="rect">
+            <a:avLst/>
+          </a:prstGeom>
+          <a:solidFill>
+            <a:srgbClr val="F3F4F6"/>
+          </a:solidFill>
+          <a:ln w="12700">
+            <a:solidFill>
+              <a:srgbClr val="E3E6EA"/>
+            </a:solidFill>
+            <a:prstDash val="solid"/>
+          </a:ln>
+        </p:spPr>
+      </p:sp>
+      <p:sp>
+        <p:nvSpPr>
+          <p:cNvPr id="9" name="Text 7"/>
+          <p:cNvSpPr/>
+          <p:nvPr/>
+        </p:nvSpPr>
+        <p:spPr>
+          <a:xfrm>
+            <a:off x="6355080" y="1920240"/>
+            <a:ext cx="4709160" cy="320040"/>
+          </a:xfrm>
+          <a:prstGeom prst="rect">
+            <a:avLst/>
+          </a:prstGeom>
+          <a:noFill/>
+          <a:ln/>
+        </p:spPr>
+        <p:txBody>
+          <a:bodyPr wrap="square" lIns="0" tIns="0" rIns="0" bIns="0" rtlCol="0" anchor="ctr"/>
+          <a:lstStyle/>
+          <a:p>
+            <a:pPr indent="0" marL="0">
+              <a:buNone/>
+            </a:pPr>
+            <a:r>
+              <a:rPr lang="en-US" sz="1300" b="1" spc="200" kern="0" dirty="0">
+                <a:solidFill>
+                  <a:srgbClr val="E50914"/>
+                </a:solidFill>
+                <a:latin typeface="Calibri" pitchFamily="34" charset="0"/>
+                <a:ea typeface="Calibri" pitchFamily="34" charset="-122"/>
+                <a:cs typeface="Calibri" pitchFamily="34" charset="-120"/>
+              </a:rPr>
+              <a:t>MAJOR STUDIO</a:t>
+            </a:r>
+            <a:endParaRPr lang="en-US" sz="1300" dirty="0"/>
+          </a:p>
+        </p:txBody>
+      </p:sp>
+      <p:sp>
+        <p:nvSpPr>
+          <p:cNvPr id="10" name="Text 8"/>
+          <p:cNvSpPr/>
+          <p:nvPr/>
+        </p:nvSpPr>
+        <p:spPr>
+          <a:xfrm>
+            <a:off x="6355080" y="2286000"/>
+            <a:ext cx="4709160" cy="731520"/>
+          </a:xfrm>
+          <a:prstGeom prst="rect">
+            <a:avLst/>
+          </a:prstGeom>
+          <a:noFill/>
+          <a:ln/>
+        </p:spPr>
+        <p:txBody>
+          <a:bodyPr wrap="square" lIns="0" tIns="0" rIns="0" bIns="0" rtlCol="0" anchor="ctr"/>
+          <a:lstStyle/>
+          <a:p>
+            <a:pPr indent="0" marL="0">
+              <a:buNone/>
+            </a:pPr>
+            <a:r>
+              <a:rPr lang="en-US" sz="3400" b="1" dirty="0">
+                <a:solidFill>
+                  <a:srgbClr val="2E7D32"/>
+                </a:solidFill>
+                <a:latin typeface="Georgia" pitchFamily="34" charset="0"/>
+                <a:ea typeface="Georgia" pitchFamily="34" charset="-122"/>
+                <a:cs typeface="Georgia" pitchFamily="34" charset="-120"/>
+              </a:rPr>
+              <a:t>61% vs 51%</a:t>
+            </a:r>
+            <a:endParaRPr lang="en-US" sz="3400" dirty="0"/>
+          </a:p>
+        </p:txBody>
+      </p:sp>
+      <p:sp>
+        <p:nvSpPr>
+          <p:cNvPr id="11" name="Text 9"/>
+          <p:cNvSpPr/>
+          <p:nvPr/>
+        </p:nvSpPr>
+        <p:spPr>
+          <a:xfrm>
+            <a:off x="6355080" y="3108960"/>
+            <a:ext cx="4709160" cy="1554480"/>
+          </a:xfrm>
+          <a:prstGeom prst="rect">
+            <a:avLst/>
+          </a:prstGeom>
+          <a:noFill/>
+          <a:ln/>
+        </p:spPr>
+        <p:txBody>
+          <a:bodyPr wrap="square" lIns="0" tIns="0" rIns="0" bIns="0" rtlCol="0" anchor="t"/>
+          <a:lstStyle/>
+          <a:p>
+            <a:pPr indent="0" marL="0">
+              <a:buNone/>
+            </a:pPr>
+            <a:r>
+              <a:rPr lang="en-US" sz="1400" dirty="0">
                 <a:solidFill>
                   <a:srgbClr val="33373F"/>
                 </a:solidFill>
@@ -6860,20 +7114,52 @@
                 <a:ea typeface="Calibri" pitchFamily="34" charset="-122"/>
                 <a:cs typeface="Calibri" pitchFamily="34" charset="-120"/>
               </a:rPr>
-              <a:t>Early Fall (Sep–Oct) is weakest at ~47%.</a:t>
-            </a:r>
-            <a:endParaRPr lang="en-US" sz="1600" dirty="0"/>
-          </a:p>
-          <a:p>
-            <a:pPr marL="342900" indent="-342900">
-              <a:spcAft>
-                <a:spcPts val="1000"/>
-              </a:spcAft>
-              <a:buSzPct val="100000"/>
-              <a:buChar char="•"/>
-            </a:pPr>
-            <a:r>
-              <a:rPr lang="en-US" sz="1600" dirty="0">
+              <a:t>Whether a major (Disney, Warner Bros., Universal…) produced the film — distribution muscle and marketing reach show up in outcomes.</a:t>
+            </a:r>
+            <a:endParaRPr lang="en-US" sz="1400" dirty="0"/>
+          </a:p>
+        </p:txBody>
+      </p:sp>
+      <p:sp>
+        <p:nvSpPr>
+          <p:cNvPr id="12" name="Text 10"/>
+          <p:cNvSpPr/>
+          <p:nvPr/>
+        </p:nvSpPr>
+        <p:spPr>
+          <a:xfrm>
+            <a:off x="640080" y="5120640"/>
+            <a:ext cx="10881360" cy="731520"/>
+          </a:xfrm>
+          <a:prstGeom prst="rect">
+            <a:avLst/>
+          </a:prstGeom>
+          <a:noFill/>
+          <a:ln/>
+        </p:spPr>
+        <p:txBody>
+          <a:bodyPr wrap="square" lIns="0" tIns="0" rIns="0" bIns="0" rtlCol="0" anchor="t"/>
+          <a:lstStyle/>
+          <a:p>
+            <a:pPr indent="0" marL="0">
+              <a:buNone/>
+            </a:pPr>
+            <a:r>
+              <a:rPr lang="en-US" sz="1500" b="1" dirty="0">
+                <a:solidFill>
+                  <a:srgbClr val="1A1A2E"/>
+                </a:solidFill>
+                <a:latin typeface="Calibri" pitchFamily="34" charset="0"/>
+                <a:ea typeface="Calibri" pitchFamily="34" charset="-122"/>
+                <a:cs typeface="Calibri" pitchFamily="34" charset="-120"/>
+              </a:rPr>
+              <a:t>Also added:  </a:t>
+            </a:r>
+            <a:pPr indent="0" marL="0">
+              <a:buNone/>
+            </a:pPr>
+            <a:r>
+              <a:rPr lang="en-US" sz="1500" dirty="0">
                 <a:solidFill>
                   <a:srgbClr val="33373F"/>
                 </a:solidFill>
@@ -6881,9 +7167,9 @@
                 <a:ea typeface="Calibri" pitchFamily="34" charset="-122"/>
                 <a:cs typeface="Calibri" pitchFamily="34" charset="-120"/>
               </a:rPr>
-              <a:t>Matches how studios actually schedule tentpoles.</a:t>
-            </a:r>
-            <a:endParaRPr lang="en-US" sz="1600" dirty="0"/>
+              <a:t>release year (era effects) and spend intensity (budget ÷ runtime). Together these lifted test ROC-AUC from 0.66 to 0.71.</a:t>
+            </a:r>
+            <a:endParaRPr lang="en-US" sz="1500" dirty="0"/>
           </a:p>
         </p:txBody>
       </p:sp>

--- a/docs/final_presentation.pptx
+++ b/docs/final_presentation.pptx
@@ -20,10 +20,9 @@
     <p:sldId id="268" r:id="rId14"/>
     <p:sldId id="269" r:id="rId15"/>
     <p:sldId id="270" r:id="rId16"/>
-    <p:sldId id="271" r:id="rId17"/>
   </p:sldIdLst>
   <p:notesMasterIdLst>
-    <p:notesMasterId r:id="rId18"/>
+    <p:notesMasterId r:id="rId17"/>
   </p:notesMasterIdLst>
   <p:sldSz cx="12192000" cy="6858000"/>
   <p:notesSz cx="6858000" cy="12192000"/>
@@ -1069,94 +1068,6 @@
             <a:fld id="{F7021451-1387-4CA6-816F-3879F97B5CBC}" type="slidenum">
               <a:rPr lang="en-US"/>
               <a:t>15</a:t>
-            </a:fld>
-            <a:endParaRPr lang="en-US"/>
-          </a:p>
-        </p:txBody>
-      </p:sp>
-    </p:spTree>
-    <p:extLst>
-      <p:ext uri="{BB962C8B-B14F-4D97-AF65-F5344CB8AC3E}">
-        <p14:creationId xmlns:p14="http://schemas.microsoft.com/office/powerpoint/2010/main" val="1024086991"/>
-      </p:ext>
-    </p:extLst>
-  </p:cSld>
-  <p:clrMapOvr>
-    <a:masterClrMapping/>
-  </p:clrMapOvr>
-</p:notes>
-</file>
-
-<file path=ppt/notesSlides/notesSlide16.xml><?xml version="1.0" encoding="utf-8"?>
-<p:notes xmlns:a="http://schemas.openxmlformats.org/drawingml/2006/main" xmlns:r="http://schemas.openxmlformats.org/officeDocument/2006/relationships" xmlns:p="http://schemas.openxmlformats.org/presentationml/2006/main">
-  <p:cSld>
-    <p:spTree>
-      <p:nvGrpSpPr>
-        <p:cNvPr id="1" name=""/>
-        <p:cNvGrpSpPr/>
-        <p:nvPr/>
-      </p:nvGrpSpPr>
-      <p:grpSpPr>
-        <a:xfrm>
-          <a:off x="0" y="0"/>
-          <a:ext cx="0" cy="0"/>
-          <a:chOff x="0" y="0"/>
-          <a:chExt cx="0" cy="0"/>
-        </a:xfrm>
-      </p:grpSpPr>
-      <p:sp>
-        <p:nvSpPr>
-          <p:cNvPr id="2" name="Slide Image Placeholder 1"/>
-          <p:cNvSpPr>
-            <a:spLocks noGrp="1" noRot="1" noChangeAspect="1"/>
-          </p:cNvSpPr>
-          <p:nvPr>
-            <p:ph type="sldImg"/>
-          </p:nvPr>
-        </p:nvSpPr>
-        <p:spPr/>
-      </p:sp>
-      <p:sp>
-        <p:nvSpPr>
-          <p:cNvPr id="3" name="Notes Placeholder 2"/>
-          <p:cNvSpPr>
-            <a:spLocks noGrp="1"/>
-          </p:cNvSpPr>
-          <p:nvPr>
-            <p:ph type="body" idx="1"/>
-          </p:nvPr>
-        </p:nvSpPr>
-        <p:spPr/>
-        <p:txBody>
-          <a:bodyPr/>
-          <a:lstStyle/>
-          <a:p>
-            <a:r>
-              <a:rPr lang="en-US" dirty="0"/>
-              <a:t/>
-            </a:r>
-            <a:endParaRPr lang="en-US" dirty="0"/>
-          </a:p>
-        </p:txBody>
-      </p:sp>
-      <p:sp>
-        <p:nvSpPr>
-          <p:cNvPr id="4" name="Slide Number Placeholder 3"/>
-          <p:cNvSpPr>
-            <a:spLocks noGrp="1"/>
-          </p:cNvSpPr>
-          <p:nvPr>
-            <p:ph type="sldNum" sz="quarter" idx="10"/>
-          </p:nvPr>
-        </p:nvSpPr>
-        <p:spPr/>
-        <p:txBody>
-          <a:bodyPr/>
-          <a:lstStyle/>
-          <a:p>
-            <a:fld id="{F7021451-1387-4CA6-816F-3879F97B5CBC}" type="slidenum">
-              <a:rPr lang="en-US"/>
-              <a:t>16</a:t>
             </a:fld>
             <a:endParaRPr lang="en-US"/>
           </a:p>
@@ -2218,8 +2129,8 @@
         </p:nvSpPr>
         <p:spPr>
           <a:xfrm>
-            <a:off x="822960" y="1554480"/>
-            <a:ext cx="10058400" cy="365760"/>
+            <a:off x="822960" y="1463040"/>
+            <a:ext cx="10515600" cy="411480"/>
           </a:xfrm>
           <a:prstGeom prst="rect">
             <a:avLst/>
@@ -2235,7 +2146,7 @@
               <a:buNone/>
             </a:pPr>
             <a:r>
-              <a:rPr lang="en-US" sz="1400" b="1" spc="400" kern="0" dirty="0">
+              <a:rPr lang="en-US" sz="1600" b="1" spc="400" kern="0" dirty="0">
                 <a:solidFill>
                   <a:srgbClr val="E50914"/>
                 </a:solidFill>
@@ -2245,7 +2156,7 @@
               </a:rPr>
               <a:t>DATA 606 CAPSTONE  ·  FINAL PRESENTATION</a:t>
             </a:r>
-            <a:endParaRPr lang="en-US" sz="1400" dirty="0"/>
+            <a:endParaRPr lang="en-US" sz="1600" dirty="0"/>
           </a:p>
         </p:txBody>
       </p:sp>
@@ -2257,8 +2168,8 @@
         </p:nvSpPr>
         <p:spPr>
           <a:xfrm>
-            <a:off x="777240" y="1965960"/>
-            <a:ext cx="10607040" cy="1828800"/>
+            <a:off x="777240" y="1920240"/>
+            <a:ext cx="10607040" cy="2103120"/>
           </a:xfrm>
           <a:prstGeom prst="rect">
             <a:avLst/>
@@ -2277,7 +2188,7 @@
               <a:buNone/>
             </a:pPr>
             <a:r>
-              <a:rPr lang="en-US" sz="4600" b="1" dirty="0">
+              <a:rPr lang="en-US" sz="5200" b="1" dirty="0">
                 <a:solidFill>
                   <a:srgbClr val="FFFFFF"/>
                 </a:solidFill>
@@ -2287,7 +2198,7 @@
               </a:rPr>
               <a:t>Predicting Movie Box-Office</a:t>
             </a:r>
-            <a:endParaRPr lang="en-US" sz="4600" dirty="0"/>
+            <a:endParaRPr lang="en-US" sz="5200" dirty="0"/>
           </a:p>
           <a:p>
             <a:pPr indent="0" marL="0">
@@ -2297,7 +2208,7 @@
               <a:buNone/>
             </a:pPr>
             <a:r>
-              <a:rPr lang="en-US" sz="4600" b="1" dirty="0">
+              <a:rPr lang="en-US" sz="5200" b="1" dirty="0">
                 <a:solidFill>
                   <a:srgbClr val="FFFFFF"/>
                 </a:solidFill>
@@ -2307,7 +2218,7 @@
               </a:rPr>
               <a:t>Success Before Release</a:t>
             </a:r>
-            <a:endParaRPr lang="en-US" sz="4600" dirty="0"/>
+            <a:endParaRPr lang="en-US" sz="5200" dirty="0"/>
           </a:p>
         </p:txBody>
       </p:sp>
@@ -2319,8 +2230,8 @@
         </p:nvSpPr>
         <p:spPr>
           <a:xfrm>
-            <a:off x="822960" y="4114800"/>
-            <a:ext cx="10515600" cy="365760"/>
+            <a:off x="822960" y="4343400"/>
+            <a:ext cx="10515600" cy="411480"/>
           </a:xfrm>
           <a:prstGeom prst="rect">
             <a:avLst/>
@@ -2336,7 +2247,7 @@
               <a:buNone/>
             </a:pPr>
             <a:r>
-              <a:rPr lang="en-US" sz="1600" b="1" dirty="0">
+              <a:rPr lang="en-US" sz="2000" b="1" dirty="0">
                 <a:solidFill>
                   <a:srgbClr val="FFFFFF"/>
                 </a:solidFill>
@@ -2350,7 +2261,7 @@
               <a:buNone/>
             </a:pPr>
             <a:r>
-              <a:rPr lang="en-US" sz="1600" dirty="0">
+              <a:rPr lang="en-US" sz="2000" dirty="0">
                 <a:solidFill>
                   <a:srgbClr val="C9CDD6"/>
                 </a:solidFill>
@@ -2360,7 +2271,7 @@
               </a:rPr>
               <a:t>   ·   MPS Data Science, UMBC   ·   Summer 2026</a:t>
             </a:r>
-            <a:endParaRPr lang="en-US" sz="1600" dirty="0"/>
+            <a:endParaRPr lang="en-US" sz="2000" dirty="0"/>
           </a:p>
         </p:txBody>
       </p:sp>
@@ -2372,8 +2283,8 @@
         </p:nvSpPr>
         <p:spPr>
           <a:xfrm>
-            <a:off x="822960" y="4526280"/>
-            <a:ext cx="10515600" cy="320040"/>
+            <a:off x="822960" y="4846320"/>
+            <a:ext cx="10515600" cy="365760"/>
           </a:xfrm>
           <a:prstGeom prst="rect">
             <a:avLst/>
@@ -2389,7 +2300,7 @@
               <a:buNone/>
             </a:pPr>
             <a:r>
-              <a:rPr lang="en-US" sz="1200" i="1" dirty="0">
+              <a:rPr lang="en-US" sz="1400" i="1" dirty="0">
                 <a:solidFill>
                   <a:srgbClr val="9AA0AD"/>
                 </a:solidFill>
@@ -2399,7 +2310,7 @@
               </a:rPr>
               <a:t>Prepared for the UMBC Data Science Capstone — Dr. Chaojie (Jay) Wang</a:t>
             </a:r>
-            <a:endParaRPr lang="en-US" sz="1200" dirty="0"/>
+            <a:endParaRPr lang="en-US" sz="1400" dirty="0"/>
           </a:p>
         </p:txBody>
       </p:sp>
@@ -2443,8 +2354,8 @@
         </p:nvSpPr>
         <p:spPr>
           <a:xfrm>
-            <a:off x="566928" y="310896"/>
-            <a:ext cx="10972800" cy="274320"/>
+            <a:off x="566928" y="274320"/>
+            <a:ext cx="10972800" cy="320040"/>
           </a:xfrm>
           <a:prstGeom prst="rect">
             <a:avLst/>
@@ -2460,7 +2371,7 @@
               <a:buNone/>
             </a:pPr>
             <a:r>
-              <a:rPr lang="en-US" sz="1200" b="1" spc="300" kern="0" dirty="0">
+              <a:rPr lang="en-US" sz="1400" b="1" spc="300" kern="0" dirty="0">
                 <a:solidFill>
                   <a:srgbClr val="E50914"/>
                 </a:solidFill>
@@ -2470,52 +2381,13 @@
               </a:rPr>
               <a:t>MACHINE LEARNING</a:t>
             </a:r>
-            <a:endParaRPr lang="en-US" sz="1200" dirty="0"/>
-          </a:p>
-        </p:txBody>
-      </p:sp>
-      <p:sp>
-        <p:nvSpPr>
-          <p:cNvPr id="3" name="Text 1"/>
-          <p:cNvSpPr/>
-          <p:nvPr/>
-        </p:nvSpPr>
-        <p:spPr>
-          <a:xfrm>
-            <a:off x="548640" y="603504"/>
-            <a:ext cx="11064240" cy="685800"/>
-          </a:xfrm>
-          <a:prstGeom prst="rect">
-            <a:avLst/>
-          </a:prstGeom>
-          <a:noFill/>
-          <a:ln/>
-        </p:spPr>
-        <p:txBody>
-          <a:bodyPr wrap="square" lIns="0" tIns="0" rIns="0" bIns="0" rtlCol="0" anchor="ctr"/>
-          <a:lstStyle/>
-          <a:p>
-            <a:pPr indent="0" marL="0">
-              <a:buNone/>
-            </a:pPr>
-            <a:r>
-              <a:rPr lang="en-US" sz="2800" b="1" dirty="0">
-                <a:solidFill>
-                  <a:srgbClr val="1A1A2E"/>
-                </a:solidFill>
-                <a:latin typeface="Georgia" pitchFamily="34" charset="0"/>
-                <a:ea typeface="Georgia" pitchFamily="34" charset="-122"/>
-                <a:cs typeface="Georgia" pitchFamily="34" charset="-120"/>
-              </a:rPr>
-              <a:t>Results — all models beat the baseline</a:t>
-            </a:r>
-            <a:endParaRPr lang="en-US" sz="2800" dirty="0"/>
+            <a:endParaRPr lang="en-US" sz="1400" dirty="0"/>
           </a:p>
         </p:txBody>
       </p:sp>
       <p:pic>
         <p:nvPicPr>
-          <p:cNvPr id="4" name="Image 0" descr="/sessions/optimistic-determined-edison/mnt/outputs/UMBC-DATA606-Capstone/docs/figures/model_comparison.png">    </p:cNvPr>
+          <p:cNvPr id="3" name="Image 0" descr="/sessions/optimistic-determined-edison/mnt/outputs/pres_figures/model_comparison.png">    </p:cNvPr>
           <p:cNvPicPr>
             <a:picLocks noChangeAspect="1"/>
           </p:cNvPicPr>
@@ -2528,8 +2400,8 @@
         </p:blipFill>
         <p:spPr>
           <a:xfrm>
-            <a:off x="640080" y="1554480"/>
-            <a:ext cx="6949440" cy="4480560"/>
+            <a:off x="411480" y="685800"/>
+            <a:ext cx="8412480" cy="5760720"/>
           </a:xfrm>
           <a:prstGeom prst="rect">
             <a:avLst/>
@@ -2538,14 +2410,39 @@
       </p:pic>
       <p:sp>
         <p:nvSpPr>
+          <p:cNvPr id="4" name="Shape 1"/>
+          <p:cNvSpPr/>
+          <p:nvPr/>
+        </p:nvSpPr>
+        <p:spPr>
+          <a:xfrm>
+            <a:off x="9052560" y="1371600"/>
+            <a:ext cx="2743200" cy="4206240"/>
+          </a:xfrm>
+          <a:prstGeom prst="rect">
+            <a:avLst/>
+          </a:prstGeom>
+          <a:solidFill>
+            <a:srgbClr val="F3F4F6"/>
+          </a:solidFill>
+          <a:ln w="12700">
+            <a:solidFill>
+              <a:srgbClr val="E3E6EA"/>
+            </a:solidFill>
+            <a:prstDash val="solid"/>
+          </a:ln>
+        </p:spPr>
+      </p:sp>
+      <p:sp>
+        <p:nvSpPr>
           <p:cNvPr id="5" name="Text 2"/>
           <p:cNvSpPr/>
           <p:nvPr/>
         </p:nvSpPr>
         <p:spPr>
           <a:xfrm>
-            <a:off x="7863840" y="2011680"/>
-            <a:ext cx="3749040" cy="3474720"/>
+            <a:off x="9052560" y="1645920"/>
+            <a:ext cx="2743200" cy="822960"/>
           </a:xfrm>
           <a:prstGeom prst="rect">
             <a:avLst/>
@@ -2554,70 +2451,158 @@
           <a:ln/>
         </p:spPr>
         <p:txBody>
-          <a:bodyPr wrap="square" rtlCol="0" anchor="t"/>
-          <a:lstStyle/>
-          <a:p>
-            <a:pPr marL="342900" indent="-342900">
-              <a:spcAft>
-                <a:spcPts val="1000"/>
-              </a:spcAft>
-              <a:buSzPct val="100000"/>
-              <a:buChar char="•"/>
-            </a:pPr>
-            <a:r>
-              <a:rPr lang="en-US" sz="1500" b="1" dirty="0">
-                <a:solidFill>
-                  <a:srgbClr val="1A1A2E"/>
-                </a:solidFill>
-                <a:latin typeface="Calibri" pitchFamily="34" charset="0"/>
-                <a:ea typeface="Calibri" pitchFamily="34" charset="-122"/>
-                <a:cs typeface="Calibri" pitchFamily="34" charset="-120"/>
-              </a:rPr>
-              <a:t>Best held-out test: 68% accuracy, 0.715 ROC-AUC (baseline: 56%).</a:t>
-            </a:r>
-            <a:endParaRPr lang="en-US" sz="1500" dirty="0"/>
-          </a:p>
-          <a:p>
-            <a:pPr marL="342900" indent="-342900">
-              <a:spcAft>
-                <a:spcPts val="1000"/>
-              </a:spcAft>
-              <a:buSzPct val="100000"/>
-              <a:buChar char="•"/>
-            </a:pPr>
-            <a:r>
-              <a:rPr lang="en-US" sz="1500" dirty="0">
-                <a:solidFill>
-                  <a:srgbClr val="33373F"/>
-                </a:solidFill>
-                <a:latin typeface="Calibri" pitchFamily="34" charset="0"/>
-                <a:ea typeface="Calibri" pitchFamily="34" charset="-122"/>
-                <a:cs typeface="Calibri" pitchFamily="34" charset="-120"/>
-              </a:rPr>
-              <a:t>Gradient Boosting and the tuned Random Forest are essentially tied; Logistic Regression trails.</a:t>
-            </a:r>
-            <a:endParaRPr lang="en-US" sz="1500" dirty="0"/>
-          </a:p>
-          <a:p>
-            <a:pPr marL="342900" indent="-342900">
-              <a:spcAft>
-                <a:spcPts val="1000"/>
-              </a:spcAft>
-              <a:buSzPct val="100000"/>
-              <a:buChar char="•"/>
-            </a:pPr>
-            <a:r>
-              <a:rPr lang="en-US" sz="1500" dirty="0">
-                <a:solidFill>
-                  <a:srgbClr val="33373F"/>
-                </a:solidFill>
-                <a:latin typeface="Calibri" pitchFamily="34" charset="0"/>
-                <a:ea typeface="Calibri" pitchFamily="34" charset="-122"/>
-                <a:cs typeface="Calibri" pitchFamily="34" charset="-120"/>
-              </a:rPr>
-              <a:t>High recall (~0.75): the model catches most true successes.</a:t>
-            </a:r>
-            <a:endParaRPr lang="en-US" sz="1500" dirty="0"/>
+          <a:bodyPr wrap="square" lIns="0" tIns="0" rIns="0" bIns="0" rtlCol="0" anchor="ctr"/>
+          <a:lstStyle/>
+          <a:p>
+            <a:pPr algn="ctr" indent="0" marL="0">
+              <a:buNone/>
+            </a:pPr>
+            <a:r>
+              <a:rPr lang="en-US" sz="4800" b="1" dirty="0">
+                <a:solidFill>
+                  <a:srgbClr val="2E7D32"/>
+                </a:solidFill>
+                <a:latin typeface="Georgia" pitchFamily="34" charset="0"/>
+                <a:ea typeface="Georgia" pitchFamily="34" charset="-122"/>
+                <a:cs typeface="Georgia" pitchFamily="34" charset="-120"/>
+              </a:rPr>
+              <a:t>68%</a:t>
+            </a:r>
+            <a:endParaRPr lang="en-US" sz="4800" dirty="0"/>
+          </a:p>
+        </p:txBody>
+      </p:sp>
+      <p:sp>
+        <p:nvSpPr>
+          <p:cNvPr id="6" name="Text 3"/>
+          <p:cNvSpPr/>
+          <p:nvPr/>
+        </p:nvSpPr>
+        <p:spPr>
+          <a:xfrm>
+            <a:off x="9052560" y="2514600"/>
+            <a:ext cx="2743200" cy="365760"/>
+          </a:xfrm>
+          <a:prstGeom prst="rect">
+            <a:avLst/>
+          </a:prstGeom>
+          <a:noFill/>
+          <a:ln/>
+        </p:spPr>
+        <p:txBody>
+          <a:bodyPr wrap="square" lIns="0" tIns="0" rIns="0" bIns="0" rtlCol="0" anchor="ctr"/>
+          <a:lstStyle/>
+          <a:p>
+            <a:pPr algn="ctr" indent="0" marL="0">
+              <a:buNone/>
+            </a:pPr>
+            <a:r>
+              <a:rPr lang="en-US" sz="1600" dirty="0">
+                <a:solidFill>
+                  <a:srgbClr val="5B6472"/>
+                </a:solidFill>
+                <a:latin typeface="Calibri" pitchFamily="34" charset="0"/>
+                <a:ea typeface="Calibri" pitchFamily="34" charset="-122"/>
+                <a:cs typeface="Calibri" pitchFamily="34" charset="-120"/>
+              </a:rPr>
+              <a:t>best accuracy</a:t>
+            </a:r>
+            <a:endParaRPr lang="en-US" sz="1600" dirty="0"/>
+          </a:p>
+        </p:txBody>
+      </p:sp>
+      <p:sp>
+        <p:nvSpPr>
+          <p:cNvPr id="7" name="Text 4"/>
+          <p:cNvSpPr/>
+          <p:nvPr/>
+        </p:nvSpPr>
+        <p:spPr>
+          <a:xfrm>
+            <a:off x="9052560" y="3063240"/>
+            <a:ext cx="2743200" cy="822960"/>
+          </a:xfrm>
+          <a:prstGeom prst="rect">
+            <a:avLst/>
+          </a:prstGeom>
+          <a:noFill/>
+          <a:ln/>
+        </p:spPr>
+        <p:txBody>
+          <a:bodyPr wrap="square" lIns="0" tIns="0" rIns="0" bIns="0" rtlCol="0" anchor="ctr"/>
+          <a:lstStyle/>
+          <a:p>
+            <a:pPr algn="ctr" indent="0" marL="0">
+              <a:buNone/>
+            </a:pPr>
+            <a:r>
+              <a:rPr lang="en-US" sz="4800" b="1" dirty="0">
+                <a:solidFill>
+                  <a:srgbClr val="D1495B"/>
+                </a:solidFill>
+                <a:latin typeface="Georgia" pitchFamily="34" charset="0"/>
+                <a:ea typeface="Georgia" pitchFamily="34" charset="-122"/>
+                <a:cs typeface="Georgia" pitchFamily="34" charset="-120"/>
+              </a:rPr>
+              <a:t>0.715</a:t>
+            </a:r>
+            <a:endParaRPr lang="en-US" sz="4800" dirty="0"/>
+          </a:p>
+        </p:txBody>
+      </p:sp>
+      <p:sp>
+        <p:nvSpPr>
+          <p:cNvPr id="8" name="Text 5"/>
+          <p:cNvSpPr/>
+          <p:nvPr/>
+        </p:nvSpPr>
+        <p:spPr>
+          <a:xfrm>
+            <a:off x="9052560" y="3931920"/>
+            <a:ext cx="2743200" cy="822960"/>
+          </a:xfrm>
+          <a:prstGeom prst="rect">
+            <a:avLst/>
+          </a:prstGeom>
+          <a:noFill/>
+          <a:ln/>
+        </p:spPr>
+        <p:txBody>
+          <a:bodyPr wrap="square" lIns="0" tIns="0" rIns="0" bIns="0" rtlCol="0" anchor="t"/>
+          <a:lstStyle/>
+          <a:p>
+            <a:pPr algn="ctr" indent="0" marL="0">
+              <a:buNone/>
+            </a:pPr>
+            <a:r>
+              <a:rPr lang="en-US" sz="1600" dirty="0">
+                <a:solidFill>
+                  <a:srgbClr val="5B6472"/>
+                </a:solidFill>
+                <a:latin typeface="Calibri" pitchFamily="34" charset="0"/>
+                <a:ea typeface="Calibri" pitchFamily="34" charset="-122"/>
+                <a:cs typeface="Calibri" pitchFamily="34" charset="-120"/>
+              </a:rPr>
+              <a:t>best ROC-AUC</a:t>
+            </a:r>
+            <a:endParaRPr lang="en-US" sz="1600" dirty="0"/>
+          </a:p>
+          <a:p>
+            <a:pPr algn="ctr" indent="0" marL="0">
+              <a:buNone/>
+            </a:pPr>
+            <a:r>
+              <a:rPr lang="en-US" sz="1600" dirty="0">
+                <a:solidFill>
+                  <a:srgbClr val="5B6472"/>
+                </a:solidFill>
+                <a:latin typeface="Calibri" pitchFamily="34" charset="0"/>
+                <a:ea typeface="Calibri" pitchFamily="34" charset="-122"/>
+                <a:cs typeface="Calibri" pitchFamily="34" charset="-120"/>
+              </a:rPr>
+              <a:t>(baseline 56%)</a:t>
+            </a:r>
+            <a:endParaRPr lang="en-US" sz="1600" dirty="0"/>
           </a:p>
         </p:txBody>
       </p:sp>
@@ -2661,8 +2646,8 @@
         </p:nvSpPr>
         <p:spPr>
           <a:xfrm>
-            <a:off x="566928" y="310896"/>
-            <a:ext cx="10972800" cy="274320"/>
+            <a:off x="566928" y="274320"/>
+            <a:ext cx="10972800" cy="320040"/>
           </a:xfrm>
           <a:prstGeom prst="rect">
             <a:avLst/>
@@ -2678,7 +2663,7 @@
               <a:buNone/>
             </a:pPr>
             <a:r>
-              <a:rPr lang="en-US" sz="1200" b="1" spc="300" kern="0" dirty="0">
+              <a:rPr lang="en-US" sz="1400" b="1" spc="300" kern="0" dirty="0">
                 <a:solidFill>
                   <a:srgbClr val="E50914"/>
                 </a:solidFill>
@@ -2688,7 +2673,7 @@
               </a:rPr>
               <a:t>MACHINE LEARNING</a:t>
             </a:r>
-            <a:endParaRPr lang="en-US" sz="1200" dirty="0"/>
+            <a:endParaRPr lang="en-US" sz="1400" dirty="0"/>
           </a:p>
         </p:txBody>
       </p:sp>
@@ -2700,8 +2685,8 @@
         </p:nvSpPr>
         <p:spPr>
           <a:xfrm>
-            <a:off x="548640" y="603504"/>
-            <a:ext cx="11064240" cy="685800"/>
+            <a:off x="548640" y="566928"/>
+            <a:ext cx="11064240" cy="777240"/>
           </a:xfrm>
           <a:prstGeom prst="rect">
             <a:avLst/>
@@ -2717,7 +2702,7 @@
               <a:buNone/>
             </a:pPr>
             <a:r>
-              <a:rPr lang="en-US" sz="2800" b="1" dirty="0">
+              <a:rPr lang="en-US" sz="3400" b="1" dirty="0">
                 <a:solidFill>
                   <a:srgbClr val="1A1A2E"/>
                 </a:solidFill>
@@ -2725,15 +2710,15 @@
                 <a:ea typeface="Georgia" pitchFamily="34" charset="-122"/>
                 <a:cs typeface="Georgia" pitchFamily="34" charset="-120"/>
               </a:rPr>
-              <a:t>Robustness — cross-validation and error profile</a:t>
-            </a:r>
-            <a:endParaRPr lang="en-US" sz="2800" dirty="0"/>
+              <a:t>Robust across splits — CV: 64% · 0.68 AUC</a:t>
+            </a:r>
+            <a:endParaRPr lang="en-US" sz="3400" dirty="0"/>
           </a:p>
         </p:txBody>
       </p:sp>
       <p:pic>
         <p:nvPicPr>
-          <p:cNvPr id="4" name="Image 0" descr="/sessions/optimistic-determined-edison/mnt/outputs/UMBC-DATA606-Capstone/docs/figures/roc_curves.png">    </p:cNvPr>
+          <p:cNvPr id="4" name="Image 0" descr="/sessions/optimistic-determined-edison/mnt/outputs/pres_figures/roc_curves.png">    </p:cNvPr>
           <p:cNvPicPr>
             <a:picLocks noChangeAspect="1"/>
           </p:cNvPicPr>
@@ -2746,8 +2731,8 @@
         </p:blipFill>
         <p:spPr>
           <a:xfrm>
-            <a:off x="548640" y="1645920"/>
-            <a:ext cx="5486400" cy="4206240"/>
+            <a:off x="411480" y="1554480"/>
+            <a:ext cx="5852160" cy="4846320"/>
           </a:xfrm>
           <a:prstGeom prst="rect">
             <a:avLst/>
@@ -2756,7 +2741,7 @@
       </p:pic>
       <p:pic>
         <p:nvPicPr>
-          <p:cNvPr id="5" name="Image 1" descr="/sessions/optimistic-determined-edison/mnt/outputs/UMBC-DATA606-Capstone/docs/figures/confusion_matrix.png">    </p:cNvPr>
+          <p:cNvPr id="5" name="Image 1" descr="/sessions/optimistic-determined-edison/mnt/outputs/pres_figures/confusion_matrix.png">    </p:cNvPr>
           <p:cNvPicPr>
             <a:picLocks noChangeAspect="1"/>
           </p:cNvPicPr>
@@ -2769,67 +2754,14 @@
         </p:blipFill>
         <p:spPr>
           <a:xfrm>
-            <a:off x="6126480" y="1645920"/>
-            <a:ext cx="4754880" cy="4206240"/>
+            <a:off x="6400800" y="1554480"/>
+            <a:ext cx="5394960" cy="4846320"/>
           </a:xfrm>
           <a:prstGeom prst="rect">
             <a:avLst/>
           </a:prstGeom>
         </p:spPr>
       </p:pic>
-      <p:sp>
-        <p:nvSpPr>
-          <p:cNvPr id="6" name="Text 2"/>
-          <p:cNvSpPr/>
-          <p:nvPr/>
-        </p:nvSpPr>
-        <p:spPr>
-          <a:xfrm>
-            <a:off x="640080" y="5943600"/>
-            <a:ext cx="10881360" cy="640080"/>
-          </a:xfrm>
-          <a:prstGeom prst="rect">
-            <a:avLst/>
-          </a:prstGeom>
-          <a:noFill/>
-          <a:ln/>
-        </p:spPr>
-        <p:txBody>
-          <a:bodyPr wrap="square" lIns="0" tIns="0" rIns="0" bIns="0" rtlCol="0" anchor="t"/>
-          <a:lstStyle/>
-          <a:p>
-            <a:pPr indent="0" marL="0">
-              <a:buNone/>
-            </a:pPr>
-            <a:r>
-              <a:rPr lang="en-US" sz="1400" b="1" dirty="0">
-                <a:solidFill>
-                  <a:srgbClr val="1A1A2E"/>
-                </a:solidFill>
-                <a:latin typeface="Calibri" pitchFamily="34" charset="0"/>
-                <a:ea typeface="Calibri" pitchFamily="34" charset="-122"/>
-                <a:cs typeface="Calibri" pitchFamily="34" charset="-120"/>
-              </a:rPr>
-              <a:t>5-fold cross-validation:  </a:t>
-            </a:r>
-            <a:pPr indent="0" marL="0">
-              <a:buNone/>
-            </a:pPr>
-            <a:r>
-              <a:rPr lang="en-US" sz="1400" dirty="0">
-                <a:solidFill>
-                  <a:srgbClr val="33373F"/>
-                </a:solidFill>
-                <a:latin typeface="Calibri" pitchFamily="34" charset="0"/>
-                <a:ea typeface="Calibri" pitchFamily="34" charset="-122"/>
-                <a:cs typeface="Calibri" pitchFamily="34" charset="-120"/>
-              </a:rPr>
-              <a:t>tuned Random Forest is most robust — 64% accuracy, 0.683 AUC (±0.025). A single split can flatter a model; CV keeps us honest.</a:t>
-            </a:r>
-            <a:endParaRPr lang="en-US" sz="1400" dirty="0"/>
-          </a:p>
-        </p:txBody>
-      </p:sp>
     </p:spTree>
   </p:cSld>
   <p:clrMapOvr>
@@ -2870,8 +2802,8 @@
         </p:nvSpPr>
         <p:spPr>
           <a:xfrm>
-            <a:off x="566928" y="310896"/>
-            <a:ext cx="10972800" cy="274320"/>
+            <a:off x="566928" y="274320"/>
+            <a:ext cx="10972800" cy="320040"/>
           </a:xfrm>
           <a:prstGeom prst="rect">
             <a:avLst/>
@@ -2887,7 +2819,7 @@
               <a:buNone/>
             </a:pPr>
             <a:r>
-              <a:rPr lang="en-US" sz="1200" b="1" spc="300" kern="0" dirty="0">
+              <a:rPr lang="en-US" sz="1400" b="1" spc="300" kern="0" dirty="0">
                 <a:solidFill>
                   <a:srgbClr val="E50914"/>
                 </a:solidFill>
@@ -2897,52 +2829,13 @@
               </a:rPr>
               <a:t>MACHINE LEARNING</a:t>
             </a:r>
-            <a:endParaRPr lang="en-US" sz="1200" dirty="0"/>
-          </a:p>
-        </p:txBody>
-      </p:sp>
-      <p:sp>
-        <p:nvSpPr>
-          <p:cNvPr id="3" name="Text 1"/>
-          <p:cNvSpPr/>
-          <p:nvPr/>
-        </p:nvSpPr>
-        <p:spPr>
-          <a:xfrm>
-            <a:off x="548640" y="603504"/>
-            <a:ext cx="11064240" cy="685800"/>
-          </a:xfrm>
-          <a:prstGeom prst="rect">
-            <a:avLst/>
-          </a:prstGeom>
-          <a:noFill/>
-          <a:ln/>
-        </p:spPr>
-        <p:txBody>
-          <a:bodyPr wrap="square" lIns="0" tIns="0" rIns="0" bIns="0" rtlCol="0" anchor="ctr"/>
-          <a:lstStyle/>
-          <a:p>
-            <a:pPr indent="0" marL="0">
-              <a:buNone/>
-            </a:pPr>
-            <a:r>
-              <a:rPr lang="en-US" sz="2800" b="1" dirty="0">
-                <a:solidFill>
-                  <a:srgbClr val="1A1A2E"/>
-                </a:solidFill>
-                <a:latin typeface="Georgia" pitchFamily="34" charset="0"/>
-                <a:ea typeface="Georgia" pitchFamily="34" charset="-122"/>
-                <a:cs typeface="Georgia" pitchFamily="34" charset="-120"/>
-              </a:rPr>
-              <a:t>What drives the predictions</a:t>
-            </a:r>
-            <a:endParaRPr lang="en-US" sz="2800" dirty="0"/>
+            <a:endParaRPr lang="en-US" sz="1400" dirty="0"/>
           </a:p>
         </p:txBody>
       </p:sp>
       <p:pic>
         <p:nvPicPr>
-          <p:cNvPr id="4" name="Image 0" descr="/sessions/optimistic-determined-edison/mnt/outputs/UMBC-DATA606-Capstone/docs/figures/feature_importance.png">    </p:cNvPr>
+          <p:cNvPr id="3" name="Image 0" descr="/sessions/optimistic-determined-edison/mnt/outputs/pres_figures/feature_importance.png">    </p:cNvPr>
           <p:cNvPicPr>
             <a:picLocks noChangeAspect="1"/>
           </p:cNvPicPr>
@@ -2955,99 +2848,14 @@
         </p:blipFill>
         <p:spPr>
           <a:xfrm>
-            <a:off x="640080" y="1554480"/>
-            <a:ext cx="6949440" cy="4480560"/>
+            <a:off x="411480" y="685800"/>
+            <a:ext cx="11384280" cy="5943600"/>
           </a:xfrm>
           <a:prstGeom prst="rect">
             <a:avLst/>
           </a:prstGeom>
         </p:spPr>
       </p:pic>
-      <p:sp>
-        <p:nvSpPr>
-          <p:cNvPr id="5" name="Text 2"/>
-          <p:cNvSpPr/>
-          <p:nvPr/>
-        </p:nvSpPr>
-        <p:spPr>
-          <a:xfrm>
-            <a:off x="7863840" y="2011680"/>
-            <a:ext cx="3749040" cy="3474720"/>
-          </a:xfrm>
-          <a:prstGeom prst="rect">
-            <a:avLst/>
-          </a:prstGeom>
-          <a:noFill/>
-          <a:ln/>
-        </p:spPr>
-        <p:txBody>
-          <a:bodyPr wrap="square" rtlCol="0" anchor="t"/>
-          <a:lstStyle/>
-          <a:p>
-            <a:pPr marL="342900" indent="-342900">
-              <a:spcAft>
-                <a:spcPts val="1000"/>
-              </a:spcAft>
-              <a:buSzPct val="100000"/>
-              <a:buChar char="•"/>
-            </a:pPr>
-            <a:r>
-              <a:rPr lang="en-US" sz="1500" dirty="0">
-                <a:solidFill>
-                  <a:srgbClr val="33373F"/>
-                </a:solidFill>
-                <a:latin typeface="Calibri" pitchFamily="34" charset="0"/>
-                <a:ea typeface="Calibri" pitchFamily="34" charset="-122"/>
-                <a:cs typeface="Calibri" pitchFamily="34" charset="-120"/>
-              </a:rPr>
-              <a:t>Financial scale dominates: spend intensity, release year, and budget are the top three.</a:t>
-            </a:r>
-            <a:endParaRPr lang="en-US" sz="1500" dirty="0"/>
-          </a:p>
-          <a:p>
-            <a:pPr marL="342900" indent="-342900">
-              <a:spcAft>
-                <a:spcPts val="1000"/>
-              </a:spcAft>
-              <a:buSzPct val="100000"/>
-              <a:buChar char="•"/>
-            </a:pPr>
-            <a:r>
-              <a:rPr lang="en-US" sz="1500" dirty="0">
-                <a:solidFill>
-                  <a:srgbClr val="33373F"/>
-                </a:solidFill>
-                <a:latin typeface="Calibri" pitchFamily="34" charset="0"/>
-                <a:ea typeface="Calibri" pitchFamily="34" charset="-122"/>
-                <a:cs typeface="Calibri" pitchFamily="34" charset="-120"/>
-              </a:rPr>
-              <a:t>Runtime, studio count, and the sequel / major-studio flags follow.</a:t>
-            </a:r>
-            <a:endParaRPr lang="en-US" sz="1500" dirty="0"/>
-          </a:p>
-          <a:p>
-            <a:pPr marL="342900" indent="-342900">
-              <a:spcAft>
-                <a:spcPts val="1000"/>
-              </a:spcAft>
-              <a:buSzPct val="100000"/>
-              <a:buChar char="•"/>
-            </a:pPr>
-            <a:r>
-              <a:rPr lang="en-US" sz="1500" dirty="0">
-                <a:solidFill>
-                  <a:srgbClr val="33373F"/>
-                </a:solidFill>
-                <a:latin typeface="Calibri" pitchFamily="34" charset="0"/>
-                <a:ea typeface="Calibri" pitchFamily="34" charset="-122"/>
-                <a:cs typeface="Calibri" pitchFamily="34" charset="-120"/>
-              </a:rPr>
-              <a:t>Genre (Horror) and the timing features add real secondary signal — the EDA and the model agree.</a:t>
-            </a:r>
-            <a:endParaRPr lang="en-US" sz="1500" dirty="0"/>
-          </a:p>
-        </p:txBody>
-      </p:sp>
     </p:spTree>
   </p:cSld>
   <p:clrMapOvr>
@@ -3059,6 +2867,425 @@
 <file path=ppt/slides/slide13.xml><?xml version="1.0" encoding="utf-8"?>
 <p:sld xmlns:a="http://schemas.openxmlformats.org/drawingml/2006/main" xmlns:r="http://schemas.openxmlformats.org/officeDocument/2006/relationships" xmlns:p="http://schemas.openxmlformats.org/presentationml/2006/main">
   <p:cSld name="Slide 13">
+    <p:bg>
+      <p:bgPr>
+        <a:solidFill>
+          <a:srgbClr val="141428"/>
+        </a:solidFill>
+      </p:bgPr>
+    </p:bg>
+    <p:spTree>
+      <p:nvGrpSpPr>
+        <p:cNvPr id="1" name=""/>
+        <p:cNvGrpSpPr/>
+        <p:nvPr/>
+      </p:nvGrpSpPr>
+      <p:grpSpPr>
+        <a:xfrm>
+          <a:off x="0" y="0"/>
+          <a:ext cx="0" cy="0"/>
+          <a:chOff x="0" y="0"/>
+          <a:chExt cx="0" cy="0"/>
+        </a:xfrm>
+      </p:grpSpPr>
+      <p:sp>
+        <p:nvSpPr>
+          <p:cNvPr id="2" name="Text 0"/>
+          <p:cNvSpPr/>
+          <p:nvPr/>
+        </p:nvSpPr>
+        <p:spPr>
+          <a:xfrm>
+            <a:off x="822960" y="1097280"/>
+            <a:ext cx="10515600" cy="1097280"/>
+          </a:xfrm>
+          <a:prstGeom prst="rect">
+            <a:avLst/>
+          </a:prstGeom>
+          <a:noFill/>
+          <a:ln/>
+        </p:spPr>
+        <p:txBody>
+          <a:bodyPr wrap="square" lIns="0" tIns="0" rIns="0" bIns="0" rtlCol="0" anchor="ctr"/>
+          <a:lstStyle/>
+          <a:p>
+            <a:pPr indent="0" marL="0">
+              <a:buNone/>
+            </a:pPr>
+            <a:r>
+              <a:rPr lang="en-US" sz="7200" b="1" dirty="0">
+                <a:solidFill>
+                  <a:srgbClr val="FFFFFF"/>
+                </a:solidFill>
+                <a:latin typeface="Georgia" pitchFamily="34" charset="0"/>
+                <a:ea typeface="Georgia" pitchFamily="34" charset="-122"/>
+                <a:cs typeface="Georgia" pitchFamily="34" charset="-120"/>
+              </a:rPr>
+              <a:t>LIVE DEMO</a:t>
+            </a:r>
+            <a:endParaRPr lang="en-US" sz="7200" dirty="0"/>
+          </a:p>
+        </p:txBody>
+      </p:sp>
+      <p:sp>
+        <p:nvSpPr>
+          <p:cNvPr id="3" name="Text 1"/>
+          <p:cNvSpPr/>
+          <p:nvPr/>
+        </p:nvSpPr>
+        <p:spPr>
+          <a:xfrm>
+            <a:off x="841248" y="2377440"/>
+            <a:ext cx="10515600" cy="502920"/>
+          </a:xfrm>
+          <a:prstGeom prst="rect">
+            <a:avLst/>
+          </a:prstGeom>
+          <a:noFill/>
+          <a:ln/>
+        </p:spPr>
+        <p:txBody>
+          <a:bodyPr wrap="square" lIns="0" tIns="0" rIns="0" bIns="0" rtlCol="0" anchor="ctr"/>
+          <a:lstStyle/>
+          <a:p>
+            <a:pPr indent="0" marL="0">
+              <a:buNone/>
+            </a:pPr>
+            <a:r>
+              <a:rPr lang="en-US" sz="2400" dirty="0">
+                <a:solidFill>
+                  <a:srgbClr val="C9CDD6"/>
+                </a:solidFill>
+                <a:latin typeface="Calibri" pitchFamily="34" charset="0"/>
+                <a:ea typeface="Calibri" pitchFamily="34" charset="-122"/>
+                <a:cs typeface="Calibri" pitchFamily="34" charset="-120"/>
+              </a:rPr>
+              <a:t>Streamlit app  ·  enter a film's pre-release profile  →  probability of success</a:t>
+            </a:r>
+            <a:endParaRPr lang="en-US" sz="2400" dirty="0"/>
+          </a:p>
+        </p:txBody>
+      </p:sp>
+      <p:sp>
+        <p:nvSpPr>
+          <p:cNvPr id="4" name="Shape 2"/>
+          <p:cNvSpPr/>
+          <p:nvPr/>
+        </p:nvSpPr>
+        <p:spPr>
+          <a:xfrm>
+            <a:off x="822960" y="3566160"/>
+            <a:ext cx="3429000" cy="2286000"/>
+          </a:xfrm>
+          <a:prstGeom prst="rect">
+            <a:avLst/>
+          </a:prstGeom>
+          <a:solidFill>
+            <a:srgbClr val="1E1E38"/>
+          </a:solidFill>
+          <a:ln w="12700">
+            <a:solidFill>
+              <a:srgbClr val="3A3A5C"/>
+            </a:solidFill>
+            <a:prstDash val="solid"/>
+          </a:ln>
+        </p:spPr>
+      </p:sp>
+      <p:sp>
+        <p:nvSpPr>
+          <p:cNvPr id="5" name="Text 3"/>
+          <p:cNvSpPr/>
+          <p:nvPr/>
+        </p:nvSpPr>
+        <p:spPr>
+          <a:xfrm>
+            <a:off x="822960" y="3794760"/>
+            <a:ext cx="3429000" cy="1005840"/>
+          </a:xfrm>
+          <a:prstGeom prst="rect">
+            <a:avLst/>
+          </a:prstGeom>
+          <a:noFill/>
+          <a:ln/>
+        </p:spPr>
+        <p:txBody>
+          <a:bodyPr wrap="square" lIns="0" tIns="0" rIns="0" bIns="0" rtlCol="0" anchor="ctr"/>
+          <a:lstStyle/>
+          <a:p>
+            <a:pPr algn="ctr" indent="0" marL="0">
+              <a:buNone/>
+            </a:pPr>
+            <a:r>
+              <a:rPr lang="en-US" sz="5200" b="1" dirty="0">
+                <a:solidFill>
+                  <a:srgbClr val="FFFFFF"/>
+                </a:solidFill>
+                <a:latin typeface="Georgia" pitchFamily="34" charset="0"/>
+                <a:ea typeface="Georgia" pitchFamily="34" charset="-122"/>
+                <a:cs typeface="Georgia" pitchFamily="34" charset="-120"/>
+              </a:rPr>
+              <a:t>72%</a:t>
+            </a:r>
+            <a:endParaRPr lang="en-US" sz="5200" dirty="0"/>
+          </a:p>
+        </p:txBody>
+      </p:sp>
+      <p:sp>
+        <p:nvSpPr>
+          <p:cNvPr id="6" name="Text 4"/>
+          <p:cNvSpPr/>
+          <p:nvPr/>
+        </p:nvSpPr>
+        <p:spPr>
+          <a:xfrm>
+            <a:off x="1005840" y="4892040"/>
+            <a:ext cx="3063240" cy="822960"/>
+          </a:xfrm>
+          <a:prstGeom prst="rect">
+            <a:avLst/>
+          </a:prstGeom>
+          <a:noFill/>
+          <a:ln/>
+        </p:spPr>
+        <p:txBody>
+          <a:bodyPr wrap="square" lIns="0" tIns="0" rIns="0" bIns="0" rtlCol="0" anchor="t"/>
+          <a:lstStyle/>
+          <a:p>
+            <a:pPr algn="ctr" indent="0" marL="0">
+              <a:buNone/>
+            </a:pPr>
+            <a:r>
+              <a:rPr lang="en-US" sz="1700" dirty="0">
+                <a:solidFill>
+                  <a:srgbClr val="C9CDD6"/>
+                </a:solidFill>
+                <a:latin typeface="Calibri" pitchFamily="34" charset="0"/>
+                <a:ea typeface="Calibri" pitchFamily="34" charset="-122"/>
+                <a:cs typeface="Calibri" pitchFamily="34" charset="-120"/>
+              </a:rPr>
+              <a:t>Summer franchise tentpole</a:t>
+            </a:r>
+            <a:endParaRPr lang="en-US" sz="1700" dirty="0"/>
+          </a:p>
+        </p:txBody>
+      </p:sp>
+      <p:sp>
+        <p:nvSpPr>
+          <p:cNvPr id="7" name="Shape 5"/>
+          <p:cNvSpPr/>
+          <p:nvPr/>
+        </p:nvSpPr>
+        <p:spPr>
+          <a:xfrm>
+            <a:off x="4434840" y="3566160"/>
+            <a:ext cx="3429000" cy="2286000"/>
+          </a:xfrm>
+          <a:prstGeom prst="rect">
+            <a:avLst/>
+          </a:prstGeom>
+          <a:solidFill>
+            <a:srgbClr val="1E1E38"/>
+          </a:solidFill>
+          <a:ln w="12700">
+            <a:solidFill>
+              <a:srgbClr val="3A3A5C"/>
+            </a:solidFill>
+            <a:prstDash val="solid"/>
+          </a:ln>
+        </p:spPr>
+      </p:sp>
+      <p:sp>
+        <p:nvSpPr>
+          <p:cNvPr id="8" name="Text 6"/>
+          <p:cNvSpPr/>
+          <p:nvPr/>
+        </p:nvSpPr>
+        <p:spPr>
+          <a:xfrm>
+            <a:off x="4434840" y="3794760"/>
+            <a:ext cx="3429000" cy="1005840"/>
+          </a:xfrm>
+          <a:prstGeom prst="rect">
+            <a:avLst/>
+          </a:prstGeom>
+          <a:noFill/>
+          <a:ln/>
+        </p:spPr>
+        <p:txBody>
+          <a:bodyPr wrap="square" lIns="0" tIns="0" rIns="0" bIns="0" rtlCol="0" anchor="ctr"/>
+          <a:lstStyle/>
+          <a:p>
+            <a:pPr algn="ctr" indent="0" marL="0">
+              <a:buNone/>
+            </a:pPr>
+            <a:r>
+              <a:rPr lang="en-US" sz="5200" b="1" dirty="0">
+                <a:solidFill>
+                  <a:srgbClr val="FFFFFF"/>
+                </a:solidFill>
+                <a:latin typeface="Georgia" pitchFamily="34" charset="0"/>
+                <a:ea typeface="Georgia" pitchFamily="34" charset="-122"/>
+                <a:cs typeface="Georgia" pitchFamily="34" charset="-120"/>
+              </a:rPr>
+              <a:t>72%</a:t>
+            </a:r>
+            <a:endParaRPr lang="en-US" sz="5200" dirty="0"/>
+          </a:p>
+        </p:txBody>
+      </p:sp>
+      <p:sp>
+        <p:nvSpPr>
+          <p:cNvPr id="9" name="Text 7"/>
+          <p:cNvSpPr/>
+          <p:nvPr/>
+        </p:nvSpPr>
+        <p:spPr>
+          <a:xfrm>
+            <a:off x="4617720" y="4892040"/>
+            <a:ext cx="3063240" cy="822960"/>
+          </a:xfrm>
+          <a:prstGeom prst="rect">
+            <a:avLst/>
+          </a:prstGeom>
+          <a:noFill/>
+          <a:ln/>
+        </p:spPr>
+        <p:txBody>
+          <a:bodyPr wrap="square" lIns="0" tIns="0" rIns="0" bIns="0" rtlCol="0" anchor="t"/>
+          <a:lstStyle/>
+          <a:p>
+            <a:pPr algn="ctr" indent="0" marL="0">
+              <a:buNone/>
+            </a:pPr>
+            <a:r>
+              <a:rPr lang="en-US" sz="1700" dirty="0">
+                <a:solidFill>
+                  <a:srgbClr val="C9CDD6"/>
+                </a:solidFill>
+                <a:latin typeface="Calibri" pitchFamily="34" charset="0"/>
+                <a:ea typeface="Calibri" pitchFamily="34" charset="-122"/>
+                <a:cs typeface="Calibri" pitchFamily="34" charset="-120"/>
+              </a:rPr>
+              <a:t>Low-budget October horror</a:t>
+            </a:r>
+            <a:endParaRPr lang="en-US" sz="1700" dirty="0"/>
+          </a:p>
+        </p:txBody>
+      </p:sp>
+      <p:sp>
+        <p:nvSpPr>
+          <p:cNvPr id="10" name="Shape 8"/>
+          <p:cNvSpPr/>
+          <p:nvPr/>
+        </p:nvSpPr>
+        <p:spPr>
+          <a:xfrm>
+            <a:off x="8046720" y="3566160"/>
+            <a:ext cx="3429000" cy="2286000"/>
+          </a:xfrm>
+          <a:prstGeom prst="rect">
+            <a:avLst/>
+          </a:prstGeom>
+          <a:solidFill>
+            <a:srgbClr val="1E1E38"/>
+          </a:solidFill>
+          <a:ln w="12700">
+            <a:solidFill>
+              <a:srgbClr val="3A3A5C"/>
+            </a:solidFill>
+            <a:prstDash val="solid"/>
+          </a:ln>
+        </p:spPr>
+      </p:sp>
+      <p:sp>
+        <p:nvSpPr>
+          <p:cNvPr id="11" name="Text 9"/>
+          <p:cNvSpPr/>
+          <p:nvPr/>
+        </p:nvSpPr>
+        <p:spPr>
+          <a:xfrm>
+            <a:off x="8046720" y="3794760"/>
+            <a:ext cx="3429000" cy="1005840"/>
+          </a:xfrm>
+          <a:prstGeom prst="rect">
+            <a:avLst/>
+          </a:prstGeom>
+          <a:noFill/>
+          <a:ln/>
+        </p:spPr>
+        <p:txBody>
+          <a:bodyPr wrap="square" lIns="0" tIns="0" rIns="0" bIns="0" rtlCol="0" anchor="ctr"/>
+          <a:lstStyle/>
+          <a:p>
+            <a:pPr algn="ctr" indent="0" marL="0">
+              <a:buNone/>
+            </a:pPr>
+            <a:r>
+              <a:rPr lang="en-US" sz="5200" b="1" dirty="0">
+                <a:solidFill>
+                  <a:srgbClr val="F5A9B0"/>
+                </a:solidFill>
+                <a:latin typeface="Georgia" pitchFamily="34" charset="0"/>
+                <a:ea typeface="Georgia" pitchFamily="34" charset="-122"/>
+                <a:cs typeface="Georgia" pitchFamily="34" charset="-120"/>
+              </a:rPr>
+              <a:t>48%</a:t>
+            </a:r>
+            <a:endParaRPr lang="en-US" sz="5200" dirty="0"/>
+          </a:p>
+        </p:txBody>
+      </p:sp>
+      <p:sp>
+        <p:nvSpPr>
+          <p:cNvPr id="12" name="Text 10"/>
+          <p:cNvSpPr/>
+          <p:nvPr/>
+        </p:nvSpPr>
+        <p:spPr>
+          <a:xfrm>
+            <a:off x="8229600" y="4892040"/>
+            <a:ext cx="3063240" cy="822960"/>
+          </a:xfrm>
+          <a:prstGeom prst="rect">
+            <a:avLst/>
+          </a:prstGeom>
+          <a:noFill/>
+          <a:ln/>
+        </p:spPr>
+        <p:txBody>
+          <a:bodyPr wrap="square" lIns="0" tIns="0" rIns="0" bIns="0" rtlCol="0" anchor="t"/>
+          <a:lstStyle/>
+          <a:p>
+            <a:pPr algn="ctr" indent="0" marL="0">
+              <a:buNone/>
+            </a:pPr>
+            <a:r>
+              <a:rPr lang="en-US" sz="1700" dirty="0">
+                <a:solidFill>
+                  <a:srgbClr val="C9CDD6"/>
+                </a:solidFill>
+                <a:latin typeface="Calibri" pitchFamily="34" charset="0"/>
+                <a:ea typeface="Calibri" pitchFamily="34" charset="-122"/>
+                <a:cs typeface="Calibri" pitchFamily="34" charset="-120"/>
+              </a:rPr>
+              <a:t>Big-budget September drama</a:t>
+            </a:r>
+            <a:endParaRPr lang="en-US" sz="1700" dirty="0"/>
+          </a:p>
+        </p:txBody>
+      </p:sp>
+    </p:spTree>
+  </p:cSld>
+  <p:clrMapOvr>
+    <a:masterClrMapping/>
+  </p:clrMapOvr>
+</p:sld>
+</file>
+
+<file path=ppt/slides/slide14.xml><?xml version="1.0" encoding="utf-8"?>
+<p:sld xmlns:a="http://schemas.openxmlformats.org/drawingml/2006/main" xmlns:r="http://schemas.openxmlformats.org/officeDocument/2006/relationships" xmlns:p="http://schemas.openxmlformats.org/presentationml/2006/main">
+  <p:cSld name="Slide 14">
     <p:bg>
       <p:bgPr>
         <a:solidFill>
@@ -3088,8 +3315,8 @@
         </p:nvSpPr>
         <p:spPr>
           <a:xfrm>
-            <a:off x="566928" y="310896"/>
-            <a:ext cx="10972800" cy="274320"/>
+            <a:off x="566928" y="274320"/>
+            <a:ext cx="10972800" cy="320040"/>
           </a:xfrm>
           <a:prstGeom prst="rect">
             <a:avLst/>
@@ -3105,7 +3332,7 @@
               <a:buNone/>
             </a:pPr>
             <a:r>
-              <a:rPr lang="en-US" sz="1200" b="1" spc="300" kern="0" dirty="0">
+              <a:rPr lang="en-US" sz="1400" b="1" spc="300" kern="0" dirty="0">
                 <a:solidFill>
                   <a:srgbClr val="E50914"/>
                 </a:solidFill>
@@ -3113,9 +3340,9 @@
                 <a:ea typeface="Calibri" pitchFamily="34" charset="-122"/>
                 <a:cs typeface="Calibri" pitchFamily="34" charset="-120"/>
               </a:rPr>
-              <a:t>THE APPLICATION</a:t>
-            </a:r>
-            <a:endParaRPr lang="en-US" sz="1200" dirty="0"/>
+              <a:t>CONCLUSION</a:t>
+            </a:r>
+            <a:endParaRPr lang="en-US" sz="1400" dirty="0"/>
           </a:p>
         </p:txBody>
       </p:sp>
@@ -3127,8 +3354,8 @@
         </p:nvSpPr>
         <p:spPr>
           <a:xfrm>
-            <a:off x="548640" y="603504"/>
-            <a:ext cx="11064240" cy="685800"/>
+            <a:off x="548640" y="566928"/>
+            <a:ext cx="11064240" cy="777240"/>
           </a:xfrm>
           <a:prstGeom prst="rect">
             <a:avLst/>
@@ -3144,7 +3371,7 @@
               <a:buNone/>
             </a:pPr>
             <a:r>
-              <a:rPr lang="en-US" sz="2800" b="1" dirty="0">
+              <a:rPr lang="en-US" sz="3400" b="1" dirty="0">
                 <a:solidFill>
                   <a:srgbClr val="1A1A2E"/>
                 </a:solidFill>
@@ -3152,9 +3379,9 @@
                 <a:ea typeface="Georgia" pitchFamily="34" charset="-122"/>
                 <a:cs typeface="Georgia" pitchFamily="34" charset="-120"/>
               </a:rPr>
-              <a:t>Streamlit app — every input, explained</a:t>
-            </a:r>
-            <a:endParaRPr lang="en-US" sz="2800" dirty="0"/>
+              <a:t>Takeaways &amp; limitations</a:t>
+            </a:r>
+            <a:endParaRPr lang="en-US" sz="3400" dirty="0"/>
           </a:p>
         </p:txBody>
       </p:sp>
@@ -3166,8 +3393,8 @@
         </p:nvSpPr>
         <p:spPr>
           <a:xfrm>
-            <a:off x="640080" y="1554480"/>
-            <a:ext cx="5303520" cy="365760"/>
+            <a:off x="640080" y="1691640"/>
+            <a:ext cx="5303520" cy="457200"/>
           </a:xfrm>
           <a:prstGeom prst="rect">
             <a:avLst/>
@@ -3183,17 +3410,17 @@
               <a:buNone/>
             </a:pPr>
             <a:r>
-              <a:rPr lang="en-US" sz="1500" b="1" dirty="0">
-                <a:solidFill>
-                  <a:srgbClr val="E50914"/>
-                </a:solidFill>
-                <a:latin typeface="Calibri" pitchFamily="34" charset="0"/>
-                <a:ea typeface="Calibri" pitchFamily="34" charset="-122"/>
-                <a:cs typeface="Calibri" pitchFamily="34" charset="-120"/>
-              </a:rPr>
-              <a:t>What the user enters</a:t>
-            </a:r>
-            <a:endParaRPr lang="en-US" sz="1500" dirty="0"/>
+              <a:rPr lang="en-US" sz="2200" b="1" dirty="0">
+                <a:solidFill>
+                  <a:srgbClr val="2E7D32"/>
+                </a:solidFill>
+                <a:latin typeface="Calibri" pitchFamily="34" charset="0"/>
+                <a:ea typeface="Calibri" pitchFamily="34" charset="-122"/>
+                <a:cs typeface="Calibri" pitchFamily="34" charset="-120"/>
+              </a:rPr>
+              <a:t>Takeaways</a:t>
+            </a:r>
+            <a:endParaRPr lang="en-US" sz="2200" dirty="0"/>
           </a:p>
         </p:txBody>
       </p:sp>
@@ -3205,8 +3432,8 @@
         </p:nvSpPr>
         <p:spPr>
           <a:xfrm>
-            <a:off x="731520" y="1965960"/>
-            <a:ext cx="5394960" cy="3931920"/>
+            <a:off x="731520" y="2286000"/>
+            <a:ext cx="5303520" cy="3474720"/>
           </a:xfrm>
           <a:prstGeom prst="rect">
             <a:avLst/>
@@ -3220,13 +3447,13 @@
           <a:p>
             <a:pPr marL="342900" indent="-342900">
               <a:spcAft>
-                <a:spcPts val="700"/>
+                <a:spcPts val="1600"/>
               </a:spcAft>
               <a:buSzPct val="100000"/>
               <a:buChar char="•"/>
             </a:pPr>
             <a:r>
-              <a:rPr lang="en-US" sz="1400" dirty="0">
+              <a:rPr lang="en-US" sz="2300" dirty="0">
                 <a:solidFill>
                   <a:srgbClr val="33373F"/>
                 </a:solidFill>
@@ -3234,20 +3461,20 @@
                 <a:ea typeface="Calibri" pitchFamily="34" charset="-122"/>
                 <a:cs typeface="Calibri" pitchFamily="34" charset="-120"/>
               </a:rPr>
-              <a:t>Budget — the strongest single predictor (log-scaled internally).</a:t>
-            </a:r>
-            <a:endParaRPr lang="en-US" sz="1400" dirty="0"/>
+              <a:t>Pre-release info beats chance — clearly</a:t>
+            </a:r>
+            <a:endParaRPr lang="en-US" sz="2300" dirty="0"/>
           </a:p>
           <a:p>
             <a:pPr marL="342900" indent="-342900">
               <a:spcAft>
-                <a:spcPts val="700"/>
+                <a:spcPts val="1600"/>
               </a:spcAft>
               <a:buSzPct val="100000"/>
               <a:buChar char="•"/>
             </a:pPr>
             <a:r>
-              <a:rPr lang="en-US" sz="1400" dirty="0">
+              <a:rPr lang="en-US" sz="2300" dirty="0">
                 <a:solidFill>
                   <a:srgbClr val="33373F"/>
                 </a:solidFill>
@@ -3255,20 +3482,20 @@
                 <a:ea typeface="Calibri" pitchFamily="34" charset="-122"/>
                 <a:cs typeface="Calibri" pitchFamily="34" charset="-120"/>
               </a:rPr>
-              <a:t>Primary genre — horror/animation outperform; action is hardest.</a:t>
-            </a:r>
-            <a:endParaRPr lang="en-US" sz="1400" dirty="0"/>
+              <a:t>Budget dominates</a:t>
+            </a:r>
+            <a:endParaRPr lang="en-US" sz="2300" dirty="0"/>
           </a:p>
           <a:p>
             <a:pPr marL="342900" indent="-342900">
               <a:spcAft>
-                <a:spcPts val="700"/>
+                <a:spcPts val="1600"/>
               </a:spcAft>
               <a:buSzPct val="100000"/>
               <a:buChar char="•"/>
             </a:pPr>
             <a:r>
-              <a:rPr lang="en-US" sz="1400" dirty="0">
+              <a:rPr lang="en-US" sz="2300" dirty="0">
                 <a:solidFill>
                   <a:srgbClr val="33373F"/>
                 </a:solidFill>
@@ -3276,20 +3503,81 @@
                 <a:ea typeface="Calibri" pitchFamily="34" charset="-122"/>
                 <a:cs typeface="Calibri" pitchFamily="34" charset="-120"/>
               </a:rPr>
-              <a:t>Runtime — also feeds spend intensity (budget ÷ minute).</a:t>
-            </a:r>
-            <a:endParaRPr lang="en-US" sz="1400" dirty="0"/>
-          </a:p>
+              <a:t>Genre + timing + franchise add real lift</a:t>
+            </a:r>
+            <a:endParaRPr lang="en-US" sz="2300" dirty="0"/>
+          </a:p>
+        </p:txBody>
+      </p:sp>
+      <p:sp>
+        <p:nvSpPr>
+          <p:cNvPr id="6" name="Text 4"/>
+          <p:cNvSpPr/>
+          <p:nvPr/>
+        </p:nvSpPr>
+        <p:spPr>
+          <a:xfrm>
+            <a:off x="6400800" y="1691640"/>
+            <a:ext cx="5120640" cy="457200"/>
+          </a:xfrm>
+          <a:prstGeom prst="rect">
+            <a:avLst/>
+          </a:prstGeom>
+          <a:noFill/>
+          <a:ln/>
+        </p:spPr>
+        <p:txBody>
+          <a:bodyPr wrap="square" lIns="0" tIns="0" rIns="0" bIns="0" rtlCol="0" anchor="ctr"/>
+          <a:lstStyle/>
+          <a:p>
+            <a:pPr indent="0" marL="0">
+              <a:buNone/>
+            </a:pPr>
+            <a:r>
+              <a:rPr lang="en-US" sz="2200" b="1" dirty="0">
+                <a:solidFill>
+                  <a:srgbClr val="D1495B"/>
+                </a:solidFill>
+                <a:latin typeface="Calibri" pitchFamily="34" charset="0"/>
+                <a:ea typeface="Calibri" pitchFamily="34" charset="-122"/>
+                <a:cs typeface="Calibri" pitchFamily="34" charset="-120"/>
+              </a:rPr>
+              <a:t>Limitations</a:t>
+            </a:r>
+            <a:endParaRPr lang="en-US" sz="2200" dirty="0"/>
+          </a:p>
+        </p:txBody>
+      </p:sp>
+      <p:sp>
+        <p:nvSpPr>
+          <p:cNvPr id="7" name="Text 5"/>
+          <p:cNvSpPr/>
+          <p:nvPr/>
+        </p:nvSpPr>
+        <p:spPr>
+          <a:xfrm>
+            <a:off x="6492240" y="2286000"/>
+            <a:ext cx="5029200" cy="3474720"/>
+          </a:xfrm>
+          <a:prstGeom prst="rect">
+            <a:avLst/>
+          </a:prstGeom>
+          <a:noFill/>
+          <a:ln/>
+        </p:spPr>
+        <p:txBody>
+          <a:bodyPr wrap="square" rtlCol="0" anchor="t"/>
+          <a:lstStyle/>
           <a:p>
             <a:pPr marL="342900" indent="-342900">
               <a:spcAft>
-                <a:spcPts val="700"/>
+                <a:spcPts val="1600"/>
               </a:spcAft>
               <a:buSzPct val="100000"/>
               <a:buChar char="•"/>
             </a:pPr>
             <a:r>
-              <a:rPr lang="en-US" sz="1400" dirty="0">
+              <a:rPr lang="en-US" sz="2300" dirty="0">
                 <a:solidFill>
                   <a:srgbClr val="33373F"/>
                 </a:solidFill>
@@ -3297,20 +3585,20 @@
                 <a:ea typeface="Calibri" pitchFamily="34" charset="-122"/>
                 <a:cs typeface="Calibri" pitchFamily="34" charset="-120"/>
               </a:rPr>
-              <a:t>Release month &amp; year — timing and era effects.</a:t>
-            </a:r>
-            <a:endParaRPr lang="en-US" sz="1400" dirty="0"/>
+              <a:t>2× rule = proxy for profit</a:t>
+            </a:r>
+            <a:endParaRPr lang="en-US" sz="2300" dirty="0"/>
           </a:p>
           <a:p>
             <a:pPr marL="342900" indent="-342900">
               <a:spcAft>
-                <a:spcPts val="700"/>
+                <a:spcPts val="1600"/>
               </a:spcAft>
               <a:buSzPct val="100000"/>
               <a:buChar char="•"/>
             </a:pPr>
             <a:r>
-              <a:rPr lang="en-US" sz="1400" dirty="0">
+              <a:rPr lang="en-US" sz="2300" dirty="0">
                 <a:solidFill>
                   <a:srgbClr val="33373F"/>
                 </a:solidFill>
@@ -3318,20 +3606,20 @@
                 <a:ea typeface="Calibri" pitchFamily="34" charset="-122"/>
                 <a:cs typeface="Calibri" pitchFamily="34" charset="-120"/>
               </a:rPr>
-              <a:t>Language · # production companies (+ advanced: # genres, # languages).</a:t>
-            </a:r>
-            <a:endParaRPr lang="en-US" sz="1400" dirty="0"/>
+              <a:t>Data ends in 2016, skews large</a:t>
+            </a:r>
+            <a:endParaRPr lang="en-US" sz="2300" dirty="0"/>
           </a:p>
           <a:p>
             <a:pPr marL="342900" indent="-342900">
               <a:spcAft>
-                <a:spcPts val="1000"/>
+                <a:spcPts val="1600"/>
               </a:spcAft>
               <a:buSzPct val="100000"/>
               <a:buChar char="•"/>
             </a:pPr>
             <a:r>
-              <a:rPr lang="en-US" sz="1400" dirty="0">
+              <a:rPr lang="en-US" sz="2300" dirty="0">
                 <a:solidFill>
                   <a:srgbClr val="33373F"/>
                 </a:solidFill>
@@ -3339,154 +3627,9 @@
                 <a:ea typeface="Calibri" pitchFamily="34" charset="-122"/>
                 <a:cs typeface="Calibri" pitchFamily="34" charset="-120"/>
               </a:rPr>
-              <a:t>Sequel/franchise ✓ and major-studio ✓ — the two engineered flags.</a:t>
-            </a:r>
-            <a:endParaRPr lang="en-US" sz="1400" dirty="0"/>
-          </a:p>
-        </p:txBody>
-      </p:sp>
-      <p:sp>
-        <p:nvSpPr>
-          <p:cNvPr id="6" name="Text 4"/>
-          <p:cNvSpPr/>
-          <p:nvPr/>
-        </p:nvSpPr>
-        <p:spPr>
-          <a:xfrm>
-            <a:off x="6400800" y="1554480"/>
-            <a:ext cx="5120640" cy="365760"/>
-          </a:xfrm>
-          <a:prstGeom prst="rect">
-            <a:avLst/>
-          </a:prstGeom>
-          <a:noFill/>
-          <a:ln/>
-        </p:spPr>
-        <p:txBody>
-          <a:bodyPr wrap="square" lIns="0" tIns="0" rIns="0" bIns="0" rtlCol="0" anchor="ctr"/>
-          <a:lstStyle/>
-          <a:p>
-            <a:pPr indent="0" marL="0">
-              <a:buNone/>
-            </a:pPr>
-            <a:r>
-              <a:rPr lang="en-US" sz="1500" b="1" dirty="0">
-                <a:solidFill>
-                  <a:srgbClr val="E50914"/>
-                </a:solidFill>
-                <a:latin typeface="Calibri" pitchFamily="34" charset="0"/>
-                <a:ea typeface="Calibri" pitchFamily="34" charset="-122"/>
-                <a:cs typeface="Calibri" pitchFamily="34" charset="-120"/>
-              </a:rPr>
-              <a:t>What the app does</a:t>
-            </a:r>
-            <a:endParaRPr lang="en-US" sz="1500" dirty="0"/>
-          </a:p>
-        </p:txBody>
-      </p:sp>
-      <p:sp>
-        <p:nvSpPr>
-          <p:cNvPr id="7" name="Text 5"/>
-          <p:cNvSpPr/>
-          <p:nvPr/>
-        </p:nvSpPr>
-        <p:spPr>
-          <a:xfrm>
-            <a:off x="6492240" y="1965960"/>
-            <a:ext cx="5029200" cy="3931920"/>
-          </a:xfrm>
-          <a:prstGeom prst="rect">
-            <a:avLst/>
-          </a:prstGeom>
-          <a:noFill/>
-          <a:ln/>
-        </p:spPr>
-        <p:txBody>
-          <a:bodyPr wrap="square" rtlCol="0" anchor="t"/>
-          <a:lstStyle/>
-          <a:p>
-            <a:pPr marL="342900" indent="-342900">
-              <a:spcAft>
-                <a:spcPts val="800"/>
-              </a:spcAft>
-              <a:buSzPct val="100000"/>
-              <a:buChar char="•"/>
-            </a:pPr>
-            <a:r>
-              <a:rPr lang="en-US" sz="1400" dirty="0">
-                <a:solidFill>
-                  <a:srgbClr val="33373F"/>
-                </a:solidFill>
-                <a:latin typeface="Calibri" pitchFamily="34" charset="0"/>
-                <a:ea typeface="Calibri" pitchFamily="34" charset="-122"/>
-                <a:cs typeface="Calibri" pitchFamily="34" charset="-120"/>
-              </a:rPr>
-              <a:t>Derives the hidden features automatically — season, release window, genre-timing flags, spend intensity.</a:t>
-            </a:r>
-            <a:endParaRPr lang="en-US" sz="1400" dirty="0"/>
-          </a:p>
-          <a:p>
-            <a:pPr marL="342900" indent="-342900">
-              <a:spcAft>
-                <a:spcPts val="800"/>
-              </a:spcAft>
-              <a:buSzPct val="100000"/>
-              <a:buChar char="•"/>
-            </a:pPr>
-            <a:r>
-              <a:rPr lang="en-US" sz="1400" dirty="0">
-                <a:solidFill>
-                  <a:srgbClr val="33373F"/>
-                </a:solidFill>
-                <a:latin typeface="Calibri" pitchFamily="34" charset="0"/>
-                <a:ea typeface="Calibri" pitchFamily="34" charset="-122"/>
-                <a:cs typeface="Calibri" pitchFamily="34" charset="-120"/>
-              </a:rPr>
-              <a:t>Trains the most robust model (tuned Random Forest) on the full cleaned dataset.</a:t>
-            </a:r>
-            <a:endParaRPr lang="en-US" sz="1400" dirty="0"/>
-          </a:p>
-          <a:p>
-            <a:pPr marL="342900" indent="-342900">
-              <a:spcAft>
-                <a:spcPts val="800"/>
-              </a:spcAft>
-              <a:buSzPct val="100000"/>
-              <a:buChar char="•"/>
-            </a:pPr>
-            <a:r>
-              <a:rPr lang="en-US" sz="1400" dirty="0">
-                <a:solidFill>
-                  <a:srgbClr val="33373F"/>
-                </a:solidFill>
-                <a:latin typeface="Calibri" pitchFamily="34" charset="0"/>
-                <a:ea typeface="Calibri" pitchFamily="34" charset="-122"/>
-                <a:cs typeface="Calibri" pitchFamily="34" charset="-120"/>
-              </a:rPr>
-              <a:t>Returns a probability of success with a clear verdict — plus the honest caveat that the 2× target is a proxy for profit.</a:t>
-            </a:r>
-            <a:endParaRPr lang="en-US" sz="1400" dirty="0"/>
-          </a:p>
-          <a:p>
-            <a:pPr marL="342900" indent="-342900">
-              <a:spcAft>
-                <a:spcPts val="1000"/>
-              </a:spcAft>
-              <a:buSzPct val="100000"/>
-              <a:buChar char="•"/>
-            </a:pPr>
-            <a:r>
-              <a:rPr lang="en-US" sz="1400" b="1" dirty="0">
-                <a:solidFill>
-                  <a:srgbClr val="1A1A2E"/>
-                </a:solidFill>
-                <a:latin typeface="Calibri" pitchFamily="34" charset="0"/>
-                <a:ea typeface="Calibri" pitchFamily="34" charset="-122"/>
-                <a:cs typeface="Calibri" pitchFamily="34" charset="-120"/>
-              </a:rPr>
-              <a:t>One command to run: streamlit run app/app.py</a:t>
-            </a:r>
-            <a:endParaRPr lang="en-US" sz="1400" dirty="0"/>
+              <a:t>Post-release factors excluded by design</a:t>
+            </a:r>
+            <a:endParaRPr lang="en-US" sz="2300" dirty="0"/>
           </a:p>
         </p:txBody>
       </p:sp>
@@ -3498,9 +3641,9 @@
 </p:sld>
 </file>
 
-<file path=ppt/slides/slide14.xml><?xml version="1.0" encoding="utf-8"?>
+<file path=ppt/slides/slide15.xml><?xml version="1.0" encoding="utf-8"?>
 <p:sld xmlns:a="http://schemas.openxmlformats.org/drawingml/2006/main" xmlns:r="http://schemas.openxmlformats.org/officeDocument/2006/relationships" xmlns:p="http://schemas.openxmlformats.org/presentationml/2006/main">
-  <p:cSld name="Slide 14">
+  <p:cSld name="Slide 15">
     <p:bg>
       <p:bgPr>
         <a:solidFill>
@@ -3530,8 +3673,8 @@
         </p:nvSpPr>
         <p:spPr>
           <a:xfrm>
-            <a:off x="822960" y="2103120"/>
-            <a:ext cx="10515600" cy="914400"/>
+            <a:off x="822960" y="822960"/>
+            <a:ext cx="10515600" cy="457200"/>
           </a:xfrm>
           <a:prstGeom prst="rect">
             <a:avLst/>
@@ -3547,7 +3690,46 @@
               <a:buNone/>
             </a:pPr>
             <a:r>
-              <a:rPr lang="en-US" sz="5400" b="1" dirty="0">
+              <a:rPr lang="en-US" sz="1600" b="1" spc="400" kern="0" dirty="0">
+                <a:solidFill>
+                  <a:srgbClr val="E50914"/>
+                </a:solidFill>
+                <a:latin typeface="Calibri" pitchFamily="34" charset="0"/>
+                <a:ea typeface="Calibri" pitchFamily="34" charset="-122"/>
+                <a:cs typeface="Calibri" pitchFamily="34" charset="-120"/>
+              </a:rPr>
+              <a:t>FUTURE WORK</a:t>
+            </a:r>
+            <a:endParaRPr lang="en-US" sz="1600" dirty="0"/>
+          </a:p>
+        </p:txBody>
+      </p:sp>
+      <p:sp>
+        <p:nvSpPr>
+          <p:cNvPr id="3" name="Text 1"/>
+          <p:cNvSpPr/>
+          <p:nvPr/>
+        </p:nvSpPr>
+        <p:spPr>
+          <a:xfrm>
+            <a:off x="777240" y="1280160"/>
+            <a:ext cx="10607040" cy="822960"/>
+          </a:xfrm>
+          <a:prstGeom prst="rect">
+            <a:avLst/>
+          </a:prstGeom>
+          <a:noFill/>
+          <a:ln/>
+        </p:spPr>
+        <p:txBody>
+          <a:bodyPr wrap="square" lIns="0" tIns="0" rIns="0" bIns="0" rtlCol="0" anchor="ctr"/>
+          <a:lstStyle/>
+          <a:p>
+            <a:pPr indent="0" marL="0">
+              <a:buNone/>
+            </a:pPr>
+            <a:r>
+              <a:rPr lang="en-US" sz="4000" b="1" dirty="0">
                 <a:solidFill>
                   <a:srgbClr val="FFFFFF"/>
                 </a:solidFill>
@@ -3555,22 +3737,22 @@
                 <a:ea typeface="Georgia" pitchFamily="34" charset="-122"/>
                 <a:cs typeface="Georgia" pitchFamily="34" charset="-120"/>
               </a:rPr>
-              <a:t>LIVE DEMO</a:t>
-            </a:r>
-            <a:endParaRPr lang="en-US" sz="5400" dirty="0"/>
-          </a:p>
-        </p:txBody>
-      </p:sp>
-      <p:sp>
-        <p:nvSpPr>
-          <p:cNvPr id="3" name="Text 1"/>
-          <p:cNvSpPr/>
-          <p:nvPr/>
-        </p:nvSpPr>
-        <p:spPr>
-          <a:xfrm>
-            <a:off x="841248" y="3154680"/>
-            <a:ext cx="10515600" cy="365760"/>
+              <a:t>Where this goes next</a:t>
+            </a:r>
+            <a:endParaRPr lang="en-US" sz="4000" dirty="0"/>
+          </a:p>
+        </p:txBody>
+      </p:sp>
+      <p:sp>
+        <p:nvSpPr>
+          <p:cNvPr id="4" name="Text 2"/>
+          <p:cNvSpPr/>
+          <p:nvPr/>
+        </p:nvSpPr>
+        <p:spPr>
+          <a:xfrm>
+            <a:off x="914400" y="2377440"/>
+            <a:ext cx="10332720" cy="3108960"/>
           </a:xfrm>
           <a:prstGeom prst="rect">
             <a:avLst/>
@@ -3579,406 +3761,104 @@
           <a:ln/>
         </p:spPr>
         <p:txBody>
-          <a:bodyPr wrap="square" lIns="0" tIns="0" rIns="0" bIns="0" rtlCol="0" anchor="ctr"/>
-          <a:lstStyle/>
-          <a:p>
-            <a:pPr indent="0" marL="0">
-              <a:buNone/>
-            </a:pPr>
-            <a:r>
-              <a:rPr lang="en-US" sz="1600" dirty="0">
-                <a:solidFill>
-                  <a:srgbClr val="C9CDD6"/>
-                </a:solidFill>
-                <a:latin typeface="Calibri" pitchFamily="34" charset="0"/>
-                <a:ea typeface="Calibri" pitchFamily="34" charset="-122"/>
-                <a:cs typeface="Calibri" pitchFamily="34" charset="-120"/>
-              </a:rPr>
-              <a:t>Movie Box-Office Success Predictor — running locally at localhost:8501</a:t>
-            </a:r>
-            <a:endParaRPr lang="en-US" sz="1600" dirty="0"/>
-          </a:p>
-        </p:txBody>
-      </p:sp>
-      <p:sp>
-        <p:nvSpPr>
-          <p:cNvPr id="4" name="Text 2"/>
-          <p:cNvSpPr/>
-          <p:nvPr/>
-        </p:nvSpPr>
-        <p:spPr>
-          <a:xfrm>
-            <a:off x="841248" y="5394960"/>
-            <a:ext cx="10515600" cy="548640"/>
-          </a:xfrm>
-          <a:prstGeom prst="rect">
-            <a:avLst/>
-          </a:prstGeom>
-          <a:noFill/>
-          <a:ln/>
-        </p:spPr>
-        <p:txBody>
-          <a:bodyPr wrap="square" lIns="0" tIns="0" rIns="0" bIns="0" rtlCol="0" anchor="ctr"/>
-          <a:lstStyle/>
-          <a:p>
-            <a:pPr indent="0" marL="0">
-              <a:buNone/>
-            </a:pPr>
-            <a:r>
-              <a:rPr lang="en-US" sz="1300" b="1" i="1" dirty="0">
-                <a:solidFill>
-                  <a:srgbClr val="E50914"/>
-                </a:solidFill>
-                <a:latin typeface="Calibri" pitchFamily="34" charset="0"/>
-                <a:ea typeface="Calibri" pitchFamily="34" charset="-122"/>
-                <a:cs typeface="Calibri" pitchFamily="34" charset="-120"/>
-              </a:rPr>
-              <a:t>If the demo gods are unkind:  </a:t>
-            </a:r>
-            <a:pPr indent="0" marL="0">
-              <a:buNone/>
-            </a:pPr>
-            <a:r>
-              <a:rPr lang="en-US" sz="1300" i="1" dirty="0">
-                <a:solidFill>
-                  <a:srgbClr val="C9CDD6"/>
-                </a:solidFill>
-                <a:latin typeface="Calibri" pitchFamily="34" charset="0"/>
-                <a:ea typeface="Calibri" pitchFamily="34" charset="-122"/>
-                <a:cs typeface="Calibri" pitchFamily="34" charset="-120"/>
-              </a:rPr>
-              <a:t>summer franchise tentpole → 72% · low-budget October horror → 72% · big-budget September drama → 48%.</a:t>
-            </a:r>
-            <a:endParaRPr lang="en-US" sz="1300" dirty="0"/>
-          </a:p>
-        </p:txBody>
-      </p:sp>
-    </p:spTree>
-  </p:cSld>
-  <p:clrMapOvr>
-    <a:masterClrMapping/>
-  </p:clrMapOvr>
-</p:sld>
-</file>
-
-<file path=ppt/slides/slide15.xml><?xml version="1.0" encoding="utf-8"?>
-<p:sld xmlns:a="http://schemas.openxmlformats.org/drawingml/2006/main" xmlns:r="http://schemas.openxmlformats.org/officeDocument/2006/relationships" xmlns:p="http://schemas.openxmlformats.org/presentationml/2006/main">
-  <p:cSld name="Slide 15">
-    <p:bg>
-      <p:bgPr>
-        <a:solidFill>
-          <a:srgbClr val="FFFFFF"/>
-        </a:solidFill>
-      </p:bgPr>
-    </p:bg>
-    <p:spTree>
-      <p:nvGrpSpPr>
-        <p:cNvPr id="1" name=""/>
-        <p:cNvGrpSpPr/>
-        <p:nvPr/>
-      </p:nvGrpSpPr>
-      <p:grpSpPr>
-        <a:xfrm>
-          <a:off x="0" y="0"/>
-          <a:ext cx="0" cy="0"/>
-          <a:chOff x="0" y="0"/>
-          <a:chExt cx="0" cy="0"/>
-        </a:xfrm>
-      </p:grpSpPr>
-      <p:sp>
-        <p:nvSpPr>
-          <p:cNvPr id="2" name="Text 0"/>
-          <p:cNvSpPr/>
-          <p:nvPr/>
-        </p:nvSpPr>
-        <p:spPr>
-          <a:xfrm>
-            <a:off x="566928" y="310896"/>
-            <a:ext cx="10972800" cy="274320"/>
-          </a:xfrm>
-          <a:prstGeom prst="rect">
-            <a:avLst/>
-          </a:prstGeom>
-          <a:noFill/>
-          <a:ln/>
-        </p:spPr>
-        <p:txBody>
-          <a:bodyPr wrap="square" lIns="0" tIns="0" rIns="0" bIns="0" rtlCol="0" anchor="ctr"/>
-          <a:lstStyle/>
-          <a:p>
-            <a:pPr indent="0" marL="0">
-              <a:buNone/>
-            </a:pPr>
-            <a:r>
-              <a:rPr lang="en-US" sz="1200" b="1" spc="300" kern="0" dirty="0">
-                <a:solidFill>
-                  <a:srgbClr val="E50914"/>
-                </a:solidFill>
-                <a:latin typeface="Calibri" pitchFamily="34" charset="0"/>
-                <a:ea typeface="Calibri" pitchFamily="34" charset="-122"/>
-                <a:cs typeface="Calibri" pitchFamily="34" charset="-120"/>
-              </a:rPr>
-              <a:t>CONCLUSION</a:t>
-            </a:r>
-            <a:endParaRPr lang="en-US" sz="1200" dirty="0"/>
-          </a:p>
-        </p:txBody>
-      </p:sp>
-      <p:sp>
-        <p:nvSpPr>
-          <p:cNvPr id="3" name="Text 1"/>
-          <p:cNvSpPr/>
-          <p:nvPr/>
-        </p:nvSpPr>
-        <p:spPr>
-          <a:xfrm>
-            <a:off x="548640" y="603504"/>
-            <a:ext cx="11064240" cy="685800"/>
-          </a:xfrm>
-          <a:prstGeom prst="rect">
-            <a:avLst/>
-          </a:prstGeom>
-          <a:noFill/>
-          <a:ln/>
-        </p:spPr>
-        <p:txBody>
-          <a:bodyPr wrap="square" lIns="0" tIns="0" rIns="0" bIns="0" rtlCol="0" anchor="ctr"/>
-          <a:lstStyle/>
-          <a:p>
-            <a:pPr indent="0" marL="0">
-              <a:buNone/>
-            </a:pPr>
-            <a:r>
-              <a:rPr lang="en-US" sz="2800" b="1" dirty="0">
-                <a:solidFill>
-                  <a:srgbClr val="1A1A2E"/>
-                </a:solidFill>
-                <a:latin typeface="Georgia" pitchFamily="34" charset="0"/>
-                <a:ea typeface="Georgia" pitchFamily="34" charset="-122"/>
-                <a:cs typeface="Georgia" pitchFamily="34" charset="-120"/>
-              </a:rPr>
-              <a:t>Takeaways, limitations, and what's next</a:t>
-            </a:r>
-            <a:endParaRPr lang="en-US" sz="2800" dirty="0"/>
-          </a:p>
-        </p:txBody>
-      </p:sp>
-      <p:sp>
-        <p:nvSpPr>
-          <p:cNvPr id="4" name="Text 2"/>
-          <p:cNvSpPr/>
-          <p:nvPr/>
-        </p:nvSpPr>
-        <p:spPr>
-          <a:xfrm>
-            <a:off x="640080" y="1600200"/>
-            <a:ext cx="3474720" cy="365760"/>
-          </a:xfrm>
-          <a:prstGeom prst="rect">
-            <a:avLst/>
-          </a:prstGeom>
-          <a:noFill/>
-          <a:ln/>
-        </p:spPr>
-        <p:txBody>
-          <a:bodyPr wrap="square" lIns="0" tIns="0" rIns="0" bIns="0" rtlCol="0" anchor="ctr"/>
-          <a:lstStyle/>
-          <a:p>
-            <a:pPr indent="0" marL="0">
-              <a:buNone/>
-            </a:pPr>
-            <a:r>
-              <a:rPr lang="en-US" sz="1500" b="1" dirty="0">
-                <a:solidFill>
-                  <a:srgbClr val="2E7D32"/>
-                </a:solidFill>
-                <a:latin typeface="Calibri" pitchFamily="34" charset="0"/>
-                <a:ea typeface="Calibri" pitchFamily="34" charset="-122"/>
-                <a:cs typeface="Calibri" pitchFamily="34" charset="-120"/>
-              </a:rPr>
-              <a:t>Takeaways</a:t>
-            </a:r>
-            <a:endParaRPr lang="en-US" sz="1500" dirty="0"/>
-          </a:p>
-        </p:txBody>
-      </p:sp>
-      <p:sp>
-        <p:nvSpPr>
-          <p:cNvPr id="5" name="Text 3"/>
-          <p:cNvSpPr/>
-          <p:nvPr/>
-        </p:nvSpPr>
-        <p:spPr>
-          <a:xfrm>
-            <a:off x="731520" y="2011680"/>
-            <a:ext cx="3474720" cy="3291840"/>
-          </a:xfrm>
-          <a:prstGeom prst="rect">
-            <a:avLst/>
-          </a:prstGeom>
-          <a:noFill/>
-          <a:ln/>
-        </p:spPr>
-        <p:txBody>
           <a:bodyPr wrap="square" rtlCol="0" anchor="t"/>
           <a:lstStyle/>
           <a:p>
             <a:pPr marL="342900" indent="-342900">
               <a:spcAft>
-                <a:spcPts val="1000"/>
+                <a:spcPts val="1600"/>
               </a:spcAft>
               <a:buSzPct val="100000"/>
               <a:buChar char="•"/>
             </a:pPr>
             <a:r>
-              <a:rPr lang="en-US" sz="1400" dirty="0">
-                <a:solidFill>
-                  <a:srgbClr val="33373F"/>
-                </a:solidFill>
-                <a:latin typeface="Calibri" pitchFamily="34" charset="0"/>
-                <a:ea typeface="Calibri" pitchFamily="34" charset="-122"/>
-                <a:cs typeface="Calibri" pitchFamily="34" charset="-120"/>
-              </a:rPr>
-              <a:t>Pre-release attributes predict success meaningfully better than chance.</a:t>
-            </a:r>
-            <a:endParaRPr lang="en-US" sz="1400" dirty="0"/>
+              <a:rPr lang="en-US" sz="2500" dirty="0">
+                <a:solidFill>
+                  <a:srgbClr val="E8EAF0"/>
+                </a:solidFill>
+                <a:latin typeface="Calibri" pitchFamily="34" charset="0"/>
+                <a:ea typeface="Calibri" pitchFamily="34" charset="-122"/>
+                <a:cs typeface="Calibri" pitchFamily="34" charset="-120"/>
+              </a:rPr>
+              <a:t>Star power &amp; marketing spend as features</a:t>
+            </a:r>
+            <a:endParaRPr lang="en-US" sz="2500" dirty="0"/>
           </a:p>
           <a:p>
             <a:pPr marL="342900" indent="-342900">
               <a:spcAft>
-                <a:spcPts val="1000"/>
+                <a:spcPts val="1600"/>
               </a:spcAft>
               <a:buSzPct val="100000"/>
               <a:buChar char="•"/>
             </a:pPr>
             <a:r>
-              <a:rPr lang="en-US" sz="1400" dirty="0">
-                <a:solidFill>
-                  <a:srgbClr val="33373F"/>
-                </a:solidFill>
-                <a:latin typeface="Calibri" pitchFamily="34" charset="0"/>
-                <a:ea typeface="Calibri" pitchFamily="34" charset="-122"/>
-                <a:cs typeface="Calibri" pitchFamily="34" charset="-120"/>
-              </a:rPr>
-              <a:t>Budget dominates; genre, timing, and franchise/studio signals add real lift.</a:t>
-            </a:r>
-            <a:endParaRPr lang="en-US" sz="1400" dirty="0"/>
-          </a:p>
-        </p:txBody>
-      </p:sp>
-      <p:sp>
-        <p:nvSpPr>
-          <p:cNvPr id="6" name="Text 4"/>
-          <p:cNvSpPr/>
-          <p:nvPr/>
-        </p:nvSpPr>
-        <p:spPr>
-          <a:xfrm>
-            <a:off x="4480560" y="1600200"/>
-            <a:ext cx="3474720" cy="365760"/>
-          </a:xfrm>
-          <a:prstGeom prst="rect">
-            <a:avLst/>
-          </a:prstGeom>
-          <a:noFill/>
-          <a:ln/>
-        </p:spPr>
-        <p:txBody>
-          <a:bodyPr wrap="square" lIns="0" tIns="0" rIns="0" bIns="0" rtlCol="0" anchor="ctr"/>
-          <a:lstStyle/>
-          <a:p>
-            <a:pPr indent="0" marL="0">
-              <a:buNone/>
-            </a:pPr>
-            <a:r>
-              <a:rPr lang="en-US" sz="1500" b="1" dirty="0">
-                <a:solidFill>
-                  <a:srgbClr val="E50914"/>
-                </a:solidFill>
-                <a:latin typeface="Calibri" pitchFamily="34" charset="0"/>
-                <a:ea typeface="Calibri" pitchFamily="34" charset="-122"/>
-                <a:cs typeface="Calibri" pitchFamily="34" charset="-120"/>
-              </a:rPr>
-              <a:t>Limitations</a:t>
-            </a:r>
-            <a:endParaRPr lang="en-US" sz="1500" dirty="0"/>
-          </a:p>
-        </p:txBody>
-      </p:sp>
-      <p:sp>
-        <p:nvSpPr>
-          <p:cNvPr id="7" name="Text 5"/>
-          <p:cNvSpPr/>
-          <p:nvPr/>
-        </p:nvSpPr>
-        <p:spPr>
-          <a:xfrm>
-            <a:off x="4572000" y="2011680"/>
-            <a:ext cx="3474720" cy="3291840"/>
-          </a:xfrm>
-          <a:prstGeom prst="rect">
-            <a:avLst/>
-          </a:prstGeom>
-          <a:noFill/>
-          <a:ln/>
-        </p:spPr>
-        <p:txBody>
-          <a:bodyPr wrap="square" rtlCol="0" anchor="t"/>
-          <a:lstStyle/>
+              <a:rPr lang="en-US" sz="2500" dirty="0">
+                <a:solidFill>
+                  <a:srgbClr val="E8EAF0"/>
+                </a:solidFill>
+                <a:latin typeface="Calibri" pitchFamily="34" charset="0"/>
+                <a:ea typeface="Calibri" pitchFamily="34" charset="-122"/>
+                <a:cs typeface="Calibri" pitchFamily="34" charset="-120"/>
+              </a:rPr>
+              <a:t>Newer data + streaming-era releases</a:t>
+            </a:r>
+            <a:endParaRPr lang="en-US" sz="2500" dirty="0"/>
+          </a:p>
           <a:p>
             <a:pPr marL="342900" indent="-342900">
               <a:spcAft>
-                <a:spcPts val="1000"/>
+                <a:spcPts val="1600"/>
               </a:spcAft>
               <a:buSzPct val="100000"/>
               <a:buChar char="•"/>
             </a:pPr>
             <a:r>
-              <a:rPr lang="en-US" sz="1400" dirty="0">
-                <a:solidFill>
-                  <a:srgbClr val="33373F"/>
-                </a:solidFill>
-                <a:latin typeface="Calibri" pitchFamily="34" charset="0"/>
-                <a:ea typeface="Calibri" pitchFamily="34" charset="-122"/>
-                <a:cs typeface="Calibri" pitchFamily="34" charset="-120"/>
-              </a:rPr>
-              <a:t>2× rule is a proxy — revenue is gross; budget excludes marketing.</a:t>
-            </a:r>
-            <a:endParaRPr lang="en-US" sz="1400" dirty="0"/>
+              <a:rPr lang="en-US" sz="2500" dirty="0">
+                <a:solidFill>
+                  <a:srgbClr val="E8EAF0"/>
+                </a:solidFill>
+                <a:latin typeface="Calibri" pitchFamily="34" charset="0"/>
+                <a:ea typeface="Calibri" pitchFamily="34" charset="-122"/>
+                <a:cs typeface="Calibri" pitchFamily="34" charset="-120"/>
+              </a:rPr>
+              <a:t>NLP on plot summaries</a:t>
+            </a:r>
+            <a:endParaRPr lang="en-US" sz="2500" dirty="0"/>
           </a:p>
           <a:p>
             <a:pPr marL="342900" indent="-342900">
               <a:spcAft>
-                <a:spcPts val="1000"/>
+                <a:spcPts val="1600"/>
               </a:spcAft>
               <a:buSzPct val="100000"/>
               <a:buChar char="•"/>
             </a:pPr>
             <a:r>
-              <a:rPr lang="en-US" sz="1400" dirty="0">
-                <a:solidFill>
-                  <a:srgbClr val="33373F"/>
-                </a:solidFill>
-                <a:latin typeface="Calibri" pitchFamily="34" charset="0"/>
-                <a:ea typeface="Calibri" pitchFamily="34" charset="-122"/>
-                <a:cs typeface="Calibri" pitchFamily="34" charset="-120"/>
-              </a:rPr>
-              <a:t>Data ends in 2016 and skews to larger films; ~33% of rows lacked usable financials.</a:t>
-            </a:r>
-            <a:endParaRPr lang="en-US" sz="1400" dirty="0"/>
-          </a:p>
-        </p:txBody>
-      </p:sp>
-      <p:sp>
-        <p:nvSpPr>
-          <p:cNvPr id="8" name="Text 6"/>
-          <p:cNvSpPr/>
-          <p:nvPr/>
-        </p:nvSpPr>
-        <p:spPr>
-          <a:xfrm>
-            <a:off x="8321040" y="1600200"/>
-            <a:ext cx="3291840" cy="365760"/>
+              <a:rPr lang="en-US" sz="2500" dirty="0">
+                <a:solidFill>
+                  <a:srgbClr val="E8EAF0"/>
+                </a:solidFill>
+                <a:latin typeface="Calibri" pitchFamily="34" charset="0"/>
+                <a:ea typeface="Calibri" pitchFamily="34" charset="-122"/>
+                <a:cs typeface="Calibri" pitchFamily="34" charset="-120"/>
+              </a:rPr>
+              <a:t>ROI tiers instead of a single 2× cutoff</a:t>
+            </a:r>
+            <a:endParaRPr lang="en-US" sz="2500" dirty="0"/>
+          </a:p>
+        </p:txBody>
+      </p:sp>
+      <p:sp>
+        <p:nvSpPr>
+          <p:cNvPr id="5" name="Text 3"/>
+          <p:cNvSpPr/>
+          <p:nvPr/>
+        </p:nvSpPr>
+        <p:spPr>
+          <a:xfrm>
+            <a:off x="841248" y="5806440"/>
+            <a:ext cx="10607040" cy="502920"/>
           </a:xfrm>
           <a:prstGeom prst="rect">
             <a:avLst/>
@@ -3994,267 +3874,31 @@
               <a:buNone/>
             </a:pPr>
             <a:r>
-              <a:rPr lang="en-US" sz="1500" b="1" dirty="0">
-                <a:solidFill>
-                  <a:srgbClr val="1A1A2E"/>
-                </a:solidFill>
-                <a:latin typeface="Calibri" pitchFamily="34" charset="0"/>
-                <a:ea typeface="Calibri" pitchFamily="34" charset="-122"/>
-                <a:cs typeface="Calibri" pitchFamily="34" charset="-120"/>
-              </a:rPr>
-              <a:t>Future work</a:t>
-            </a:r>
-            <a:endParaRPr lang="en-US" sz="1500" dirty="0"/>
-          </a:p>
-        </p:txBody>
-      </p:sp>
-      <p:sp>
-        <p:nvSpPr>
-          <p:cNvPr id="9" name="Text 7"/>
-          <p:cNvSpPr/>
-          <p:nvPr/>
-        </p:nvSpPr>
-        <p:spPr>
-          <a:xfrm>
-            <a:off x="8412480" y="2011680"/>
-            <a:ext cx="3200400" cy="3291840"/>
-          </a:xfrm>
-          <a:prstGeom prst="rect">
-            <a:avLst/>
-          </a:prstGeom>
-          <a:noFill/>
-          <a:ln/>
-        </p:spPr>
-        <p:txBody>
-          <a:bodyPr wrap="square" rtlCol="0" anchor="t"/>
-          <a:lstStyle/>
-          <a:p>
-            <a:pPr marL="342900" indent="-342900">
-              <a:spcAft>
-                <a:spcPts val="1000"/>
-              </a:spcAft>
-              <a:buSzPct val="100000"/>
-              <a:buChar char="•"/>
-            </a:pPr>
-            <a:r>
-              <a:rPr lang="en-US" sz="1400" dirty="0">
-                <a:solidFill>
-                  <a:srgbClr val="33373F"/>
-                </a:solidFill>
-                <a:latin typeface="Calibri" pitchFamily="34" charset="0"/>
-                <a:ea typeface="Calibri" pitchFamily="34" charset="-122"/>
-                <a:cs typeface="Calibri" pitchFamily="34" charset="-120"/>
-              </a:rPr>
-              <a:t>Star power, marketing spend, and competition features.</a:t>
-            </a:r>
-            <a:endParaRPr lang="en-US" sz="1400" dirty="0"/>
-          </a:p>
-          <a:p>
-            <a:pPr marL="342900" indent="-342900">
-              <a:spcAft>
-                <a:spcPts val="1000"/>
-              </a:spcAft>
-              <a:buSzPct val="100000"/>
-              <a:buChar char="•"/>
-            </a:pPr>
-            <a:r>
-              <a:rPr lang="en-US" sz="1400" dirty="0">
-                <a:solidFill>
-                  <a:srgbClr val="33373F"/>
-                </a:solidFill>
-                <a:latin typeface="Calibri" pitchFamily="34" charset="0"/>
-                <a:ea typeface="Calibri" pitchFamily="34" charset="-122"/>
-                <a:cs typeface="Calibri" pitchFamily="34" charset="-120"/>
-              </a:rPr>
-              <a:t>Newer data + streaming; NLP on plot summaries; ROI-tier prediction.</a:t>
-            </a:r>
-            <a:endParaRPr lang="en-US" sz="1400" dirty="0"/>
-          </a:p>
-        </p:txBody>
-      </p:sp>
-    </p:spTree>
-  </p:cSld>
-  <p:clrMapOvr>
-    <a:masterClrMapping/>
-  </p:clrMapOvr>
-</p:sld>
-</file>
-
-<file path=ppt/slides/slide16.xml><?xml version="1.0" encoding="utf-8"?>
-<p:sld xmlns:a="http://schemas.openxmlformats.org/drawingml/2006/main" xmlns:r="http://schemas.openxmlformats.org/officeDocument/2006/relationships" xmlns:p="http://schemas.openxmlformats.org/presentationml/2006/main">
-  <p:cSld name="Slide 16">
-    <p:bg>
-      <p:bgPr>
-        <a:solidFill>
-          <a:srgbClr val="141428"/>
-        </a:solidFill>
-      </p:bgPr>
-    </p:bg>
-    <p:spTree>
-      <p:nvGrpSpPr>
-        <p:cNvPr id="1" name=""/>
-        <p:cNvGrpSpPr/>
-        <p:nvPr/>
-      </p:nvGrpSpPr>
-      <p:grpSpPr>
-        <a:xfrm>
-          <a:off x="0" y="0"/>
-          <a:ext cx="0" cy="0"/>
-          <a:chOff x="0" y="0"/>
-          <a:chExt cx="0" cy="0"/>
-        </a:xfrm>
-      </p:grpSpPr>
-      <p:sp>
-        <p:nvSpPr>
-          <p:cNvPr id="2" name="Text 0"/>
-          <p:cNvSpPr/>
-          <p:nvPr/>
-        </p:nvSpPr>
-        <p:spPr>
-          <a:xfrm>
-            <a:off x="822960" y="2286000"/>
-            <a:ext cx="10515600" cy="1645920"/>
-          </a:xfrm>
-          <a:prstGeom prst="rect">
-            <a:avLst/>
-          </a:prstGeom>
-          <a:noFill/>
-          <a:ln/>
-        </p:spPr>
-        <p:txBody>
-          <a:bodyPr wrap="square" lIns="0" tIns="0" rIns="0" bIns="0" rtlCol="0" anchor="ctr"/>
-          <a:lstStyle/>
-          <a:p>
+              <a:rPr lang="en-US" sz="2000" b="1" dirty="0">
+                <a:solidFill>
+                  <a:srgbClr val="FFFFFF"/>
+                </a:solidFill>
+                <a:latin typeface="Calibri" pitchFamily="34" charset="0"/>
+                <a:ea typeface="Calibri" pitchFamily="34" charset="-122"/>
+                <a:cs typeface="Calibri" pitchFamily="34" charset="-120"/>
+              </a:rPr>
+              <a:t>Thank you — questions welcome.    </a:t>
+            </a:r>
             <a:pPr indent="0" marL="0">
-              <a:lnSpc>
-                <a:spcPct val="105000"/>
-              </a:lnSpc>
-              <a:buNone/>
-            </a:pPr>
-            <a:r>
-              <a:rPr lang="en-US" sz="3800" b="1" dirty="0">
-                <a:solidFill>
-                  <a:srgbClr val="FFFFFF"/>
-                </a:solidFill>
-                <a:latin typeface="Georgia" pitchFamily="34" charset="0"/>
-                <a:ea typeface="Georgia" pitchFamily="34" charset="-122"/>
-                <a:cs typeface="Georgia" pitchFamily="34" charset="-120"/>
-              </a:rPr>
-              <a:t>Predicting movie success</a:t>
-            </a:r>
-            <a:endParaRPr lang="en-US" sz="3800" dirty="0"/>
-          </a:p>
-          <a:p>
-            <a:pPr indent="0" marL="0">
-              <a:lnSpc>
-                <a:spcPct val="105000"/>
-              </a:lnSpc>
-              <a:buNone/>
-            </a:pPr>
-            <a:r>
-              <a:rPr lang="en-US" sz="3800" b="1" dirty="0">
-                <a:solidFill>
-                  <a:srgbClr val="FFFFFF"/>
-                </a:solidFill>
-                <a:latin typeface="Georgia" pitchFamily="34" charset="0"/>
-                <a:ea typeface="Georgia" pitchFamily="34" charset="-122"/>
-                <a:cs typeface="Georgia" pitchFamily="34" charset="-120"/>
-              </a:rPr>
-              <a:t>before the cameras roll.</a:t>
-            </a:r>
-            <a:endParaRPr lang="en-US" sz="3800" dirty="0"/>
-          </a:p>
-        </p:txBody>
-      </p:sp>
-      <p:sp>
-        <p:nvSpPr>
-          <p:cNvPr id="3" name="Text 1"/>
-          <p:cNvSpPr/>
-          <p:nvPr/>
-        </p:nvSpPr>
-        <p:spPr>
-          <a:xfrm>
-            <a:off x="841248" y="4114800"/>
-            <a:ext cx="10515600" cy="365760"/>
-          </a:xfrm>
-          <a:prstGeom prst="rect">
-            <a:avLst/>
-          </a:prstGeom>
-          <a:noFill/>
-          <a:ln/>
-        </p:spPr>
-        <p:txBody>
-          <a:bodyPr wrap="square" lIns="0" tIns="0" rIns="0" bIns="0" rtlCol="0" anchor="ctr"/>
-          <a:lstStyle/>
-          <a:p>
-            <a:pPr indent="0" marL="0">
-              <a:buNone/>
-            </a:pPr>
-            <a:r>
-              <a:rPr lang="en-US" sz="1500" b="1" dirty="0">
-                <a:solidFill>
-                  <a:srgbClr val="FFFFFF"/>
-                </a:solidFill>
-                <a:latin typeface="Calibri" pitchFamily="34" charset="0"/>
-                <a:ea typeface="Calibri" pitchFamily="34" charset="-122"/>
-                <a:cs typeface="Calibri" pitchFamily="34" charset="-120"/>
-              </a:rPr>
-              <a:t>Bennett Speicher</a:t>
-            </a:r>
-            <a:pPr indent="0" marL="0">
-              <a:buNone/>
-            </a:pPr>
-            <a:r>
-              <a:rPr lang="en-US" sz="1500" dirty="0">
-                <a:solidFill>
-                  <a:srgbClr val="E50914"/>
-                </a:solidFill>
-                <a:latin typeface="Calibri" pitchFamily="34" charset="0"/>
-                <a:ea typeface="Calibri" pitchFamily="34" charset="-122"/>
-                <a:cs typeface="Calibri" pitchFamily="34" charset="-120"/>
-              </a:rPr>
-              <a:t>   ·   github.com/bdspeicher12/UMBC-DATA606-Capstone</a:t>
-            </a:r>
-            <a:endParaRPr lang="en-US" sz="1500" dirty="0"/>
-          </a:p>
-        </p:txBody>
-      </p:sp>
-      <p:sp>
-        <p:nvSpPr>
-          <p:cNvPr id="4" name="Text 2"/>
-          <p:cNvSpPr/>
-          <p:nvPr/>
-        </p:nvSpPr>
-        <p:spPr>
-          <a:xfrm>
-            <a:off x="841248" y="4572000"/>
-            <a:ext cx="10515600" cy="320040"/>
-          </a:xfrm>
-          <a:prstGeom prst="rect">
-            <a:avLst/>
-          </a:prstGeom>
-          <a:noFill/>
-          <a:ln/>
-        </p:spPr>
-        <p:txBody>
-          <a:bodyPr wrap="square" lIns="0" tIns="0" rIns="0" bIns="0" rtlCol="0" anchor="ctr"/>
-          <a:lstStyle/>
-          <a:p>
-            <a:pPr indent="0" marL="0">
-              <a:buNone/>
-            </a:pPr>
-            <a:r>
-              <a:rPr lang="en-US" sz="1300" i="1" dirty="0">
-                <a:solidFill>
-                  <a:srgbClr val="9AA0AD"/>
-                </a:solidFill>
-                <a:latin typeface="Calibri" pitchFamily="34" charset="0"/>
-                <a:ea typeface="Calibri" pitchFamily="34" charset="-122"/>
-                <a:cs typeface="Calibri" pitchFamily="34" charset="-120"/>
-              </a:rPr>
-              <a:t>Thank you — questions welcome.</a:t>
-            </a:r>
-            <a:endParaRPr lang="en-US" sz="1300" dirty="0"/>
+              <a:buNone/>
+            </a:pPr>
+            <a:r>
+              <a:rPr lang="en-US" sz="2000" b="1" dirty="0">
+                <a:solidFill>
+                  <a:srgbClr val="FF7B84"/>
+                </a:solidFill>
+                <a:latin typeface="Calibri" pitchFamily="34" charset="0"/>
+                <a:ea typeface="Calibri" pitchFamily="34" charset="-122"/>
+                <a:cs typeface="Calibri" pitchFamily="34" charset="-120"/>
+              </a:rPr>
+              <a:t>github.com/bdspeicher12/UMBC-DATA606-Capstone</a:t>
+            </a:r>
+            <a:endParaRPr lang="en-US" sz="2000" dirty="0"/>
           </a:p>
         </p:txBody>
       </p:sp>
@@ -4298,8 +3942,8 @@
         </p:nvSpPr>
         <p:spPr>
           <a:xfrm>
-            <a:off x="566928" y="310896"/>
-            <a:ext cx="10972800" cy="274320"/>
+            <a:off x="566928" y="274320"/>
+            <a:ext cx="10972800" cy="320040"/>
           </a:xfrm>
           <a:prstGeom prst="rect">
             <a:avLst/>
@@ -4315,7 +3959,7 @@
               <a:buNone/>
             </a:pPr>
             <a:r>
-              <a:rPr lang="en-US" sz="1200" b="1" spc="300" kern="0" dirty="0">
+              <a:rPr lang="en-US" sz="1400" b="1" spc="300" kern="0" dirty="0">
                 <a:solidFill>
                   <a:srgbClr val="E50914"/>
                 </a:solidFill>
@@ -4325,7 +3969,7 @@
               </a:rPr>
               <a:t>BACKGROUND</a:t>
             </a:r>
-            <a:endParaRPr lang="en-US" sz="1200" dirty="0"/>
+            <a:endParaRPr lang="en-US" sz="1400" dirty="0"/>
           </a:p>
         </p:txBody>
       </p:sp>
@@ -4337,8 +3981,8 @@
         </p:nvSpPr>
         <p:spPr>
           <a:xfrm>
-            <a:off x="548640" y="603504"/>
-            <a:ext cx="11064240" cy="685800"/>
+            <a:off x="548640" y="566928"/>
+            <a:ext cx="11064240" cy="777240"/>
           </a:xfrm>
           <a:prstGeom prst="rect">
             <a:avLst/>
@@ -4354,7 +3998,7 @@
               <a:buNone/>
             </a:pPr>
             <a:r>
-              <a:rPr lang="en-US" sz="2800" b="1" dirty="0">
+              <a:rPr lang="en-US" sz="3400" b="1" dirty="0">
                 <a:solidFill>
                   <a:srgbClr val="1A1A2E"/>
                 </a:solidFill>
@@ -4362,9 +4006,9 @@
                 <a:ea typeface="Georgia" pitchFamily="34" charset="-122"/>
                 <a:cs typeface="Georgia" pitchFamily="34" charset="-120"/>
               </a:rPr>
-              <a:t>A multi-million-dollar bet, made on incomplete information</a:t>
-            </a:r>
-            <a:endParaRPr lang="en-US" sz="2800" dirty="0"/>
+              <a:t>A multi-million-dollar bet</a:t>
+            </a:r>
+            <a:endParaRPr lang="en-US" sz="3400" dirty="0"/>
           </a:p>
         </p:txBody>
       </p:sp>
@@ -4376,8 +4020,8 @@
         </p:nvSpPr>
         <p:spPr>
           <a:xfrm>
-            <a:off x="640080" y="1645920"/>
-            <a:ext cx="6400800" cy="3931920"/>
+            <a:off x="731520" y="1737360"/>
+            <a:ext cx="10789920" cy="3657600"/>
           </a:xfrm>
           <a:prstGeom prst="rect">
             <a:avLst/>
@@ -4389,15 +4033,28 @@
           <a:bodyPr wrap="square" rtlCol="0" anchor="t"/>
           <a:lstStyle/>
           <a:p>
-            <a:pPr marL="342900" indent="-342900">
+            <a:pPr indent="0" marL="0">
+              <a:buNone/>
+            </a:pPr>
+            <a:r>
+              <a:rPr lang="en-US" sz="2500" b="1" dirty="0">
+                <a:solidFill>
+                  <a:srgbClr val="E50914"/>
+                </a:solidFill>
+                <a:latin typeface="Calibri" pitchFamily="34" charset="0"/>
+                <a:ea typeface="Calibri" pitchFamily="34" charset="-122"/>
+                <a:cs typeface="Calibri" pitchFamily="34" charset="-120"/>
+              </a:rPr>
+              <a:t>1.  </a:t>
+            </a:r>
+            <a:pPr indent="0" marL="0">
               <a:spcAft>
-                <a:spcPts val="1000"/>
+                <a:spcPts val="1600"/>
               </a:spcAft>
-              <a:buSzPct val="100000"/>
-              <a:buChar char="•"/>
-            </a:pPr>
-            <a:r>
-              <a:rPr lang="en-US" sz="1700" dirty="0">
+              <a:buNone/>
+            </a:pPr>
+            <a:r>
+              <a:rPr lang="en-US" sz="2500" dirty="0">
                 <a:solidFill>
                   <a:srgbClr val="33373F"/>
                 </a:solidFill>
@@ -4405,20 +4062,33 @@
                 <a:ea typeface="Calibri" pitchFamily="34" charset="-122"/>
                 <a:cs typeface="Calibri" pitchFamily="34" charset="-120"/>
               </a:rPr>
-              <a:t>Studios commit tens to hundreds of millions of dollars years before a single ticket is sold.</a:t>
-            </a:r>
-            <a:endParaRPr lang="en-US" sz="1700" dirty="0"/>
-          </a:p>
-          <a:p>
-            <a:pPr marL="342900" indent="-342900">
+              <a:t>Studios commit $100M+ years before a single ticket sells</a:t>
+            </a:r>
+            <a:endParaRPr lang="en-US" sz="2500" dirty="0"/>
+          </a:p>
+          <a:p>
+            <a:pPr indent="0" marL="0">
+              <a:buNone/>
+            </a:pPr>
+            <a:r>
+              <a:rPr lang="en-US" sz="2500" b="1" dirty="0">
+                <a:solidFill>
+                  <a:srgbClr val="E50914"/>
+                </a:solidFill>
+                <a:latin typeface="Calibri" pitchFamily="34" charset="0"/>
+                <a:ea typeface="Calibri" pitchFamily="34" charset="-122"/>
+                <a:cs typeface="Calibri" pitchFamily="34" charset="-120"/>
+              </a:rPr>
+              <a:t>2.  </a:t>
+            </a:r>
+            <a:pPr indent="0" marL="0">
               <a:spcAft>
-                <a:spcPts val="1000"/>
+                <a:spcPts val="1600"/>
               </a:spcAft>
-              <a:buSzPct val="100000"/>
-              <a:buChar char="•"/>
-            </a:pPr>
-            <a:r>
-              <a:rPr lang="en-US" sz="1700" dirty="0">
+              <a:buNone/>
+            </a:pPr>
+            <a:r>
+              <a:rPr lang="en-US" sz="2500" dirty="0">
                 <a:solidFill>
                   <a:srgbClr val="33373F"/>
                 </a:solidFill>
@@ -4426,20 +4096,33 @@
                 <a:ea typeface="Calibri" pitchFamily="34" charset="-122"/>
                 <a:cs typeface="Calibri" pitchFamily="34" charset="-120"/>
               </a:rPr>
-              <a:t>Much of what decides a film's fate — reviews, word of mouth, competition — only appears after release.</a:t>
-            </a:r>
-            <a:endParaRPr lang="en-US" sz="1700" dirty="0"/>
-          </a:p>
-          <a:p>
-            <a:pPr marL="342900" indent="-342900">
+              <a:t>Reviews, word of mouth, competition — only appear after release</a:t>
+            </a:r>
+            <a:endParaRPr lang="en-US" sz="2500" dirty="0"/>
+          </a:p>
+          <a:p>
+            <a:pPr indent="0" marL="0">
+              <a:buNone/>
+            </a:pPr>
+            <a:r>
+              <a:rPr lang="en-US" sz="2500" b="1" dirty="0">
+                <a:solidFill>
+                  <a:srgbClr val="E50914"/>
+                </a:solidFill>
+                <a:latin typeface="Calibri" pitchFamily="34" charset="0"/>
+                <a:ea typeface="Calibri" pitchFamily="34" charset="-122"/>
+                <a:cs typeface="Calibri" pitchFamily="34" charset="-120"/>
+              </a:rPr>
+              <a:t>3.  </a:t>
+            </a:r>
+            <a:pPr indent="0" marL="0">
               <a:spcAft>
-                <a:spcPts val="1000"/>
+                <a:spcPts val="1600"/>
               </a:spcAft>
-              <a:buSzPct val="100000"/>
-              <a:buChar char="•"/>
-            </a:pPr>
-            <a:r>
-              <a:rPr lang="en-US" sz="1700" dirty="0">
+              <a:buNone/>
+            </a:pPr>
+            <a:r>
+              <a:rPr lang="en-US" sz="2500" dirty="0">
                 <a:solidFill>
                   <a:srgbClr val="33373F"/>
                 </a:solidFill>
@@ -4447,20 +4130,33 @@
                 <a:ea typeface="Calibri" pitchFamily="34" charset="-122"/>
                 <a:cs typeface="Calibri" pitchFamily="34" charset="-120"/>
               </a:rPr>
-              <a:t>But real signals are known beforehand: budget, genre, runtime, release timing, language, studio.</a:t>
-            </a:r>
-            <a:endParaRPr lang="en-US" sz="1700" dirty="0"/>
-          </a:p>
-          <a:p>
-            <a:pPr marL="342900" indent="-342900">
+              <a:t>But real signals ARE known early: budget, genre, timing, studio</a:t>
+            </a:r>
+            <a:endParaRPr lang="en-US" sz="2500" dirty="0"/>
+          </a:p>
+          <a:p>
+            <a:pPr indent="0" marL="0">
+              <a:buNone/>
+            </a:pPr>
+            <a:r>
+              <a:rPr lang="en-US" sz="2500" b="1" dirty="0">
+                <a:solidFill>
+                  <a:srgbClr val="E50914"/>
+                </a:solidFill>
+                <a:latin typeface="Calibri" pitchFamily="34" charset="0"/>
+                <a:ea typeface="Calibri" pitchFamily="34" charset="-122"/>
+                <a:cs typeface="Calibri" pitchFamily="34" charset="-120"/>
+              </a:rPr>
+              <a:t>4.  </a:t>
+            </a:r>
+            <a:pPr indent="0" marL="0">
               <a:spcAft>
-                <a:spcPts val="1000"/>
+                <a:spcPts val="1600"/>
               </a:spcAft>
-              <a:buSzPct val="100000"/>
-              <a:buChar char="•"/>
-            </a:pPr>
-            <a:r>
-              <a:rPr lang="en-US" sz="1700" b="1" dirty="0">
+              <a:buNone/>
+            </a:pPr>
+            <a:r>
+              <a:rPr lang="en-US" sz="2500" b="1" dirty="0">
                 <a:solidFill>
                   <a:srgbClr val="1A1A2E"/>
                 </a:solidFill>
@@ -4468,9 +4164,9 @@
                 <a:ea typeface="Calibri" pitchFamily="34" charset="-122"/>
                 <a:cs typeface="Calibri" pitchFamily="34" charset="-120"/>
               </a:rPr>
-              <a:t>Goal: predict a film's financial success from pre-release attributes alone.</a:t>
-            </a:r>
-            <a:endParaRPr lang="en-US" sz="1700" dirty="0"/>
+              <a:t>Goal: predict financial success from pre-release info alone</a:t>
+            </a:r>
+            <a:endParaRPr lang="en-US" sz="2500" dirty="0"/>
           </a:p>
         </p:txBody>
       </p:sp>
@@ -4482,21 +4178,16 @@
         </p:nvSpPr>
         <p:spPr>
           <a:xfrm>
-            <a:off x="7498080" y="1783080"/>
-            <a:ext cx="4023360" cy="3200400"/>
+            <a:off x="640080" y="5394960"/>
+            <a:ext cx="10881360" cy="1005840"/>
           </a:xfrm>
           <a:prstGeom prst="rect">
             <a:avLst/>
           </a:prstGeom>
           <a:solidFill>
-            <a:srgbClr val="F3F4F6"/>
+            <a:srgbClr val="141428"/>
           </a:solidFill>
-          <a:ln w="12700">
-            <a:solidFill>
-              <a:srgbClr val="E3E6EA"/>
-            </a:solidFill>
-            <a:prstDash val="solid"/>
-          </a:ln>
+          <a:ln/>
         </p:spPr>
       </p:sp>
       <p:sp>
@@ -4507,8 +4198,8 @@
         </p:nvSpPr>
         <p:spPr>
           <a:xfrm>
-            <a:off x="7772400" y="2057400"/>
-            <a:ext cx="3474720" cy="320040"/>
+            <a:off x="914400" y="5394960"/>
+            <a:ext cx="10332720" cy="1005840"/>
           </a:xfrm>
           <a:prstGeom prst="rect">
             <a:avLst/>
@@ -4524,7 +4215,7 @@
               <a:buNone/>
             </a:pPr>
             <a:r>
-              <a:rPr lang="en-US" sz="1200" b="1" spc="200" kern="0" dirty="0">
+              <a:rPr lang="en-US" sz="2300" b="1" dirty="0">
                 <a:solidFill>
                   <a:srgbClr val="E50914"/>
                 </a:solidFill>
@@ -4532,48 +4223,23 @@
                 <a:ea typeface="Calibri" pitchFamily="34" charset="-122"/>
                 <a:cs typeface="Calibri" pitchFamily="34" charset="-120"/>
               </a:rPr>
-              <a:t>THE DELIVERABLE</a:t>
-            </a:r>
-            <a:endParaRPr lang="en-US" sz="1200" dirty="0"/>
-          </a:p>
-        </p:txBody>
-      </p:sp>
-      <p:sp>
-        <p:nvSpPr>
-          <p:cNvPr id="7" name="Text 5"/>
-          <p:cNvSpPr/>
-          <p:nvPr/>
-        </p:nvSpPr>
-        <p:spPr>
-          <a:xfrm>
-            <a:off x="7772400" y="2468880"/>
-            <a:ext cx="3474720" cy="2286000"/>
-          </a:xfrm>
-          <a:prstGeom prst="rect">
-            <a:avLst/>
-          </a:prstGeom>
-          <a:noFill/>
-          <a:ln/>
-        </p:spPr>
-        <p:txBody>
-          <a:bodyPr wrap="square" lIns="0" tIns="0" rIns="0" bIns="0" rtlCol="0" anchor="t"/>
-          <a:lstStyle/>
-          <a:p>
+              <a:t>Deliverable:  </a:t>
+            </a:r>
             <a:pPr indent="0" marL="0">
               <a:buNone/>
             </a:pPr>
             <a:r>
-              <a:rPr lang="en-US" sz="1800" i="1" dirty="0">
-                <a:solidFill>
-                  <a:srgbClr val="1A1A2E"/>
-                </a:solidFill>
-                <a:latin typeface="Georgia" pitchFamily="34" charset="0"/>
-                <a:ea typeface="Georgia" pitchFamily="34" charset="-122"/>
-                <a:cs typeface="Georgia" pitchFamily="34" charset="-120"/>
-              </a:rPr>
-              <a:t>An end-to-end pipeline: data → EDA → machine-learning models → an interactive app that scores a film's odds of success.</a:t>
-            </a:r>
-            <a:endParaRPr lang="en-US" sz="1800" dirty="0"/>
+              <a:rPr lang="en-US" sz="2300" b="1" dirty="0">
+                <a:solidFill>
+                  <a:srgbClr val="FFFFFF"/>
+                </a:solidFill>
+                <a:latin typeface="Calibri" pitchFamily="34" charset="0"/>
+                <a:ea typeface="Calibri" pitchFamily="34" charset="-122"/>
+                <a:cs typeface="Calibri" pitchFamily="34" charset="-120"/>
+              </a:rPr>
+              <a:t>Data  →  EDA  →  ML models  →  interactive app</a:t>
+            </a:r>
+            <a:endParaRPr lang="en-US" sz="2300" dirty="0"/>
           </a:p>
         </p:txBody>
       </p:sp>
@@ -4617,8 +4283,8 @@
         </p:nvSpPr>
         <p:spPr>
           <a:xfrm>
-            <a:off x="566928" y="310896"/>
-            <a:ext cx="10972800" cy="274320"/>
+            <a:off x="566928" y="274320"/>
+            <a:ext cx="10972800" cy="320040"/>
           </a:xfrm>
           <a:prstGeom prst="rect">
             <a:avLst/>
@@ -4634,7 +4300,7 @@
               <a:buNone/>
             </a:pPr>
             <a:r>
-              <a:rPr lang="en-US" sz="1200" b="1" spc="300" kern="0" dirty="0">
+              <a:rPr lang="en-US" sz="1400" b="1" spc="300" kern="0" dirty="0">
                 <a:solidFill>
                   <a:srgbClr val="E50914"/>
                 </a:solidFill>
@@ -4644,7 +4310,7 @@
               </a:rPr>
               <a:t>THE TARGET</a:t>
             </a:r>
-            <a:endParaRPr lang="en-US" sz="1200" dirty="0"/>
+            <a:endParaRPr lang="en-US" sz="1400" dirty="0"/>
           </a:p>
         </p:txBody>
       </p:sp>
@@ -4656,8 +4322,8 @@
         </p:nvSpPr>
         <p:spPr>
           <a:xfrm>
-            <a:off x="548640" y="603504"/>
-            <a:ext cx="11064240" cy="685800"/>
+            <a:off x="548640" y="566928"/>
+            <a:ext cx="11064240" cy="777240"/>
           </a:xfrm>
           <a:prstGeom prst="rect">
             <a:avLst/>
@@ -4673,7 +4339,7 @@
               <a:buNone/>
             </a:pPr>
             <a:r>
-              <a:rPr lang="en-US" sz="2800" b="1" dirty="0">
+              <a:rPr lang="en-US" sz="3400" b="1" dirty="0">
                 <a:solidFill>
                   <a:srgbClr val="1A1A2E"/>
                 </a:solidFill>
@@ -4683,7 +4349,7 @@
               </a:rPr>
               <a:t>What counts as “success”?</a:t>
             </a:r>
-            <a:endParaRPr lang="en-US" sz="2800" dirty="0"/>
+            <a:endParaRPr lang="en-US" sz="3400" dirty="0"/>
           </a:p>
         </p:txBody>
       </p:sp>
@@ -4695,8 +4361,8 @@
         </p:nvSpPr>
         <p:spPr>
           <a:xfrm>
-            <a:off x="640080" y="1554480"/>
-            <a:ext cx="6035040" cy="1280160"/>
+            <a:off x="640080" y="1645920"/>
+            <a:ext cx="7223760" cy="1554480"/>
           </a:xfrm>
           <a:prstGeom prst="rect">
             <a:avLst/>
@@ -4715,8 +4381,8 @@
         </p:nvSpPr>
         <p:spPr>
           <a:xfrm>
-            <a:off x="640080" y="1554480"/>
-            <a:ext cx="6035040" cy="1280160"/>
+            <a:off x="640080" y="1645920"/>
+            <a:ext cx="7223760" cy="1554480"/>
           </a:xfrm>
           <a:prstGeom prst="rect">
             <a:avLst/>
@@ -4732,7 +4398,7 @@
               <a:buNone/>
             </a:pPr>
             <a:r>
-              <a:rPr lang="en-US" sz="2200" dirty="0">
+              <a:rPr lang="en-US" sz="3000" dirty="0">
                 <a:solidFill>
                   <a:srgbClr val="C9CDD6"/>
                 </a:solidFill>
@@ -4746,7 +4412,7 @@
               <a:buNone/>
             </a:pPr>
             <a:r>
-              <a:rPr lang="en-US" sz="2200" b="1" dirty="0">
+              <a:rPr lang="en-US" sz="3000" b="1" dirty="0">
                 <a:solidFill>
                   <a:srgbClr val="FFFFFF"/>
                 </a:solidFill>
@@ -4756,7 +4422,7 @@
               </a:rPr>
               <a:t>Revenue ≥ 2 × Budget</a:t>
             </a:r>
-            <a:endParaRPr lang="en-US" sz="2200" dirty="0"/>
+            <a:endParaRPr lang="en-US" sz="3000" dirty="0"/>
           </a:p>
         </p:txBody>
       </p:sp>
@@ -4768,8 +4434,8 @@
         </p:nvSpPr>
         <p:spPr>
           <a:xfrm>
-            <a:off x="640080" y="3200400"/>
-            <a:ext cx="7315200" cy="2468880"/>
+            <a:off x="731520" y="3657600"/>
+            <a:ext cx="7040880" cy="2560320"/>
           </a:xfrm>
           <a:prstGeom prst="rect">
             <a:avLst/>
@@ -4781,15 +4447,28 @@
           <a:bodyPr wrap="square" rtlCol="0" anchor="t"/>
           <a:lstStyle/>
           <a:p>
-            <a:pPr marL="342900" indent="-342900">
+            <a:pPr indent="0" marL="0">
+              <a:buNone/>
+            </a:pPr>
+            <a:r>
+              <a:rPr lang="en-US" sz="2400" b="1" dirty="0">
+                <a:solidFill>
+                  <a:srgbClr val="E50914"/>
+                </a:solidFill>
+                <a:latin typeface="Calibri" pitchFamily="34" charset="0"/>
+                <a:ea typeface="Calibri" pitchFamily="34" charset="-122"/>
+                <a:cs typeface="Calibri" pitchFamily="34" charset="-120"/>
+              </a:rPr>
+              <a:t>1.  </a:t>
+            </a:r>
+            <a:pPr indent="0" marL="0">
               <a:spcAft>
-                <a:spcPts val="1000"/>
+                <a:spcPts val="1600"/>
               </a:spcAft>
-              <a:buSzPct val="100000"/>
-              <a:buChar char="•"/>
-            </a:pPr>
-            <a:r>
-              <a:rPr lang="en-US" sz="1600" dirty="0">
+              <a:buNone/>
+            </a:pPr>
+            <a:r>
+              <a:rPr lang="en-US" sz="2400" dirty="0">
                 <a:solidFill>
                   <a:srgbClr val="33373F"/>
                 </a:solidFill>
@@ -4797,20 +4476,33 @@
                 <a:ea typeface="Calibri" pitchFamily="34" charset="-122"/>
                 <a:cs typeface="Calibri" pitchFamily="34" charset="-120"/>
               </a:rPr>
-              <a:t>Marketing roughly doubles the cost — studios spend ~50–100% of the budget again on advertising.</a:t>
-            </a:r>
-            <a:endParaRPr lang="en-US" sz="1600" dirty="0"/>
-          </a:p>
-          <a:p>
-            <a:pPr marL="342900" indent="-342900">
+              <a:t>Marketing ≈ doubles the cost</a:t>
+            </a:r>
+            <a:endParaRPr lang="en-US" sz="2400" dirty="0"/>
+          </a:p>
+          <a:p>
+            <a:pPr indent="0" marL="0">
+              <a:buNone/>
+            </a:pPr>
+            <a:r>
+              <a:rPr lang="en-US" sz="2400" b="1" dirty="0">
+                <a:solidFill>
+                  <a:srgbClr val="E50914"/>
+                </a:solidFill>
+                <a:latin typeface="Calibri" pitchFamily="34" charset="0"/>
+                <a:ea typeface="Calibri" pitchFamily="34" charset="-122"/>
+                <a:cs typeface="Calibri" pitchFamily="34" charset="-120"/>
+              </a:rPr>
+              <a:t>2.  </a:t>
+            </a:r>
+            <a:pPr indent="0" marL="0">
               <a:spcAft>
-                <a:spcPts val="1000"/>
+                <a:spcPts val="1600"/>
               </a:spcAft>
-              <a:buSzPct val="100000"/>
-              <a:buChar char="•"/>
-            </a:pPr>
-            <a:r>
-              <a:rPr lang="en-US" sz="1600" dirty="0">
+              <a:buNone/>
+            </a:pPr>
+            <a:r>
+              <a:rPr lang="en-US" sz="2400" dirty="0">
                 <a:solidFill>
                   <a:srgbClr val="33373F"/>
                 </a:solidFill>
@@ -4818,20 +4510,33 @@
                 <a:ea typeface="Calibri" pitchFamily="34" charset="-122"/>
                 <a:cs typeface="Calibri" pitchFamily="34" charset="-120"/>
               </a:rPr>
-              <a:t>Theaters keep about half the box-office gross, so studios net only ~50% of reported revenue.</a:t>
-            </a:r>
-            <a:endParaRPr lang="en-US" sz="1600" dirty="0"/>
-          </a:p>
-          <a:p>
-            <a:pPr marL="342900" indent="-342900">
+              <a:t>Theaters keep ~half the gross</a:t>
+            </a:r>
+            <a:endParaRPr lang="en-US" sz="2400" dirty="0"/>
+          </a:p>
+          <a:p>
+            <a:pPr indent="0" marL="0">
+              <a:buNone/>
+            </a:pPr>
+            <a:r>
+              <a:rPr lang="en-US" sz="2400" b="1" dirty="0">
+                <a:solidFill>
+                  <a:srgbClr val="E50914"/>
+                </a:solidFill>
+                <a:latin typeface="Calibri" pitchFamily="34" charset="0"/>
+                <a:ea typeface="Calibri" pitchFamily="34" charset="-122"/>
+                <a:cs typeface="Calibri" pitchFamily="34" charset="-120"/>
+              </a:rPr>
+              <a:t>3.  </a:t>
+            </a:r>
+            <a:pPr indent="0" marL="0">
               <a:spcAft>
-                <a:spcPts val="1000"/>
+                <a:spcPts val="1600"/>
               </a:spcAft>
-              <a:buSzPct val="100000"/>
-              <a:buChar char="•"/>
-            </a:pPr>
-            <a:r>
-              <a:rPr lang="en-US" sz="1600" b="1" dirty="0">
+              <a:buNone/>
+            </a:pPr>
+            <a:r>
+              <a:rPr lang="en-US" sz="2400" b="1" dirty="0">
                 <a:solidFill>
                   <a:srgbClr val="2E7D32"/>
                 </a:solidFill>
@@ -4839,9 +4544,9 @@
                 <a:ea typeface="Calibri" pitchFamily="34" charset="-122"/>
                 <a:cs typeface="Calibri" pitchFamily="34" charset="-120"/>
               </a:rPr>
-              <a:t>→ A film must gross about twice its budget just to break even.</a:t>
-            </a:r>
-            <a:endParaRPr lang="en-US" sz="1600" dirty="0"/>
+              <a:t>→ must gross ~2× budget to break even</a:t>
+            </a:r>
+            <a:endParaRPr lang="en-US" sz="2400" dirty="0"/>
           </a:p>
         </p:txBody>
       </p:sp>
@@ -4853,8 +4558,8 @@
         </p:nvSpPr>
         <p:spPr>
           <a:xfrm>
-            <a:off x="8321040" y="3200400"/>
-            <a:ext cx="3246120" cy="2286000"/>
+            <a:off x="8229600" y="1645920"/>
+            <a:ext cx="3337560" cy="4297680"/>
           </a:xfrm>
           <a:prstGeom prst="rect">
             <a:avLst/>
@@ -4878,8 +4583,8 @@
         </p:nvSpPr>
         <p:spPr>
           <a:xfrm>
-            <a:off x="8321040" y="3429000"/>
-            <a:ext cx="3246120" cy="868680"/>
+            <a:off x="8229600" y="2286000"/>
+            <a:ext cx="3337560" cy="1188720"/>
           </a:xfrm>
           <a:prstGeom prst="rect">
             <a:avLst/>
@@ -4895,7 +4600,7 @@
               <a:buNone/>
             </a:pPr>
             <a:r>
-              <a:rPr lang="en-US" sz="5000" b="1" dirty="0">
+              <a:rPr lang="en-US" sz="7200" b="1" dirty="0">
                 <a:solidFill>
                   <a:srgbClr val="2E7D32"/>
                 </a:solidFill>
@@ -4905,7 +4610,7 @@
               </a:rPr>
               <a:t>56%</a:t>
             </a:r>
-            <a:endParaRPr lang="en-US" sz="5000" dirty="0"/>
+            <a:endParaRPr lang="en-US" sz="7200" dirty="0"/>
           </a:p>
         </p:txBody>
       </p:sp>
@@ -4917,8 +4622,8 @@
         </p:nvSpPr>
         <p:spPr>
           <a:xfrm>
-            <a:off x="8503920" y="4343400"/>
-            <a:ext cx="2880360" cy="914400"/>
+            <a:off x="8412480" y="3657600"/>
+            <a:ext cx="2971800" cy="548640"/>
           </a:xfrm>
           <a:prstGeom prst="rect">
             <a:avLst/>
@@ -4927,6 +4632,45 @@
           <a:ln/>
         </p:spPr>
         <p:txBody>
+          <a:bodyPr wrap="square" lIns="0" tIns="0" rIns="0" bIns="0" rtlCol="0" anchor="ctr"/>
+          <a:lstStyle/>
+          <a:p>
+            <a:pPr algn="ctr" indent="0" marL="0">
+              <a:buNone/>
+            </a:pPr>
+            <a:r>
+              <a:rPr lang="en-US" sz="2000" b="1" dirty="0">
+                <a:solidFill>
+                  <a:srgbClr val="1A1A2E"/>
+                </a:solidFill>
+                <a:latin typeface="Calibri" pitchFamily="34" charset="0"/>
+                <a:ea typeface="Calibri" pitchFamily="34" charset="-122"/>
+                <a:cs typeface="Calibri" pitchFamily="34" charset="-120"/>
+              </a:rPr>
+              <a:t>of films clear the bar</a:t>
+            </a:r>
+            <a:endParaRPr lang="en-US" sz="2000" dirty="0"/>
+          </a:p>
+        </p:txBody>
+      </p:sp>
+      <p:sp>
+        <p:nvSpPr>
+          <p:cNvPr id="10" name="Text 8"/>
+          <p:cNvSpPr/>
+          <p:nvPr/>
+        </p:nvSpPr>
+        <p:spPr>
+          <a:xfrm>
+            <a:off x="8412480" y="4206240"/>
+            <a:ext cx="2971800" cy="822960"/>
+          </a:xfrm>
+          <a:prstGeom prst="rect">
+            <a:avLst/>
+          </a:prstGeom>
+          <a:noFill/>
+          <a:ln/>
+        </p:spPr>
+        <p:txBody>
           <a:bodyPr wrap="square" lIns="0" tIns="0" rIns="0" bIns="0" rtlCol="0" anchor="t"/>
           <a:lstStyle/>
           <a:p>
@@ -4934,7 +4678,7 @@
               <a:buNone/>
             </a:pPr>
             <a:r>
-              <a:rPr lang="en-US" sz="1300" dirty="0">
+              <a:rPr lang="en-US" sz="1600" dirty="0">
                 <a:solidFill>
                   <a:srgbClr val="5B6472"/>
                 </a:solidFill>
@@ -4942,9 +4686,9 @@
                 <a:ea typeface="Calibri" pitchFamily="34" charset="-122"/>
                 <a:cs typeface="Calibri" pitchFamily="34" charset="-120"/>
               </a:rPr>
-              <a:t>of films clear the bar — a balanced target, ideal for classification.</a:t>
-            </a:r>
-            <a:endParaRPr lang="en-US" sz="1300" dirty="0"/>
+              <a:t>balanced target — ideal for classification</a:t>
+            </a:r>
+            <a:endParaRPr lang="en-US" sz="1600" dirty="0"/>
           </a:p>
         </p:txBody>
       </p:sp>
@@ -4988,8 +4732,8 @@
         </p:nvSpPr>
         <p:spPr>
           <a:xfrm>
-            <a:off x="566928" y="310896"/>
-            <a:ext cx="10972800" cy="274320"/>
+            <a:off x="566928" y="274320"/>
+            <a:ext cx="10972800" cy="320040"/>
           </a:xfrm>
           <a:prstGeom prst="rect">
             <a:avLst/>
@@ -5005,7 +4749,7 @@
               <a:buNone/>
             </a:pPr>
             <a:r>
-              <a:rPr lang="en-US" sz="1200" b="1" spc="300" kern="0" dirty="0">
+              <a:rPr lang="en-US" sz="1400" b="1" spc="300" kern="0" dirty="0">
                 <a:solidFill>
                   <a:srgbClr val="E50914"/>
                 </a:solidFill>
@@ -5015,7 +4759,7 @@
               </a:rPr>
               <a:t>THE DATA</a:t>
             </a:r>
-            <a:endParaRPr lang="en-US" sz="1200" dirty="0"/>
+            <a:endParaRPr lang="en-US" sz="1400" dirty="0"/>
           </a:p>
         </p:txBody>
       </p:sp>
@@ -5027,8 +4771,8 @@
         </p:nvSpPr>
         <p:spPr>
           <a:xfrm>
-            <a:off x="548640" y="603504"/>
-            <a:ext cx="11064240" cy="685800"/>
+            <a:off x="548640" y="566928"/>
+            <a:ext cx="11064240" cy="777240"/>
           </a:xfrm>
           <a:prstGeom prst="rect">
             <a:avLst/>
@@ -5044,7 +4788,7 @@
               <a:buNone/>
             </a:pPr>
             <a:r>
-              <a:rPr lang="en-US" sz="2800" b="1" dirty="0">
+              <a:rPr lang="en-US" sz="3400" b="1" dirty="0">
                 <a:solidFill>
                   <a:srgbClr val="1A1A2E"/>
                 </a:solidFill>
@@ -5052,9 +4796,9 @@
                 <a:ea typeface="Georgia" pitchFamily="34" charset="-122"/>
                 <a:cs typeface="Georgia" pitchFamily="34" charset="-120"/>
               </a:rPr>
-              <a:t>TMDB 5000 Movie Dataset</a:t>
-            </a:r>
-            <a:endParaRPr lang="en-US" sz="2800" dirty="0"/>
+              <a:t>TMDB 5000 Movie Dataset  (via Kaggle)</a:t>
+            </a:r>
+            <a:endParaRPr lang="en-US" sz="3400" dirty="0"/>
           </a:p>
         </p:txBody>
       </p:sp>
@@ -5066,8 +4810,8 @@
         </p:nvSpPr>
         <p:spPr>
           <a:xfrm>
-            <a:off x="640080" y="1691640"/>
-            <a:ext cx="2606040" cy="1737360"/>
+            <a:off x="640080" y="1737360"/>
+            <a:ext cx="2606040" cy="2103120"/>
           </a:xfrm>
           <a:prstGeom prst="rect">
             <a:avLst/>
@@ -5091,8 +4835,8 @@
         </p:nvSpPr>
         <p:spPr>
           <a:xfrm>
-            <a:off x="640080" y="1874520"/>
-            <a:ext cx="2606040" cy="868680"/>
+            <a:off x="640080" y="2057400"/>
+            <a:ext cx="2606040" cy="914400"/>
           </a:xfrm>
           <a:prstGeom prst="rect">
             <a:avLst/>
@@ -5108,9 +4852,9 @@
               <a:buNone/>
             </a:pPr>
             <a:r>
-              <a:rPr lang="en-US" sz="3400" b="1" dirty="0">
-                <a:solidFill>
-                  <a:srgbClr val="E50914"/>
+              <a:rPr lang="en-US" sz="3800" b="1" dirty="0">
+                <a:solidFill>
+                  <a:srgbClr val="2E7D32"/>
                 </a:solidFill>
                 <a:latin typeface="Georgia" pitchFamily="34" charset="0"/>
                 <a:ea typeface="Georgia" pitchFamily="34" charset="-122"/>
@@ -5118,7 +4862,7 @@
               </a:rPr>
               <a:t>4,803</a:t>
             </a:r>
-            <a:endParaRPr lang="en-US" sz="3400" dirty="0"/>
+            <a:endParaRPr lang="en-US" sz="3800" dirty="0"/>
           </a:p>
         </p:txBody>
       </p:sp>
@@ -5130,8 +4874,8 @@
         </p:nvSpPr>
         <p:spPr>
           <a:xfrm>
-            <a:off x="731520" y="2743200"/>
-            <a:ext cx="2423160" cy="594360"/>
+            <a:off x="731520" y="3063240"/>
+            <a:ext cx="2423160" cy="548640"/>
           </a:xfrm>
           <a:prstGeom prst="rect">
             <a:avLst/>
@@ -5147,17 +4891,17 @@
               <a:buNone/>
             </a:pPr>
             <a:r>
-              <a:rPr lang="en-US" sz="1400" dirty="0">
-                <a:solidFill>
-                  <a:srgbClr val="5B6472"/>
-                </a:solidFill>
-                <a:latin typeface="Calibri" pitchFamily="34" charset="0"/>
-                <a:ea typeface="Calibri" pitchFamily="34" charset="-122"/>
-                <a:cs typeface="Calibri" pitchFamily="34" charset="-120"/>
-              </a:rPr>
-              <a:t>movies (raw)</a:t>
-            </a:r>
-            <a:endParaRPr lang="en-US" sz="1400" dirty="0"/>
+              <a:rPr lang="en-US" sz="1800" b="1" dirty="0">
+                <a:solidFill>
+                  <a:srgbClr val="1A1A2E"/>
+                </a:solidFill>
+                <a:latin typeface="Calibri" pitchFamily="34" charset="0"/>
+                <a:ea typeface="Calibri" pitchFamily="34" charset="-122"/>
+                <a:cs typeface="Calibri" pitchFamily="34" charset="-120"/>
+              </a:rPr>
+              <a:t>raw movies</a:t>
+            </a:r>
+            <a:endParaRPr lang="en-US" sz="1800" dirty="0"/>
           </a:p>
         </p:txBody>
       </p:sp>
@@ -5169,8 +4913,8 @@
         </p:nvSpPr>
         <p:spPr>
           <a:xfrm>
-            <a:off x="3429000" y="1691640"/>
-            <a:ext cx="2606040" cy="1737360"/>
+            <a:off x="3429000" y="1737360"/>
+            <a:ext cx="2606040" cy="2103120"/>
           </a:xfrm>
           <a:prstGeom prst="rect">
             <a:avLst/>
@@ -5194,8 +4938,8 @@
         </p:nvSpPr>
         <p:spPr>
           <a:xfrm>
-            <a:off x="3429000" y="1874520"/>
-            <a:ext cx="2606040" cy="868680"/>
+            <a:off x="3429000" y="2057400"/>
+            <a:ext cx="2606040" cy="914400"/>
           </a:xfrm>
           <a:prstGeom prst="rect">
             <a:avLst/>
@@ -5211,9 +4955,9 @@
               <a:buNone/>
             </a:pPr>
             <a:r>
-              <a:rPr lang="en-US" sz="3400" b="1" dirty="0">
-                <a:solidFill>
-                  <a:srgbClr val="E50914"/>
+              <a:rPr lang="en-US" sz="3800" b="1" dirty="0">
+                <a:solidFill>
+                  <a:srgbClr val="2E7D32"/>
                 </a:solidFill>
                 <a:latin typeface="Georgia" pitchFamily="34" charset="0"/>
                 <a:ea typeface="Georgia" pitchFamily="34" charset="-122"/>
@@ -5221,7 +4965,7 @@
               </a:rPr>
               <a:t>3,215</a:t>
             </a:r>
-            <a:endParaRPr lang="en-US" sz="3400" dirty="0"/>
+            <a:endParaRPr lang="en-US" sz="3800" dirty="0"/>
           </a:p>
         </p:txBody>
       </p:sp>
@@ -5233,8 +4977,8 @@
         </p:nvSpPr>
         <p:spPr>
           <a:xfrm>
-            <a:off x="3520440" y="2743200"/>
-            <a:ext cx="2423160" cy="594360"/>
+            <a:off x="3520440" y="3063240"/>
+            <a:ext cx="2423160" cy="548640"/>
           </a:xfrm>
           <a:prstGeom prst="rect">
             <a:avLst/>
@@ -5250,17 +4994,17 @@
               <a:buNone/>
             </a:pPr>
             <a:r>
-              <a:rPr lang="en-US" sz="1400" dirty="0">
-                <a:solidFill>
-                  <a:srgbClr val="5B6472"/>
-                </a:solidFill>
-                <a:latin typeface="Calibri" pitchFamily="34" charset="0"/>
-                <a:ea typeface="Calibri" pitchFamily="34" charset="-122"/>
-                <a:cs typeface="Calibri" pitchFamily="34" charset="-120"/>
-              </a:rPr>
-              <a:t>usable after cleaning</a:t>
-            </a:r>
-            <a:endParaRPr lang="en-US" sz="1400" dirty="0"/>
+              <a:rPr lang="en-US" sz="1800" b="1" dirty="0">
+                <a:solidFill>
+                  <a:srgbClr val="1A1A2E"/>
+                </a:solidFill>
+                <a:latin typeface="Calibri" pitchFamily="34" charset="0"/>
+                <a:ea typeface="Calibri" pitchFamily="34" charset="-122"/>
+                <a:cs typeface="Calibri" pitchFamily="34" charset="-120"/>
+              </a:rPr>
+              <a:t>after cleaning</a:t>
+            </a:r>
+            <a:endParaRPr lang="en-US" sz="1800" dirty="0"/>
           </a:p>
         </p:txBody>
       </p:sp>
@@ -5272,8 +5016,8 @@
         </p:nvSpPr>
         <p:spPr>
           <a:xfrm>
-            <a:off x="6217920" y="1691640"/>
-            <a:ext cx="2606040" cy="1737360"/>
+            <a:off x="6217920" y="1737360"/>
+            <a:ext cx="2606040" cy="2103120"/>
           </a:xfrm>
           <a:prstGeom prst="rect">
             <a:avLst/>
@@ -5297,8 +5041,8 @@
         </p:nvSpPr>
         <p:spPr>
           <a:xfrm>
-            <a:off x="6217920" y="1874520"/>
-            <a:ext cx="2606040" cy="868680"/>
+            <a:off x="6217920" y="2057400"/>
+            <a:ext cx="2606040" cy="914400"/>
           </a:xfrm>
           <a:prstGeom prst="rect">
             <a:avLst/>
@@ -5314,17 +5058,17 @@
               <a:buNone/>
             </a:pPr>
             <a:r>
-              <a:rPr lang="en-US" sz="3400" b="1" dirty="0">
-                <a:solidFill>
-                  <a:srgbClr val="E50914"/>
+              <a:rPr lang="en-US" sz="3800" b="1" dirty="0">
+                <a:solidFill>
+                  <a:srgbClr val="2E7D32"/>
                 </a:solidFill>
                 <a:latin typeface="Georgia" pitchFamily="34" charset="0"/>
                 <a:ea typeface="Georgia" pitchFamily="34" charset="-122"/>
                 <a:cs typeface="Georgia" pitchFamily="34" charset="-120"/>
               </a:rPr>
-              <a:t>20</a:t>
-            </a:r>
-            <a:endParaRPr lang="en-US" sz="3400" dirty="0"/>
+              <a:t>16</a:t>
+            </a:r>
+            <a:endParaRPr lang="en-US" sz="3800" dirty="0"/>
           </a:p>
         </p:txBody>
       </p:sp>
@@ -5336,8 +5080,8 @@
         </p:nvSpPr>
         <p:spPr>
           <a:xfrm>
-            <a:off x="6309360" y="2743200"/>
-            <a:ext cx="2423160" cy="594360"/>
+            <a:off x="6309360" y="3063240"/>
+            <a:ext cx="2423160" cy="548640"/>
           </a:xfrm>
           <a:prstGeom prst="rect">
             <a:avLst/>
@@ -5353,17 +5097,17 @@
               <a:buNone/>
             </a:pPr>
             <a:r>
-              <a:rPr lang="en-US" sz="1400" dirty="0">
-                <a:solidFill>
-                  <a:srgbClr val="5B6472"/>
-                </a:solidFill>
-                <a:latin typeface="Calibri" pitchFamily="34" charset="0"/>
-                <a:ea typeface="Calibri" pitchFamily="34" charset="-122"/>
-                <a:cs typeface="Calibri" pitchFamily="34" charset="-120"/>
-              </a:rPr>
-              <a:t>original columns</a:t>
-            </a:r>
-            <a:endParaRPr lang="en-US" sz="1400" dirty="0"/>
+              <a:rPr lang="en-US" sz="1800" b="1" dirty="0">
+                <a:solidFill>
+                  <a:srgbClr val="1A1A2E"/>
+                </a:solidFill>
+                <a:latin typeface="Calibri" pitchFamily="34" charset="0"/>
+                <a:ea typeface="Calibri" pitchFamily="34" charset="-122"/>
+                <a:cs typeface="Calibri" pitchFamily="34" charset="-120"/>
+              </a:rPr>
+              <a:t>model features</a:t>
+            </a:r>
+            <a:endParaRPr lang="en-US" sz="1800" dirty="0"/>
           </a:p>
         </p:txBody>
       </p:sp>
@@ -5375,8 +5119,8 @@
         </p:nvSpPr>
         <p:spPr>
           <a:xfrm>
-            <a:off x="9006840" y="1691640"/>
-            <a:ext cx="2606040" cy="1737360"/>
+            <a:off x="9006840" y="1737360"/>
+            <a:ext cx="2606040" cy="2103120"/>
           </a:xfrm>
           <a:prstGeom prst="rect">
             <a:avLst/>
@@ -5400,8 +5144,8 @@
         </p:nvSpPr>
         <p:spPr>
           <a:xfrm>
-            <a:off x="9006840" y="1874520"/>
-            <a:ext cx="2606040" cy="868680"/>
+            <a:off x="9006840" y="2057400"/>
+            <a:ext cx="2606040" cy="914400"/>
           </a:xfrm>
           <a:prstGeom prst="rect">
             <a:avLst/>
@@ -5417,9 +5161,9 @@
               <a:buNone/>
             </a:pPr>
             <a:r>
-              <a:rPr lang="en-US" sz="3400" b="1" dirty="0">
-                <a:solidFill>
-                  <a:srgbClr val="E50914"/>
+              <a:rPr lang="en-US" sz="3800" b="1" dirty="0">
+                <a:solidFill>
+                  <a:srgbClr val="2E7D32"/>
                 </a:solidFill>
                 <a:latin typeface="Georgia" pitchFamily="34" charset="0"/>
                 <a:ea typeface="Georgia" pitchFamily="34" charset="-122"/>
@@ -5427,7 +5171,7 @@
               </a:rPr>
               <a:t>1916–2016</a:t>
             </a:r>
-            <a:endParaRPr lang="en-US" sz="3400" dirty="0"/>
+            <a:endParaRPr lang="en-US" sz="3800" dirty="0"/>
           </a:p>
         </p:txBody>
       </p:sp>
@@ -5439,8 +5183,8 @@
         </p:nvSpPr>
         <p:spPr>
           <a:xfrm>
-            <a:off x="9098280" y="2743200"/>
-            <a:ext cx="2423160" cy="594360"/>
+            <a:off x="9098280" y="3063240"/>
+            <a:ext cx="2423160" cy="548640"/>
           </a:xfrm>
           <a:prstGeom prst="rect">
             <a:avLst/>
@@ -5456,9 +5200,9 @@
               <a:buNone/>
             </a:pPr>
             <a:r>
-              <a:rPr lang="en-US" sz="1400" dirty="0">
-                <a:solidFill>
-                  <a:srgbClr val="5B6472"/>
+              <a:rPr lang="en-US" sz="1800" b="1" dirty="0">
+                <a:solidFill>
+                  <a:srgbClr val="1A1A2E"/>
                 </a:solidFill>
                 <a:latin typeface="Calibri" pitchFamily="34" charset="0"/>
                 <a:ea typeface="Calibri" pitchFamily="34" charset="-122"/>
@@ -5466,7 +5210,7 @@
               </a:rPr>
               <a:t>release years</a:t>
             </a:r>
-            <a:endParaRPr lang="en-US" sz="1400" dirty="0"/>
+            <a:endParaRPr lang="en-US" sz="1800" dirty="0"/>
           </a:p>
         </p:txBody>
       </p:sp>
@@ -5478,8 +5222,8 @@
         </p:nvSpPr>
         <p:spPr>
           <a:xfrm>
-            <a:off x="640080" y="3840480"/>
-            <a:ext cx="10881360" cy="2194560"/>
+            <a:off x="731520" y="4297680"/>
+            <a:ext cx="10789920" cy="2194560"/>
           </a:xfrm>
           <a:prstGeom prst="rect">
             <a:avLst/>
@@ -5491,15 +5235,28 @@
           <a:bodyPr wrap="square" rtlCol="0" anchor="t"/>
           <a:lstStyle/>
           <a:p>
-            <a:pPr marL="342900" indent="-342900">
+            <a:pPr indent="0" marL="0">
+              <a:buNone/>
+            </a:pPr>
+            <a:r>
+              <a:rPr lang="en-US" sz="2300" b="1" dirty="0">
+                <a:solidFill>
+                  <a:srgbClr val="E50914"/>
+                </a:solidFill>
+                <a:latin typeface="Calibri" pitchFamily="34" charset="0"/>
+                <a:ea typeface="Calibri" pitchFamily="34" charset="-122"/>
+                <a:cs typeface="Calibri" pitchFamily="34" charset="-120"/>
+              </a:rPr>
+              <a:t>1.  </a:t>
+            </a:r>
+            <a:pPr indent="0" marL="0">
               <a:spcAft>
-                <a:spcPts val="1000"/>
+                <a:spcPts val="1600"/>
               </a:spcAft>
-              <a:buSzPct val="100000"/>
-              <a:buChar char="•"/>
-            </a:pPr>
-            <a:r>
-              <a:rPr lang="en-US" sz="1500" dirty="0">
+              <a:buNone/>
+            </a:pPr>
+            <a:r>
+              <a:rPr lang="en-US" sz="2300" dirty="0">
                 <a:solidFill>
                   <a:srgbClr val="33373F"/>
                 </a:solidFill>
@@ -5507,20 +5264,33 @@
                 <a:ea typeface="Calibri" pitchFamily="34" charset="-122"/>
                 <a:cs typeface="Calibri" pitchFamily="34" charset="-120"/>
               </a:rPr>
-              <a:t>Each row is one movie: budget, revenue, genres, runtime, release date, language, studios.</a:t>
-            </a:r>
-            <a:endParaRPr lang="en-US" sz="1500" dirty="0"/>
-          </a:p>
-          <a:p>
-            <a:pPr marL="342900" indent="-342900">
+              <a:t>One row = one movie (budget, revenue, genres, runtime, date, studio)</a:t>
+            </a:r>
+            <a:endParaRPr lang="en-US" sz="2300" dirty="0"/>
+          </a:p>
+          <a:p>
+            <a:pPr indent="0" marL="0">
+              <a:buNone/>
+            </a:pPr>
+            <a:r>
+              <a:rPr lang="en-US" sz="2300" b="1" dirty="0">
+                <a:solidFill>
+                  <a:srgbClr val="E50914"/>
+                </a:solidFill>
+                <a:latin typeface="Calibri" pitchFamily="34" charset="0"/>
+                <a:ea typeface="Calibri" pitchFamily="34" charset="-122"/>
+                <a:cs typeface="Calibri" pitchFamily="34" charset="-120"/>
+              </a:rPr>
+              <a:t>2.  </a:t>
+            </a:r>
+            <a:pPr indent="0" marL="0">
               <a:spcAft>
-                <a:spcPts val="1000"/>
+                <a:spcPts val="1600"/>
               </a:spcAft>
-              <a:buSzPct val="100000"/>
-              <a:buChar char="•"/>
-            </a:pPr>
-            <a:r>
-              <a:rPr lang="en-US" sz="1500" dirty="0">
+              <a:buNone/>
+            </a:pPr>
+            <a:r>
+              <a:rPr lang="en-US" sz="2300" dirty="0">
                 <a:solidFill>
                   <a:srgbClr val="33373F"/>
                 </a:solidFill>
@@ -5528,20 +5298,33 @@
                 <a:ea typeface="Calibri" pitchFamily="34" charset="-122"/>
                 <a:cs typeface="Calibri" pitchFamily="34" charset="-120"/>
               </a:rPr>
-              <a:t>Cleaning: released films only; plausible budget (≥ $1,000 — 13 films had impossible $1–$250 budgets) and real revenue; parse JSON fields.</a:t>
-            </a:r>
-            <a:endParaRPr lang="en-US" sz="1500" dirty="0"/>
-          </a:p>
-          <a:p>
-            <a:pPr marL="342900" indent="-342900">
+              <a:t>Dropped unknown financials + 13 impossible budgets ($1–$250)</a:t>
+            </a:r>
+            <a:endParaRPr lang="en-US" sz="2300" dirty="0"/>
+          </a:p>
+          <a:p>
+            <a:pPr indent="0" marL="0">
+              <a:buNone/>
+            </a:pPr>
+            <a:r>
+              <a:rPr lang="en-US" sz="2300" b="1" dirty="0">
+                <a:solidFill>
+                  <a:srgbClr val="E50914"/>
+                </a:solidFill>
+                <a:latin typeface="Calibri" pitchFamily="34" charset="0"/>
+                <a:ea typeface="Calibri" pitchFamily="34" charset="-122"/>
+                <a:cs typeface="Calibri" pitchFamily="34" charset="-120"/>
+              </a:rPr>
+              <a:t>3.  </a:t>
+            </a:r>
+            <a:pPr indent="0" marL="0">
               <a:spcAft>
-                <a:spcPts val="1000"/>
+                <a:spcPts val="1600"/>
               </a:spcAft>
-              <a:buSzPct val="100000"/>
-              <a:buChar char="•"/>
-            </a:pPr>
-            <a:r>
-              <a:rPr lang="en-US" sz="1500" dirty="0">
+              <a:buNone/>
+            </a:pPr>
+            <a:r>
+              <a:rPr lang="en-US" sz="2300" dirty="0">
                 <a:solidFill>
                   <a:srgbClr val="33373F"/>
                 </a:solidFill>
@@ -5549,48 +5332,9 @@
                 <a:ea typeface="Calibri" pitchFamily="34" charset="-122"/>
                 <a:cs typeface="Calibri" pitchFamily="34" charset="-120"/>
               </a:rPr>
-              <a:t>Engineered features: ROI, season, release window, genre-timing flags, sequel/franchise flag, major-studio flag.</a:t>
-            </a:r>
-            <a:endParaRPr lang="en-US" sz="1500" dirty="0"/>
-          </a:p>
-        </p:txBody>
-      </p:sp>
-      <p:sp>
-        <p:nvSpPr>
-          <p:cNvPr id="17" name="Text 15"/>
-          <p:cNvSpPr/>
-          <p:nvPr/>
-        </p:nvSpPr>
-        <p:spPr>
-          <a:xfrm>
-            <a:off x="640080" y="6263640"/>
-            <a:ext cx="10058400" cy="274320"/>
-          </a:xfrm>
-          <a:prstGeom prst="rect">
-            <a:avLst/>
-          </a:prstGeom>
-          <a:noFill/>
-          <a:ln/>
-        </p:spPr>
-        <p:txBody>
-          <a:bodyPr wrap="square" lIns="0" tIns="0" rIns="0" bIns="0" rtlCol="0" anchor="ctr"/>
-          <a:lstStyle/>
-          <a:p>
-            <a:pPr indent="0" marL="0">
-              <a:buNone/>
-            </a:pPr>
-            <a:r>
-              <a:rPr lang="en-US" sz="1100" i="1" dirty="0">
-                <a:solidFill>
-                  <a:srgbClr val="5B6472"/>
-                </a:solidFill>
-                <a:latin typeface="Calibri" pitchFamily="34" charset="0"/>
-                <a:ea typeface="Calibri" pitchFamily="34" charset="-122"/>
-                <a:cs typeface="Calibri" pitchFamily="34" charset="-120"/>
-              </a:rPr>
-              <a:t>Source: The Movie Database (TMDb), via Kaggle.</a:t>
-            </a:r>
-            <a:endParaRPr lang="en-US" sz="1100" dirty="0"/>
+              <a:t>Engineered: season · release window · sequel flag · studio flag</a:t>
+            </a:r>
+            <a:endParaRPr lang="en-US" sz="2300" dirty="0"/>
           </a:p>
         </p:txBody>
       </p:sp>
@@ -5634,8 +5378,8 @@
         </p:nvSpPr>
         <p:spPr>
           <a:xfrm>
-            <a:off x="566928" y="310896"/>
-            <a:ext cx="10972800" cy="274320"/>
+            <a:off x="566928" y="274320"/>
+            <a:ext cx="10972800" cy="320040"/>
           </a:xfrm>
           <a:prstGeom prst="rect">
             <a:avLst/>
@@ -5651,7 +5395,7 @@
               <a:buNone/>
             </a:pPr>
             <a:r>
-              <a:rPr lang="en-US" sz="1200" b="1" spc="300" kern="0" dirty="0">
+              <a:rPr lang="en-US" sz="1400" b="1" spc="300" kern="0" dirty="0">
                 <a:solidFill>
                   <a:srgbClr val="E50914"/>
                 </a:solidFill>
@@ -5659,54 +5403,15 @@
                 <a:ea typeface="Calibri" pitchFamily="34" charset="-122"/>
                 <a:cs typeface="Calibri" pitchFamily="34" charset="-120"/>
               </a:rPr>
-              <a:t>EDA HIGHLIGHTS</a:t>
-            </a:r>
-            <a:endParaRPr lang="en-US" sz="1200" dirty="0"/>
-          </a:p>
-        </p:txBody>
-      </p:sp>
-      <p:sp>
-        <p:nvSpPr>
-          <p:cNvPr id="3" name="Text 1"/>
-          <p:cNvSpPr/>
-          <p:nvPr/>
-        </p:nvSpPr>
-        <p:spPr>
-          <a:xfrm>
-            <a:off x="548640" y="603504"/>
-            <a:ext cx="11064240" cy="685800"/>
-          </a:xfrm>
-          <a:prstGeom prst="rect">
-            <a:avLst/>
-          </a:prstGeom>
-          <a:noFill/>
-          <a:ln/>
-        </p:spPr>
-        <p:txBody>
-          <a:bodyPr wrap="square" lIns="0" tIns="0" rIns="0" bIns="0" rtlCol="0" anchor="ctr"/>
-          <a:lstStyle/>
-          <a:p>
-            <a:pPr indent="0" marL="0">
-              <a:buNone/>
-            </a:pPr>
-            <a:r>
-              <a:rPr lang="en-US" sz="2800" b="1" dirty="0">
-                <a:solidFill>
-                  <a:srgbClr val="1A1A2E"/>
-                </a:solidFill>
-                <a:latin typeface="Georgia" pitchFamily="34" charset="0"/>
-                <a:ea typeface="Georgia" pitchFamily="34" charset="-122"/>
-                <a:cs typeface="Georgia" pitchFamily="34" charset="-120"/>
-              </a:rPr>
-              <a:t>Budget vs. revenue — the break-even line</a:t>
-            </a:r>
-            <a:endParaRPr lang="en-US" sz="2800" dirty="0"/>
+              <a:t>EDA</a:t>
+            </a:r>
+            <a:endParaRPr lang="en-US" sz="1400" dirty="0"/>
           </a:p>
         </p:txBody>
       </p:sp>
       <p:pic>
         <p:nvPicPr>
-          <p:cNvPr id="4" name="Image 0" descr="/sessions/optimistic-determined-edison/mnt/outputs/UMBC-DATA606-Capstone/docs/figures/budget_vs_revenue.png">    </p:cNvPr>
+          <p:cNvPr id="3" name="Image 0" descr="/sessions/optimistic-determined-edison/mnt/outputs/pres_figures/budget_vs_revenue.png">    </p:cNvPr>
           <p:cNvPicPr>
             <a:picLocks noChangeAspect="1"/>
           </p:cNvPicPr>
@@ -5719,99 +5424,14 @@
         </p:blipFill>
         <p:spPr>
           <a:xfrm>
-            <a:off x="640080" y="1554480"/>
-            <a:ext cx="6949440" cy="4480560"/>
+            <a:off x="411480" y="685800"/>
+            <a:ext cx="11384280" cy="5943600"/>
           </a:xfrm>
           <a:prstGeom prst="rect">
             <a:avLst/>
           </a:prstGeom>
         </p:spPr>
       </p:pic>
-      <p:sp>
-        <p:nvSpPr>
-          <p:cNvPr id="5" name="Text 2"/>
-          <p:cNvSpPr/>
-          <p:nvPr/>
-        </p:nvSpPr>
-        <p:spPr>
-          <a:xfrm>
-            <a:off x="7863840" y="2011680"/>
-            <a:ext cx="3749040" cy="3291840"/>
-          </a:xfrm>
-          <a:prstGeom prst="rect">
-            <a:avLst/>
-          </a:prstGeom>
-          <a:noFill/>
-          <a:ln/>
-        </p:spPr>
-        <p:txBody>
-          <a:bodyPr wrap="square" rtlCol="0" anchor="t"/>
-          <a:lstStyle/>
-          <a:p>
-            <a:pPr marL="342900" indent="-342900">
-              <a:spcAft>
-                <a:spcPts val="1000"/>
-              </a:spcAft>
-              <a:buSzPct val="100000"/>
-              <a:buChar char="•"/>
-            </a:pPr>
-            <a:r>
-              <a:rPr lang="en-US" sz="1500" dirty="0">
-                <a:solidFill>
-                  <a:srgbClr val="33373F"/>
-                </a:solidFill>
-                <a:latin typeface="Calibri" pitchFamily="34" charset="0"/>
-                <a:ea typeface="Calibri" pitchFamily="34" charset="-122"/>
-                <a:cs typeface="Calibri" pitchFamily="34" charset="-120"/>
-              </a:rPr>
-              <a:t>Dashed line = break-even (revenue = 2× budget). Green cleared it; red didn't.</a:t>
-            </a:r>
-            <a:endParaRPr lang="en-US" sz="1500" dirty="0"/>
-          </a:p>
-          <a:p>
-            <a:pPr marL="342900" indent="-342900">
-              <a:spcAft>
-                <a:spcPts val="1000"/>
-              </a:spcAft>
-              <a:buSzPct val="100000"/>
-              <a:buChar char="•"/>
-            </a:pPr>
-            <a:r>
-              <a:rPr lang="en-US" sz="1500" dirty="0">
-                <a:solidFill>
-                  <a:srgbClr val="33373F"/>
-                </a:solidFill>
-                <a:latin typeface="Calibri" pitchFamily="34" charset="0"/>
-                <a:ea typeface="Calibri" pitchFamily="34" charset="-122"/>
-                <a:cs typeface="Calibri" pitchFamily="34" charset="-120"/>
-              </a:rPr>
-              <a:t>Bigger budgets earn more in absolute terms — but plenty of expensive films still miss.</a:t>
-            </a:r>
-            <a:endParaRPr lang="en-US" sz="1500" dirty="0"/>
-          </a:p>
-          <a:p>
-            <a:pPr marL="342900" indent="-342900">
-              <a:spcAft>
-                <a:spcPts val="1000"/>
-              </a:spcAft>
-              <a:buSzPct val="100000"/>
-              <a:buChar char="•"/>
-            </a:pPr>
-            <a:r>
-              <a:rPr lang="en-US" sz="1500" b="1" dirty="0">
-                <a:solidFill>
-                  <a:srgbClr val="1A1A2E"/>
-                </a:solidFill>
-                <a:latin typeface="Calibri" pitchFamily="34" charset="0"/>
-                <a:ea typeface="Calibri" pitchFamily="34" charset="-122"/>
-                <a:cs typeface="Calibri" pitchFamily="34" charset="-120"/>
-              </a:rPr>
-              <a:t>Budget matters, but it isn't destiny — which is why this is worth modeling.</a:t>
-            </a:r>
-            <a:endParaRPr lang="en-US" sz="1500" dirty="0"/>
-          </a:p>
-        </p:txBody>
-      </p:sp>
     </p:spTree>
   </p:cSld>
   <p:clrMapOvr>
@@ -5852,8 +5472,8 @@
         </p:nvSpPr>
         <p:spPr>
           <a:xfrm>
-            <a:off x="566928" y="310896"/>
-            <a:ext cx="10972800" cy="274320"/>
+            <a:off x="566928" y="274320"/>
+            <a:ext cx="10972800" cy="320040"/>
           </a:xfrm>
           <a:prstGeom prst="rect">
             <a:avLst/>
@@ -5869,7 +5489,7 @@
               <a:buNone/>
             </a:pPr>
             <a:r>
-              <a:rPr lang="en-US" sz="1200" b="1" spc="300" kern="0" dirty="0">
+              <a:rPr lang="en-US" sz="1400" b="1" spc="300" kern="0" dirty="0">
                 <a:solidFill>
                   <a:srgbClr val="E50914"/>
                 </a:solidFill>
@@ -5877,54 +5497,15 @@
                 <a:ea typeface="Calibri" pitchFamily="34" charset="-122"/>
                 <a:cs typeface="Calibri" pitchFamily="34" charset="-120"/>
               </a:rPr>
-              <a:t>EDA HIGHLIGHTS</a:t>
-            </a:r>
-            <a:endParaRPr lang="en-US" sz="1200" dirty="0"/>
-          </a:p>
-        </p:txBody>
-      </p:sp>
-      <p:sp>
-        <p:nvSpPr>
-          <p:cNvPr id="3" name="Text 1"/>
-          <p:cNvSpPr/>
-          <p:nvPr/>
-        </p:nvSpPr>
-        <p:spPr>
-          <a:xfrm>
-            <a:off x="548640" y="603504"/>
-            <a:ext cx="11064240" cy="685800"/>
-          </a:xfrm>
-          <a:prstGeom prst="rect">
-            <a:avLst/>
-          </a:prstGeom>
-          <a:noFill/>
-          <a:ln/>
-        </p:spPr>
-        <p:txBody>
-          <a:bodyPr wrap="square" lIns="0" tIns="0" rIns="0" bIns="0" rtlCol="0" anchor="ctr"/>
-          <a:lstStyle/>
-          <a:p>
-            <a:pPr indent="0" marL="0">
-              <a:buNone/>
-            </a:pPr>
-            <a:r>
-              <a:rPr lang="en-US" sz="2800" b="1" dirty="0">
-                <a:solidFill>
-                  <a:srgbClr val="1A1A2E"/>
-                </a:solidFill>
-                <a:latin typeface="Georgia" pitchFamily="34" charset="0"/>
-                <a:ea typeface="Georgia" pitchFamily="34" charset="-122"/>
-                <a:cs typeface="Georgia" pitchFamily="34" charset="-120"/>
-              </a:rPr>
-              <a:t>When a film opens matters</a:t>
-            </a:r>
-            <a:endParaRPr lang="en-US" sz="2800" dirty="0"/>
+              <a:t>EDA — RELEASE TIMING</a:t>
+            </a:r>
+            <a:endParaRPr lang="en-US" sz="1400" dirty="0"/>
           </a:p>
         </p:txBody>
       </p:sp>
       <p:pic>
         <p:nvPicPr>
-          <p:cNvPr id="4" name="Image 0" descr="/sessions/optimistic-determined-edison/mnt/outputs/UMBC-DATA606-Capstone/docs/figures/month_success_volume.png">    </p:cNvPr>
+          <p:cNvPr id="3" name="Image 0" descr="/sessions/optimistic-determined-edison/mnt/outputs/pres_figures/month_success_volume.png">    </p:cNvPr>
           <p:cNvPicPr>
             <a:picLocks noChangeAspect="1"/>
           </p:cNvPicPr>
@@ -5937,99 +5518,14 @@
         </p:blipFill>
         <p:spPr>
           <a:xfrm>
-            <a:off x="640080" y="1554480"/>
-            <a:ext cx="7132320" cy="4480560"/>
+            <a:off x="411480" y="685800"/>
+            <a:ext cx="11384280" cy="5943600"/>
           </a:xfrm>
           <a:prstGeom prst="rect">
             <a:avLst/>
           </a:prstGeom>
         </p:spPr>
       </p:pic>
-      <p:sp>
-        <p:nvSpPr>
-          <p:cNvPr id="5" name="Text 2"/>
-          <p:cNvSpPr/>
-          <p:nvPr/>
-        </p:nvSpPr>
-        <p:spPr>
-          <a:xfrm>
-            <a:off x="7955280" y="2011680"/>
-            <a:ext cx="3657600" cy="3474720"/>
-          </a:xfrm>
-          <a:prstGeom prst="rect">
-            <a:avLst/>
-          </a:prstGeom>
-          <a:noFill/>
-          <a:ln/>
-        </p:spPr>
-        <p:txBody>
-          <a:bodyPr wrap="square" rtlCol="0" anchor="t"/>
-          <a:lstStyle/>
-          <a:p>
-            <a:pPr marL="342900" indent="-342900">
-              <a:spcAft>
-                <a:spcPts val="1000"/>
-              </a:spcAft>
-              <a:buSzPct val="100000"/>
-              <a:buChar char="•"/>
-            </a:pPr>
-            <a:r>
-              <a:rPr lang="en-US" sz="1500" dirty="0">
-                <a:solidFill>
-                  <a:srgbClr val="33373F"/>
-                </a:solidFill>
-                <a:latin typeface="Calibri" pitchFamily="34" charset="0"/>
-                <a:ea typeface="Calibri" pitchFamily="34" charset="-122"/>
-                <a:cs typeface="Calibri" pitchFamily="34" charset="-120"/>
-              </a:rPr>
-              <a:t>Success peaks in June (~67%); September is worst (~43%) — and one of the busiest: the “dump month.”</a:t>
-            </a:r>
-            <a:endParaRPr lang="en-US" sz="1500" dirty="0"/>
-          </a:p>
-          <a:p>
-            <a:pPr marL="342900" indent="-342900">
-              <a:spcAft>
-                <a:spcPts val="1000"/>
-              </a:spcAft>
-              <a:buSzPct val="100000"/>
-              <a:buChar char="•"/>
-            </a:pPr>
-            <a:r>
-              <a:rPr lang="en-US" sz="1500" dirty="0">
-                <a:solidFill>
-                  <a:srgbClr val="33373F"/>
-                </a:solidFill>
-                <a:latin typeface="Calibri" pitchFamily="34" charset="0"/>
-                <a:ea typeface="Calibri" pitchFamily="34" charset="-122"/>
-                <a:cs typeface="Calibri" pitchFamily="34" charset="-120"/>
-              </a:rPr>
-              <a:t>By industry window: Summer and Holiday ~61% vs. 56% baseline; early Fall just 47%.</a:t>
-            </a:r>
-            <a:endParaRPr lang="en-US" sz="1500" dirty="0"/>
-          </a:p>
-          <a:p>
-            <a:pPr marL="342900" indent="-342900">
-              <a:spcAft>
-                <a:spcPts val="1000"/>
-              </a:spcAft>
-              <a:buSzPct val="100000"/>
-              <a:buChar char="•"/>
-            </a:pPr>
-            <a:r>
-              <a:rPr lang="en-US" sz="1500" dirty="0">
-                <a:solidFill>
-                  <a:srgbClr val="33373F"/>
-                </a:solidFill>
-                <a:latin typeface="Calibri" pitchFamily="34" charset="0"/>
-                <a:ea typeface="Calibri" pitchFamily="34" charset="-122"/>
-                <a:cs typeface="Calibri" pitchFamily="34" charset="-120"/>
-              </a:rPr>
-              <a:t>Genre matters too: horror leads (~78%), action is lowest (~50%).</a:t>
-            </a:r>
-            <a:endParaRPr lang="en-US" sz="1500" dirty="0"/>
-          </a:p>
-        </p:txBody>
-      </p:sp>
     </p:spTree>
   </p:cSld>
   <p:clrMapOvr>
@@ -6070,8 +5566,8 @@
         </p:nvSpPr>
         <p:spPr>
           <a:xfrm>
-            <a:off x="566928" y="310896"/>
-            <a:ext cx="10972800" cy="274320"/>
+            <a:off x="566928" y="274320"/>
+            <a:ext cx="10972800" cy="320040"/>
           </a:xfrm>
           <a:prstGeom prst="rect">
             <a:avLst/>
@@ -6087,7 +5583,7 @@
               <a:buNone/>
             </a:pPr>
             <a:r>
-              <a:rPr lang="en-US" sz="1200" b="1" spc="300" kern="0" dirty="0">
+              <a:rPr lang="en-US" sz="1400" b="1" spc="300" kern="0" dirty="0">
                 <a:solidFill>
                   <a:srgbClr val="E50914"/>
                 </a:solidFill>
@@ -6095,54 +5591,15 @@
                 <a:ea typeface="Calibri" pitchFamily="34" charset="-122"/>
                 <a:cs typeface="Calibri" pitchFamily="34" charset="-120"/>
               </a:rPr>
-              <a:t>EDA HIGHLIGHTS</a:t>
-            </a:r>
-            <a:endParaRPr lang="en-US" sz="1200" dirty="0"/>
-          </a:p>
-        </p:txBody>
-      </p:sp>
-      <p:sp>
-        <p:nvSpPr>
-          <p:cNvPr id="3" name="Text 1"/>
-          <p:cNvSpPr/>
-          <p:nvPr/>
-        </p:nvSpPr>
-        <p:spPr>
-          <a:xfrm>
-            <a:off x="548640" y="603504"/>
-            <a:ext cx="11064240" cy="685800"/>
-          </a:xfrm>
-          <a:prstGeom prst="rect">
-            <a:avLst/>
-          </a:prstGeom>
-          <a:noFill/>
-          <a:ln/>
-        </p:spPr>
-        <p:txBody>
-          <a:bodyPr wrap="square" lIns="0" tIns="0" rIns="0" bIns="0" rtlCol="0" anchor="ctr"/>
-          <a:lstStyle/>
-          <a:p>
-            <a:pPr indent="0" marL="0">
-              <a:buNone/>
-            </a:pPr>
-            <a:r>
-              <a:rPr lang="en-US" sz="2800" b="1" dirty="0">
-                <a:solidFill>
-                  <a:srgbClr val="1A1A2E"/>
-                </a:solidFill>
-                <a:latin typeface="Georgia" pitchFamily="34" charset="0"/>
-                <a:ea typeface="Georgia" pitchFamily="34" charset="-122"/>
-                <a:cs typeface="Georgia" pitchFamily="34" charset="-120"/>
-              </a:rPr>
-              <a:t>The right genre in the right window</a:t>
-            </a:r>
-            <a:endParaRPr lang="en-US" sz="2800" dirty="0"/>
+              <a:t>EDA — GENRE × TIMING</a:t>
+            </a:r>
+            <a:endParaRPr lang="en-US" sz="1400" dirty="0"/>
           </a:p>
         </p:txBody>
       </p:sp>
       <p:pic>
         <p:nvPicPr>
-          <p:cNvPr id="4" name="Image 0" descr="/sessions/optimistic-determined-edison/mnt/outputs/UMBC-DATA606-Capstone/docs/figures/genre_timing_comparison.png">    </p:cNvPr>
+          <p:cNvPr id="3" name="Image 0" descr="/sessions/optimistic-determined-edison/mnt/outputs/pres_figures/genre_timing_comparison.png">    </p:cNvPr>
           <p:cNvPicPr>
             <a:picLocks noChangeAspect="1"/>
           </p:cNvPicPr>
@@ -6155,120 +5612,14 @@
         </p:blipFill>
         <p:spPr>
           <a:xfrm>
-            <a:off x="640080" y="1554480"/>
-            <a:ext cx="7132320" cy="4480560"/>
+            <a:off x="411480" y="685800"/>
+            <a:ext cx="11384280" cy="5943600"/>
           </a:xfrm>
           <a:prstGeom prst="rect">
             <a:avLst/>
           </a:prstGeom>
         </p:spPr>
       </p:pic>
-      <p:sp>
-        <p:nvSpPr>
-          <p:cNvPr id="5" name="Text 2"/>
-          <p:cNvSpPr/>
-          <p:nvPr/>
-        </p:nvSpPr>
-        <p:spPr>
-          <a:xfrm>
-            <a:off x="7955280" y="1828800"/>
-            <a:ext cx="3657600" cy="3657600"/>
-          </a:xfrm>
-          <a:prstGeom prst="rect">
-            <a:avLst/>
-          </a:prstGeom>
-          <a:noFill/>
-          <a:ln/>
-        </p:spPr>
-        <p:txBody>
-          <a:bodyPr wrap="square" rtlCol="0" anchor="t"/>
-          <a:lstStyle/>
-          <a:p>
-            <a:pPr marL="342900" indent="-342900">
-              <a:spcAft>
-                <a:spcPts val="1000"/>
-              </a:spcAft>
-              <a:buSzPct val="100000"/>
-              <a:buChar char="•"/>
-            </a:pPr>
-            <a:r>
-              <a:rPr lang="en-US" sz="1500" dirty="0">
-                <a:solidFill>
-                  <a:srgbClr val="33373F"/>
-                </a:solidFill>
-                <a:latin typeface="Calibri" pitchFamily="34" charset="0"/>
-                <a:ea typeface="Calibri" pitchFamily="34" charset="-122"/>
-                <a:cs typeface="Calibri" pitchFamily="34" charset="-120"/>
-              </a:rPr>
-              <a:t>Action/Adventure in summer: 64% vs 50% the rest of the year (+14 pts).</a:t>
-            </a:r>
-            <a:endParaRPr lang="en-US" sz="1500" dirty="0"/>
-          </a:p>
-          <a:p>
-            <a:pPr marL="342900" indent="-342900">
-              <a:spcAft>
-                <a:spcPts val="1000"/>
-              </a:spcAft>
-              <a:buSzPct val="100000"/>
-              <a:buChar char="•"/>
-            </a:pPr>
-            <a:r>
-              <a:rPr lang="en-US" sz="1500" dirty="0">
-                <a:solidFill>
-                  <a:srgbClr val="33373F"/>
-                </a:solidFill>
-                <a:latin typeface="Calibri" pitchFamily="34" charset="0"/>
-                <a:ea typeface="Calibri" pitchFamily="34" charset="-122"/>
-                <a:cs typeface="Calibri" pitchFamily="34" charset="-120"/>
-              </a:rPr>
-              <a:t>Family/Animation over the holidays: 68% vs 58% (+10 pts).</a:t>
-            </a:r>
-            <a:endParaRPr lang="en-US" sz="1500" dirty="0"/>
-          </a:p>
-          <a:p>
-            <a:pPr marL="342900" indent="-342900">
-              <a:spcAft>
-                <a:spcPts val="1000"/>
-              </a:spcAft>
-              <a:buSzPct val="100000"/>
-              <a:buChar char="•"/>
-            </a:pPr>
-            <a:r>
-              <a:rPr lang="en-US" sz="1500" dirty="0">
-                <a:solidFill>
-                  <a:srgbClr val="33373F"/>
-                </a:solidFill>
-                <a:latin typeface="Calibri" pitchFamily="34" charset="0"/>
-                <a:ea typeface="Calibri" pitchFamily="34" charset="-122"/>
-                <a:cs typeface="Calibri" pitchFamily="34" charset="-120"/>
-              </a:rPr>
-              <a:t>Horror clusters in October — its single biggest release month.</a:t>
-            </a:r>
-            <a:endParaRPr lang="en-US" sz="1500" dirty="0"/>
-          </a:p>
-          <a:p>
-            <a:pPr marL="342900" indent="-342900">
-              <a:spcAft>
-                <a:spcPts val="1000"/>
-              </a:spcAft>
-              <a:buSzPct val="100000"/>
-              <a:buChar char="•"/>
-            </a:pPr>
-            <a:r>
-              <a:rPr lang="en-US" sz="1500" b="1" dirty="0">
-                <a:solidFill>
-                  <a:srgbClr val="1A1A2E"/>
-                </a:solidFill>
-                <a:latin typeface="Calibri" pitchFamily="34" charset="0"/>
-                <a:ea typeface="Calibri" pitchFamily="34" charset="-122"/>
-                <a:cs typeface="Calibri" pitchFamily="34" charset="-120"/>
-              </a:rPr>
-              <a:t>These patterns become features the model can use.</a:t>
-            </a:r>
-            <a:endParaRPr lang="en-US" sz="1500" dirty="0"/>
-          </a:p>
-        </p:txBody>
-      </p:sp>
     </p:spTree>
   </p:cSld>
   <p:clrMapOvr>
@@ -6309,8 +5660,8 @@
         </p:nvSpPr>
         <p:spPr>
           <a:xfrm>
-            <a:off x="566928" y="310896"/>
-            <a:ext cx="10972800" cy="274320"/>
+            <a:off x="566928" y="274320"/>
+            <a:ext cx="10972800" cy="320040"/>
           </a:xfrm>
           <a:prstGeom prst="rect">
             <a:avLst/>
@@ -6326,7 +5677,7 @@
               <a:buNone/>
             </a:pPr>
             <a:r>
-              <a:rPr lang="en-US" sz="1200" b="1" spc="300" kern="0" dirty="0">
+              <a:rPr lang="en-US" sz="1400" b="1" spc="300" kern="0" dirty="0">
                 <a:solidFill>
                   <a:srgbClr val="E50914"/>
                 </a:solidFill>
@@ -6336,7 +5687,7 @@
               </a:rPr>
               <a:t>MACHINE LEARNING</a:t>
             </a:r>
-            <a:endParaRPr lang="en-US" sz="1200" dirty="0"/>
+            <a:endParaRPr lang="en-US" sz="1400" dirty="0"/>
           </a:p>
         </p:txBody>
       </p:sp>
@@ -6348,8 +5699,8 @@
         </p:nvSpPr>
         <p:spPr>
           <a:xfrm>
-            <a:off x="548640" y="603504"/>
-            <a:ext cx="11064240" cy="685800"/>
+            <a:off x="548640" y="566928"/>
+            <a:ext cx="11064240" cy="777240"/>
           </a:xfrm>
           <a:prstGeom prst="rect">
             <a:avLst/>
@@ -6365,7 +5716,7 @@
               <a:buNone/>
             </a:pPr>
             <a:r>
-              <a:rPr lang="en-US" sz="2800" b="1" dirty="0">
+              <a:rPr lang="en-US" sz="3400" b="1" dirty="0">
                 <a:solidFill>
                   <a:srgbClr val="1A1A2E"/>
                 </a:solidFill>
@@ -6373,9 +5724,9 @@
                 <a:ea typeface="Georgia" pitchFamily="34" charset="-122"/>
                 <a:cs typeface="Georgia" pitchFamily="34" charset="-120"/>
               </a:rPr>
-              <a:t>Approach — strictly pre-release features, no leakage</a:t>
-            </a:r>
-            <a:endParaRPr lang="en-US" sz="2800" dirty="0"/>
+              <a:t>Approach — no leakage</a:t>
+            </a:r>
+            <a:endParaRPr lang="en-US" sz="3400" dirty="0"/>
           </a:p>
         </p:txBody>
       </p:sp>
@@ -6387,8 +5738,8 @@
         </p:nvSpPr>
         <p:spPr>
           <a:xfrm>
-            <a:off x="640080" y="1600200"/>
-            <a:ext cx="5486400" cy="365760"/>
+            <a:off x="640080" y="1691640"/>
+            <a:ext cx="5486400" cy="457200"/>
           </a:xfrm>
           <a:prstGeom prst="rect">
             <a:avLst/>
@@ -6404,17 +5755,17 @@
               <a:buNone/>
             </a:pPr>
             <a:r>
-              <a:rPr lang="en-US" sz="1500" b="1" dirty="0">
-                <a:solidFill>
-                  <a:srgbClr val="E50914"/>
-                </a:solidFill>
-                <a:latin typeface="Calibri" pitchFamily="34" charset="0"/>
-                <a:ea typeface="Calibri" pitchFamily="34" charset="-122"/>
-                <a:cs typeface="Calibri" pitchFamily="34" charset="-120"/>
-              </a:rPr>
-              <a:t>16 input features, all knowable before release</a:t>
-            </a:r>
-            <a:endParaRPr lang="en-US" sz="1500" dirty="0"/>
+              <a:rPr lang="en-US" sz="2100" b="1" dirty="0">
+                <a:solidFill>
+                  <a:srgbClr val="2E7D32"/>
+                </a:solidFill>
+                <a:latin typeface="Calibri" pitchFamily="34" charset="0"/>
+                <a:ea typeface="Calibri" pitchFamily="34" charset="-122"/>
+                <a:cs typeface="Calibri" pitchFamily="34" charset="-120"/>
+              </a:rPr>
+              <a:t>16 features — all pre-release</a:t>
+            </a:r>
+            <a:endParaRPr lang="en-US" sz="2100" dirty="0"/>
           </a:p>
         </p:txBody>
       </p:sp>
@@ -6426,8 +5777,8 @@
         </p:nvSpPr>
         <p:spPr>
           <a:xfrm>
-            <a:off x="731520" y="2011680"/>
-            <a:ext cx="5486400" cy="2926080"/>
+            <a:off x="731520" y="2240280"/>
+            <a:ext cx="5486400" cy="3200400"/>
           </a:xfrm>
           <a:prstGeom prst="rect">
             <a:avLst/>
@@ -6441,13 +5792,13 @@
           <a:p>
             <a:pPr marL="342900" indent="-342900">
               <a:spcAft>
-                <a:spcPts val="1000"/>
+                <a:spcPts val="1600"/>
               </a:spcAft>
               <a:buSzPct val="100000"/>
               <a:buChar char="•"/>
             </a:pPr>
             <a:r>
-              <a:rPr lang="en-US" sz="1500" dirty="0">
+              <a:rPr lang="en-US" sz="2200" dirty="0">
                 <a:solidFill>
                   <a:srgbClr val="33373F"/>
                 </a:solidFill>
@@ -6455,20 +5806,20 @@
                 <a:ea typeface="Calibri" pitchFamily="34" charset="-122"/>
                 <a:cs typeface="Calibri" pitchFamily="34" charset="-120"/>
               </a:rPr>
-              <a:t>Financial: budget (log) · spend intensity (budget per minute)</a:t>
-            </a:r>
-            <a:endParaRPr lang="en-US" sz="1500" dirty="0"/>
+              <a:t>Financial:  budget · spend intensity</a:t>
+            </a:r>
+            <a:endParaRPr lang="en-US" sz="2200" dirty="0"/>
           </a:p>
           <a:p>
             <a:pPr marL="342900" indent="-342900">
               <a:spcAft>
-                <a:spcPts val="1000"/>
+                <a:spcPts val="1600"/>
               </a:spcAft>
               <a:buSzPct val="100000"/>
               <a:buChar char="•"/>
             </a:pPr>
             <a:r>
-              <a:rPr lang="en-US" sz="1500" dirty="0">
+              <a:rPr lang="en-US" sz="2200" dirty="0">
                 <a:solidFill>
                   <a:srgbClr val="33373F"/>
                 </a:solidFill>
@@ -6476,20 +5827,20 @@
                 <a:ea typeface="Calibri" pitchFamily="34" charset="-122"/>
                 <a:cs typeface="Calibri" pitchFamily="34" charset="-120"/>
               </a:rPr>
-              <a:t>Content: primary genre · runtime · # genres · language(s)</a:t>
-            </a:r>
-            <a:endParaRPr lang="en-US" sz="1500" dirty="0"/>
+              <a:t>Content:  genre · runtime · language</a:t>
+            </a:r>
+            <a:endParaRPr lang="en-US" sz="2200" dirty="0"/>
           </a:p>
           <a:p>
             <a:pPr marL="342900" indent="-342900">
               <a:spcAft>
-                <a:spcPts val="1000"/>
+                <a:spcPts val="1600"/>
               </a:spcAft>
               <a:buSzPct val="100000"/>
               <a:buChar char="•"/>
             </a:pPr>
             <a:r>
-              <a:rPr lang="en-US" sz="1500" dirty="0">
+              <a:rPr lang="en-US" sz="2200" dirty="0">
                 <a:solidFill>
                   <a:srgbClr val="33373F"/>
                 </a:solidFill>
@@ -6497,20 +5848,20 @@
                 <a:ea typeface="Calibri" pitchFamily="34" charset="-122"/>
                 <a:cs typeface="Calibri" pitchFamily="34" charset="-120"/>
               </a:rPr>
-              <a:t>Timing: release year · season · industry release window · genre-timing flags</a:t>
-            </a:r>
-            <a:endParaRPr lang="en-US" sz="1500" dirty="0"/>
+              <a:t>Timing:  year · season · window</a:t>
+            </a:r>
+            <a:endParaRPr lang="en-US" sz="2200" dirty="0"/>
           </a:p>
           <a:p>
             <a:pPr marL="342900" indent="-342900">
               <a:spcAft>
-                <a:spcPts val="1000"/>
+                <a:spcPts val="1600"/>
               </a:spcAft>
               <a:buSzPct val="100000"/>
               <a:buChar char="•"/>
             </a:pPr>
             <a:r>
-              <a:rPr lang="en-US" sz="1500" dirty="0">
+              <a:rPr lang="en-US" sz="2200" dirty="0">
                 <a:solidFill>
                   <a:srgbClr val="33373F"/>
                 </a:solidFill>
@@ -6518,9 +5869,9 @@
                 <a:ea typeface="Calibri" pitchFamily="34" charset="-122"/>
                 <a:cs typeface="Calibri" pitchFamily="34" charset="-120"/>
               </a:rPr>
-              <a:t>Production: # production companies · major-studio flag · sequel/franchise flag</a:t>
-            </a:r>
-            <a:endParaRPr lang="en-US" sz="1500" dirty="0"/>
+              <a:t>Production:  studios · sequel flag</a:t>
+            </a:r>
+            <a:endParaRPr lang="en-US" sz="2200" dirty="0"/>
           </a:p>
         </p:txBody>
       </p:sp>
@@ -6532,8 +5883,8 @@
         </p:nvSpPr>
         <p:spPr>
           <a:xfrm>
-            <a:off x="6583680" y="1600200"/>
-            <a:ext cx="4937760" cy="365760"/>
+            <a:off x="6583680" y="1691640"/>
+            <a:ext cx="5029200" cy="457200"/>
           </a:xfrm>
           <a:prstGeom prst="rect">
             <a:avLst/>
@@ -6549,17 +5900,17 @@
               <a:buNone/>
             </a:pPr>
             <a:r>
-              <a:rPr lang="en-US" sz="1500" b="1" dirty="0">
-                <a:solidFill>
-                  <a:srgbClr val="E50914"/>
-                </a:solidFill>
-                <a:latin typeface="Calibri" pitchFamily="34" charset="0"/>
-                <a:ea typeface="Calibri" pitchFamily="34" charset="-122"/>
-                <a:cs typeface="Calibri" pitchFamily="34" charset="-120"/>
-              </a:rPr>
-              <a:t>Deliberately excluded (leakage)</a:t>
-            </a:r>
-            <a:endParaRPr lang="en-US" sz="1500" dirty="0"/>
+              <a:rPr lang="en-US" sz="2100" b="1" dirty="0">
+                <a:solidFill>
+                  <a:srgbClr val="D1495B"/>
+                </a:solidFill>
+                <a:latin typeface="Calibri" pitchFamily="34" charset="0"/>
+                <a:ea typeface="Calibri" pitchFamily="34" charset="-122"/>
+                <a:cs typeface="Calibri" pitchFamily="34" charset="-120"/>
+              </a:rPr>
+              <a:t>Excluded (post-release)</a:t>
+            </a:r>
+            <a:endParaRPr lang="en-US" sz="2100" dirty="0"/>
           </a:p>
         </p:txBody>
       </p:sp>
@@ -6571,8 +5922,8 @@
         </p:nvSpPr>
         <p:spPr>
           <a:xfrm>
-            <a:off x="6675120" y="2011680"/>
-            <a:ext cx="4846320" cy="2926080"/>
+            <a:off x="6675120" y="2240280"/>
+            <a:ext cx="4937760" cy="3200400"/>
           </a:xfrm>
           <a:prstGeom prst="rect">
             <a:avLst/>
@@ -6586,13 +5937,13 @@
           <a:p>
             <a:pPr marL="342900" indent="-342900">
               <a:spcAft>
-                <a:spcPts val="1000"/>
+                <a:spcPts val="1600"/>
               </a:spcAft>
               <a:buSzPct val="100000"/>
               <a:buChar char="•"/>
             </a:pPr>
             <a:r>
-              <a:rPr lang="en-US" sz="1500" dirty="0">
+              <a:rPr lang="en-US" sz="2200" dirty="0">
                 <a:solidFill>
                   <a:srgbClr val="33373F"/>
                 </a:solidFill>
@@ -6600,20 +5951,20 @@
                 <a:ea typeface="Calibri" pitchFamily="34" charset="-122"/>
                 <a:cs typeface="Calibri" pitchFamily="34" charset="-120"/>
               </a:rPr>
-              <a:t>Revenue, ROI, profit — the outcome itself.</a:t>
-            </a:r>
-            <a:endParaRPr lang="en-US" sz="1500" dirty="0"/>
+              <a:t>Revenue · ROI · profit</a:t>
+            </a:r>
+            <a:endParaRPr lang="en-US" sz="2200" dirty="0"/>
           </a:p>
           <a:p>
             <a:pPr marL="342900" indent="-342900">
               <a:spcAft>
-                <a:spcPts val="1000"/>
+                <a:spcPts val="1600"/>
               </a:spcAft>
               <a:buSzPct val="100000"/>
               <a:buChar char="•"/>
             </a:pPr>
             <a:r>
-              <a:rPr lang="en-US" sz="1500" dirty="0">
+              <a:rPr lang="en-US" sz="2200" dirty="0">
                 <a:solidFill>
                   <a:srgbClr val="33373F"/>
                 </a:solidFill>
@@ -6621,20 +5972,20 @@
                 <a:ea typeface="Calibri" pitchFamily="34" charset="-122"/>
                 <a:cs typeface="Calibri" pitchFamily="34" charset="-120"/>
               </a:rPr>
-              <a:t>Popularity, ratings, vote counts — these only exist after release.</a:t>
-            </a:r>
-            <a:endParaRPr lang="en-US" sz="1500" dirty="0"/>
+              <a:t>Ratings · popularity · votes</a:t>
+            </a:r>
+            <a:endParaRPr lang="en-US" sz="2200" dirty="0"/>
           </a:p>
           <a:p>
             <a:pPr marL="342900" indent="-342900">
               <a:spcAft>
-                <a:spcPts val="1000"/>
+                <a:spcPts val="1600"/>
               </a:spcAft>
               <a:buSzPct val="100000"/>
               <a:buChar char="•"/>
             </a:pPr>
             <a:r>
-              <a:rPr lang="en-US" sz="1500" b="1" dirty="0">
+              <a:rPr lang="en-US" sz="2200" b="1" dirty="0">
                 <a:solidFill>
                   <a:srgbClr val="1A1A2E"/>
                 </a:solidFill>
@@ -6642,9 +5993,9 @@
                 <a:ea typeface="Calibri" pitchFamily="34" charset="-122"/>
                 <a:cs typeface="Calibri" pitchFamily="34" charset="-120"/>
               </a:rPr>
-              <a:t>The model only sees what a studio would know at the greenlight moment.</a:t>
-            </a:r>
-            <a:endParaRPr lang="en-US" sz="1500" dirty="0"/>
+              <a:t>Model sees only what a studio knows at greenlight</a:t>
+            </a:r>
+            <a:endParaRPr lang="en-US" sz="2200" dirty="0"/>
           </a:p>
         </p:txBody>
       </p:sp>
@@ -6656,8 +6007,8 @@
         </p:nvSpPr>
         <p:spPr>
           <a:xfrm>
-            <a:off x="640080" y="5120640"/>
-            <a:ext cx="10881360" cy="1005840"/>
+            <a:off x="640080" y="5577840"/>
+            <a:ext cx="10881360" cy="868680"/>
           </a:xfrm>
           <a:prstGeom prst="rect">
             <a:avLst/>
@@ -6681,8 +6032,8 @@
         </p:nvSpPr>
         <p:spPr>
           <a:xfrm>
-            <a:off x="914400" y="5120640"/>
-            <a:ext cx="10332720" cy="1005840"/>
+            <a:off x="914400" y="5577840"/>
+            <a:ext cx="10332720" cy="868680"/>
           </a:xfrm>
           <a:prstGeom prst="rect">
             <a:avLst/>
@@ -6698,7 +6049,7 @@
               <a:buNone/>
             </a:pPr>
             <a:r>
-              <a:rPr lang="en-US" sz="1400" b="1" dirty="0">
+              <a:rPr lang="en-US" sz="2000" b="1" dirty="0">
                 <a:solidFill>
                   <a:srgbClr val="1A1A2E"/>
                 </a:solidFill>
@@ -6712,7 +6063,7 @@
               <a:buNone/>
             </a:pPr>
             <a:r>
-              <a:rPr lang="en-US" sz="1400" dirty="0">
+              <a:rPr lang="en-US" sz="2000" dirty="0">
                 <a:solidFill>
                   <a:srgbClr val="33373F"/>
                 </a:solidFill>
@@ -6720,9 +6071,9 @@
                 <a:ea typeface="Calibri" pitchFamily="34" charset="-122"/>
                 <a:cs typeface="Calibri" pitchFamily="34" charset="-120"/>
               </a:rPr>
-              <a:t>stratified 80/20 train-test split (2,572 / 643 films) + 5-fold cross-validation · three classifiers: Logistic Regression, Random Forest (tuned), Gradient Boosting.</a:t>
-            </a:r>
-            <a:endParaRPr lang="en-US" sz="1400" dirty="0"/>
+              <a:t>80/20 split + 5-fold CV  ·  3 classifiers</a:t>
+            </a:r>
+            <a:endParaRPr lang="en-US" sz="2000" dirty="0"/>
           </a:p>
         </p:txBody>
       </p:sp>
@@ -6766,8 +6117,8 @@
         </p:nvSpPr>
         <p:spPr>
           <a:xfrm>
-            <a:off x="566928" y="310896"/>
-            <a:ext cx="10972800" cy="274320"/>
+            <a:off x="566928" y="274320"/>
+            <a:ext cx="10972800" cy="320040"/>
           </a:xfrm>
           <a:prstGeom prst="rect">
             <a:avLst/>
@@ -6783,7 +6134,7 @@
               <a:buNone/>
             </a:pPr>
             <a:r>
-              <a:rPr lang="en-US" sz="1200" b="1" spc="300" kern="0" dirty="0">
+              <a:rPr lang="en-US" sz="1400" b="1" spc="300" kern="0" dirty="0">
                 <a:solidFill>
                   <a:srgbClr val="E50914"/>
                 </a:solidFill>
@@ -6793,20 +6144,43 @@
               </a:rPr>
               <a:t>MACHINE LEARNING</a:t>
             </a:r>
-            <a:endParaRPr lang="en-US" sz="1200" dirty="0"/>
-          </a:p>
-        </p:txBody>
-      </p:sp>
-      <p:sp>
-        <p:nvSpPr>
-          <p:cNvPr id="3" name="Text 1"/>
-          <p:cNvSpPr/>
-          <p:nvPr/>
-        </p:nvSpPr>
-        <p:spPr>
-          <a:xfrm>
-            <a:off x="548640" y="603504"/>
-            <a:ext cx="11064240" cy="685800"/>
+            <a:endParaRPr lang="en-US" sz="1400" dirty="0"/>
+          </a:p>
+        </p:txBody>
+      </p:sp>
+      <p:pic>
+        <p:nvPicPr>
+          <p:cNvPr id="3" name="Image 0" descr="/sessions/optimistic-determined-edison/mnt/outputs/pres_figures/sequel_studio.png">    </p:cNvPr>
+          <p:cNvPicPr>
+            <a:picLocks noChangeAspect="1"/>
+          </p:cNvPicPr>
+          <p:nvPr/>
+        </p:nvPicPr>
+        <p:blipFill>
+          <a:blip r:embed="rId1"/>
+          <a:srcRect l="0" r="0" t="0" b="0"/>
+          <a:stretch/>
+        </p:blipFill>
+        <p:spPr>
+          <a:xfrm>
+            <a:off x="731520" y="685800"/>
+            <a:ext cx="10698480" cy="5394960"/>
+          </a:xfrm>
+          <a:prstGeom prst="rect">
+            <a:avLst/>
+          </a:prstGeom>
+        </p:spPr>
+      </p:pic>
+      <p:sp>
+        <p:nvSpPr>
+          <p:cNvPr id="4" name="Text 1"/>
+          <p:cNvSpPr/>
+          <p:nvPr/>
+        </p:nvSpPr>
+        <p:spPr>
+          <a:xfrm>
+            <a:off x="731520" y="6172200"/>
+            <a:ext cx="10698480" cy="457200"/>
           </a:xfrm>
           <a:prstGeom prst="rect">
             <a:avLst/>
@@ -6818,358 +6192,35 @@
           <a:bodyPr wrap="square" lIns="0" tIns="0" rIns="0" bIns="0" rtlCol="0" anchor="ctr"/>
           <a:lstStyle/>
           <a:p>
-            <a:pPr indent="0" marL="0">
-              <a:buNone/>
-            </a:pPr>
-            <a:r>
-              <a:rPr lang="en-US" sz="2800" b="1" dirty="0">
+            <a:pPr algn="ctr" indent="0" marL="0">
+              <a:buNone/>
+            </a:pPr>
+            <a:r>
+              <a:rPr lang="en-US" sz="1900" b="1" dirty="0">
                 <a:solidFill>
                   <a:srgbClr val="1A1A2E"/>
                 </a:solidFill>
-                <a:latin typeface="Georgia" pitchFamily="34" charset="0"/>
-                <a:ea typeface="Georgia" pitchFamily="34" charset="-122"/>
-                <a:cs typeface="Georgia" pitchFamily="34" charset="-120"/>
-              </a:rPr>
-              <a:t>Feature engineering — two signals that moved the needle</a:t>
-            </a:r>
-            <a:endParaRPr lang="en-US" sz="2800" dirty="0"/>
-          </a:p>
-        </p:txBody>
-      </p:sp>
-      <p:sp>
-        <p:nvSpPr>
-          <p:cNvPr id="4" name="Shape 2"/>
-          <p:cNvSpPr/>
-          <p:nvPr/>
-        </p:nvSpPr>
-        <p:spPr>
-          <a:xfrm>
-            <a:off x="640080" y="1691640"/>
-            <a:ext cx="5257800" cy="3108960"/>
-          </a:xfrm>
-          <a:prstGeom prst="rect">
-            <a:avLst/>
-          </a:prstGeom>
-          <a:solidFill>
-            <a:srgbClr val="F3F4F6"/>
-          </a:solidFill>
-          <a:ln w="12700">
-            <a:solidFill>
-              <a:srgbClr val="E3E6EA"/>
-            </a:solidFill>
-            <a:prstDash val="solid"/>
-          </a:ln>
-        </p:spPr>
-      </p:sp>
-      <p:sp>
-        <p:nvSpPr>
-          <p:cNvPr id="5" name="Text 3"/>
-          <p:cNvSpPr/>
-          <p:nvPr/>
-        </p:nvSpPr>
-        <p:spPr>
-          <a:xfrm>
-            <a:off x="914400" y="1920240"/>
-            <a:ext cx="4709160" cy="320040"/>
-          </a:xfrm>
-          <a:prstGeom prst="rect">
-            <a:avLst/>
-          </a:prstGeom>
-          <a:noFill/>
-          <a:ln/>
-        </p:spPr>
-        <p:txBody>
-          <a:bodyPr wrap="square" lIns="0" tIns="0" rIns="0" bIns="0" rtlCol="0" anchor="ctr"/>
-          <a:lstStyle/>
-          <a:p>
-            <a:pPr indent="0" marL="0">
-              <a:buNone/>
-            </a:pPr>
-            <a:r>
-              <a:rPr lang="en-US" sz="1300" b="1" spc="200" kern="0" dirty="0">
-                <a:solidFill>
-                  <a:srgbClr val="E50914"/>
-                </a:solidFill>
-                <a:latin typeface="Calibri" pitchFamily="34" charset="0"/>
-                <a:ea typeface="Calibri" pitchFamily="34" charset="-122"/>
-                <a:cs typeface="Calibri" pitchFamily="34" charset="-120"/>
-              </a:rPr>
-              <a:t>SEQUEL / FRANCHISE</a:t>
-            </a:r>
-            <a:endParaRPr lang="en-US" sz="1300" dirty="0"/>
-          </a:p>
-        </p:txBody>
-      </p:sp>
-      <p:sp>
-        <p:nvSpPr>
-          <p:cNvPr id="6" name="Text 4"/>
-          <p:cNvSpPr/>
-          <p:nvPr/>
-        </p:nvSpPr>
-        <p:spPr>
-          <a:xfrm>
-            <a:off x="914400" y="2286000"/>
-            <a:ext cx="4709160" cy="731520"/>
-          </a:xfrm>
-          <a:prstGeom prst="rect">
-            <a:avLst/>
-          </a:prstGeom>
-          <a:noFill/>
-          <a:ln/>
-        </p:spPr>
-        <p:txBody>
-          <a:bodyPr wrap="square" lIns="0" tIns="0" rIns="0" bIns="0" rtlCol="0" anchor="ctr"/>
-          <a:lstStyle/>
-          <a:p>
-            <a:pPr indent="0" marL="0">
-              <a:buNone/>
-            </a:pPr>
-            <a:r>
-              <a:rPr lang="en-US" sz="3400" b="1" dirty="0">
-                <a:solidFill>
-                  <a:srgbClr val="2E7D32"/>
-                </a:solidFill>
-                <a:latin typeface="Georgia" pitchFamily="34" charset="0"/>
-                <a:ea typeface="Georgia" pitchFamily="34" charset="-122"/>
-                <a:cs typeface="Georgia" pitchFamily="34" charset="-120"/>
-              </a:rPr>
-              <a:t>68% vs 54%</a:t>
-            </a:r>
-            <a:endParaRPr lang="en-US" sz="3400" dirty="0"/>
-          </a:p>
-        </p:txBody>
-      </p:sp>
-      <p:sp>
-        <p:nvSpPr>
-          <p:cNvPr id="7" name="Text 5"/>
-          <p:cNvSpPr/>
-          <p:nvPr/>
-        </p:nvSpPr>
-        <p:spPr>
-          <a:xfrm>
-            <a:off x="914400" y="3108960"/>
-            <a:ext cx="4709160" cy="1554480"/>
-          </a:xfrm>
-          <a:prstGeom prst="rect">
-            <a:avLst/>
-          </a:prstGeom>
-          <a:noFill/>
-          <a:ln/>
-        </p:spPr>
-        <p:txBody>
-          <a:bodyPr wrap="square" lIns="0" tIns="0" rIns="0" bIns="0" rtlCol="0" anchor="t"/>
-          <a:lstStyle/>
-          <a:p>
-            <a:pPr indent="0" marL="0">
-              <a:buNone/>
-            </a:pPr>
-            <a:r>
-              <a:rPr lang="en-US" sz="1400" dirty="0">
-                <a:solidFill>
-                  <a:srgbClr val="33373F"/>
-                </a:solidFill>
-                <a:latin typeface="Calibri" pitchFamily="34" charset="0"/>
-                <a:ea typeface="Calibri" pitchFamily="34" charset="-122"/>
-                <a:cs typeface="Calibri" pitchFamily="34" charset="-120"/>
-              </a:rPr>
-              <a:t>Detected from plot keywords (sequel, superhero, based on novel…) and title patterns (Part, 2, III…). Franchise films clear the bar far more often.</a:t>
-            </a:r>
-            <a:endParaRPr lang="en-US" sz="1400" dirty="0"/>
-          </a:p>
-        </p:txBody>
-      </p:sp>
-      <p:sp>
-        <p:nvSpPr>
-          <p:cNvPr id="8" name="Shape 6"/>
-          <p:cNvSpPr/>
-          <p:nvPr/>
-        </p:nvSpPr>
-        <p:spPr>
-          <a:xfrm>
-            <a:off x="6080760" y="1691640"/>
-            <a:ext cx="5257800" cy="3108960"/>
-          </a:xfrm>
-          <a:prstGeom prst="rect">
-            <a:avLst/>
-          </a:prstGeom>
-          <a:solidFill>
-            <a:srgbClr val="F3F4F6"/>
-          </a:solidFill>
-          <a:ln w="12700">
-            <a:solidFill>
-              <a:srgbClr val="E3E6EA"/>
-            </a:solidFill>
-            <a:prstDash val="solid"/>
-          </a:ln>
-        </p:spPr>
-      </p:sp>
-      <p:sp>
-        <p:nvSpPr>
-          <p:cNvPr id="9" name="Text 7"/>
-          <p:cNvSpPr/>
-          <p:nvPr/>
-        </p:nvSpPr>
-        <p:spPr>
-          <a:xfrm>
-            <a:off x="6355080" y="1920240"/>
-            <a:ext cx="4709160" cy="320040"/>
-          </a:xfrm>
-          <a:prstGeom prst="rect">
-            <a:avLst/>
-          </a:prstGeom>
-          <a:noFill/>
-          <a:ln/>
-        </p:spPr>
-        <p:txBody>
-          <a:bodyPr wrap="square" lIns="0" tIns="0" rIns="0" bIns="0" rtlCol="0" anchor="ctr"/>
-          <a:lstStyle/>
-          <a:p>
-            <a:pPr indent="0" marL="0">
-              <a:buNone/>
-            </a:pPr>
-            <a:r>
-              <a:rPr lang="en-US" sz="1300" b="1" spc="200" kern="0" dirty="0">
-                <a:solidFill>
-                  <a:srgbClr val="E50914"/>
-                </a:solidFill>
-                <a:latin typeface="Calibri" pitchFamily="34" charset="0"/>
-                <a:ea typeface="Calibri" pitchFamily="34" charset="-122"/>
-                <a:cs typeface="Calibri" pitchFamily="34" charset="-120"/>
-              </a:rPr>
-              <a:t>MAJOR STUDIO</a:t>
-            </a:r>
-            <a:endParaRPr lang="en-US" sz="1300" dirty="0"/>
-          </a:p>
-        </p:txBody>
-      </p:sp>
-      <p:sp>
-        <p:nvSpPr>
-          <p:cNvPr id="10" name="Text 8"/>
-          <p:cNvSpPr/>
-          <p:nvPr/>
-        </p:nvSpPr>
-        <p:spPr>
-          <a:xfrm>
-            <a:off x="6355080" y="2286000"/>
-            <a:ext cx="4709160" cy="731520"/>
-          </a:xfrm>
-          <a:prstGeom prst="rect">
-            <a:avLst/>
-          </a:prstGeom>
-          <a:noFill/>
-          <a:ln/>
-        </p:spPr>
-        <p:txBody>
-          <a:bodyPr wrap="square" lIns="0" tIns="0" rIns="0" bIns="0" rtlCol="0" anchor="ctr"/>
-          <a:lstStyle/>
-          <a:p>
-            <a:pPr indent="0" marL="0">
-              <a:buNone/>
-            </a:pPr>
-            <a:r>
-              <a:rPr lang="en-US" sz="3400" b="1" dirty="0">
-                <a:solidFill>
-                  <a:srgbClr val="2E7D32"/>
-                </a:solidFill>
-                <a:latin typeface="Georgia" pitchFamily="34" charset="0"/>
-                <a:ea typeface="Georgia" pitchFamily="34" charset="-122"/>
-                <a:cs typeface="Georgia" pitchFamily="34" charset="-120"/>
-              </a:rPr>
-              <a:t>61% vs 51%</a:t>
-            </a:r>
-            <a:endParaRPr lang="en-US" sz="3400" dirty="0"/>
-          </a:p>
-        </p:txBody>
-      </p:sp>
-      <p:sp>
-        <p:nvSpPr>
-          <p:cNvPr id="11" name="Text 9"/>
-          <p:cNvSpPr/>
-          <p:nvPr/>
-        </p:nvSpPr>
-        <p:spPr>
-          <a:xfrm>
-            <a:off x="6355080" y="3108960"/>
-            <a:ext cx="4709160" cy="1554480"/>
-          </a:xfrm>
-          <a:prstGeom prst="rect">
-            <a:avLst/>
-          </a:prstGeom>
-          <a:noFill/>
-          <a:ln/>
-        </p:spPr>
-        <p:txBody>
-          <a:bodyPr wrap="square" lIns="0" tIns="0" rIns="0" bIns="0" rtlCol="0" anchor="t"/>
-          <a:lstStyle/>
-          <a:p>
-            <a:pPr indent="0" marL="0">
-              <a:buNone/>
-            </a:pPr>
-            <a:r>
-              <a:rPr lang="en-US" sz="1400" dirty="0">
-                <a:solidFill>
-                  <a:srgbClr val="33373F"/>
-                </a:solidFill>
-                <a:latin typeface="Calibri" pitchFamily="34" charset="0"/>
-                <a:ea typeface="Calibri" pitchFamily="34" charset="-122"/>
-                <a:cs typeface="Calibri" pitchFamily="34" charset="-120"/>
-              </a:rPr>
-              <a:t>Whether a major (Disney, Warner Bros., Universal…) produced the film — distribution muscle and marketing reach show up in outcomes.</a:t>
-            </a:r>
-            <a:endParaRPr lang="en-US" sz="1400" dirty="0"/>
-          </a:p>
-        </p:txBody>
-      </p:sp>
-      <p:sp>
-        <p:nvSpPr>
-          <p:cNvPr id="12" name="Text 10"/>
-          <p:cNvSpPr/>
-          <p:nvPr/>
-        </p:nvSpPr>
-        <p:spPr>
-          <a:xfrm>
-            <a:off x="640080" y="5120640"/>
-            <a:ext cx="10881360" cy="731520"/>
-          </a:xfrm>
-          <a:prstGeom prst="rect">
-            <a:avLst/>
-          </a:prstGeom>
-          <a:noFill/>
-          <a:ln/>
-        </p:spPr>
-        <p:txBody>
-          <a:bodyPr wrap="square" lIns="0" tIns="0" rIns="0" bIns="0" rtlCol="0" anchor="t"/>
-          <a:lstStyle/>
-          <a:p>
-            <a:pPr indent="0" marL="0">
-              <a:buNone/>
-            </a:pPr>
-            <a:r>
-              <a:rPr lang="en-US" sz="1500" b="1" dirty="0">
-                <a:solidFill>
-                  <a:srgbClr val="1A1A2E"/>
-                </a:solidFill>
-                <a:latin typeface="Calibri" pitchFamily="34" charset="0"/>
-                <a:ea typeface="Calibri" pitchFamily="34" charset="-122"/>
-                <a:cs typeface="Calibri" pitchFamily="34" charset="-120"/>
-              </a:rPr>
-              <a:t>Also added:  </a:t>
-            </a:r>
-            <a:pPr indent="0" marL="0">
-              <a:buNone/>
-            </a:pPr>
-            <a:r>
-              <a:rPr lang="en-US" sz="1500" dirty="0">
-                <a:solidFill>
-                  <a:srgbClr val="33373F"/>
-                </a:solidFill>
-                <a:latin typeface="Calibri" pitchFamily="34" charset="0"/>
-                <a:ea typeface="Calibri" pitchFamily="34" charset="-122"/>
-                <a:cs typeface="Calibri" pitchFamily="34" charset="-120"/>
-              </a:rPr>
-              <a:t>release year (era effects) and spend intensity (budget ÷ runtime). Together these lifted test ROC-AUC from 0.66 to 0.71.</a:t>
-            </a:r>
-            <a:endParaRPr lang="en-US" sz="1500" dirty="0"/>
+                <a:latin typeface="Calibri" pitchFamily="34" charset="0"/>
+                <a:ea typeface="Calibri" pitchFamily="34" charset="-122"/>
+                <a:cs typeface="Calibri" pitchFamily="34" charset="-120"/>
+              </a:rPr>
+              <a:t>Sequels: +14 pts  ·  Major studios: +10 pts  ·  </a:t>
+            </a:r>
+            <a:pPr algn="ctr" indent="0" marL="0">
+              <a:buNone/>
+            </a:pPr>
+            <a:r>
+              <a:rPr lang="en-US" sz="1900" dirty="0">
+                <a:solidFill>
+                  <a:srgbClr val="5B6472"/>
+                </a:solidFill>
+                <a:latin typeface="Calibri" pitchFamily="34" charset="0"/>
+                <a:ea typeface="Calibri" pitchFamily="34" charset="-122"/>
+                <a:cs typeface="Calibri" pitchFamily="34" charset="-120"/>
+              </a:rPr>
+              <a:t>with year + spend intensity → AUC 0.66 → 0.71</a:t>
+            </a:r>
+            <a:endParaRPr lang="en-US" sz="1900" dirty="0"/>
           </a:p>
         </p:txBody>
       </p:sp>
